--- a/ai_exam_project/Clahan-Academy.pptx
+++ b/ai_exam_project/Clahan-Academy.pptx
@@ -5,37 +5,39 @@
     <p:sldMasterId id="2147483651" r:id="rId1"/>
   </p:sldMasterIdLst>
   <p:notesMasterIdLst>
-    <p:notesMasterId r:id="rId17"/>
+    <p:notesMasterId r:id="rId19"/>
   </p:notesMasterIdLst>
   <p:sldIdLst>
     <p:sldId id="256" r:id="rId2"/>
     <p:sldId id="257" r:id="rId3"/>
-    <p:sldId id="258" r:id="rId4"/>
-    <p:sldId id="259" r:id="rId5"/>
-    <p:sldId id="260" r:id="rId6"/>
-    <p:sldId id="261" r:id="rId7"/>
-    <p:sldId id="262" r:id="rId8"/>
-    <p:sldId id="263" r:id="rId9"/>
-    <p:sldId id="264" r:id="rId10"/>
-    <p:sldId id="265" r:id="rId11"/>
-    <p:sldId id="266" r:id="rId12"/>
-    <p:sldId id="267" r:id="rId13"/>
-    <p:sldId id="268" r:id="rId14"/>
-    <p:sldId id="269" r:id="rId15"/>
-    <p:sldId id="270" r:id="rId16"/>
+    <p:sldId id="271" r:id="rId4"/>
+    <p:sldId id="272" r:id="rId5"/>
+    <p:sldId id="258" r:id="rId6"/>
+    <p:sldId id="259" r:id="rId7"/>
+    <p:sldId id="260" r:id="rId8"/>
+    <p:sldId id="261" r:id="rId9"/>
+    <p:sldId id="262" r:id="rId10"/>
+    <p:sldId id="263" r:id="rId11"/>
+    <p:sldId id="264" r:id="rId12"/>
+    <p:sldId id="265" r:id="rId13"/>
+    <p:sldId id="266" r:id="rId14"/>
+    <p:sldId id="267" r:id="rId15"/>
+    <p:sldId id="268" r:id="rId16"/>
+    <p:sldId id="269" r:id="rId17"/>
+    <p:sldId id="270" r:id="rId18"/>
   </p:sldIdLst>
   <p:sldSz cx="9144000" cy="5143500" type="screen16x9"/>
   <p:notesSz cx="5143500" cy="9144000"/>
   <p:embeddedFontLst>
     <p:embeddedFont>
       <p:font typeface="Raleway" pitchFamily="2" charset="0"/>
-      <p:regular r:id="rId18"/>
+      <p:regular r:id="rId20"/>
     </p:embeddedFont>
     <p:embeddedFont>
       <p:font typeface="Roboto" panose="02000000000000000000" pitchFamily="2" charset="0"/>
-      <p:regular r:id="rId19"/>
-      <p:bold r:id="rId20"/>
-      <p:italic r:id="rId21"/>
+      <p:regular r:id="rId21"/>
+      <p:bold r:id="rId22"/>
+      <p:italic r:id="rId23"/>
     </p:embeddedFont>
   </p:embeddedFontLst>
   <p:defaultTextStyle>
@@ -415,7 +417,7 @@
           <a:p>
             <a:fld id="{F7021451-1387-4CA6-816F-3879F97B5CBC}" type="slidenum">
               <a:rPr lang="en-US"/>
-              <a:t>10</a:t>
+              <a:t>12</a:t>
             </a:fld>
             <a:endParaRPr lang="en-US"/>
           </a:p>
@@ -499,7 +501,7 @@
           <a:p>
             <a:fld id="{F7021451-1387-4CA6-816F-3879F97B5CBC}" type="slidenum">
               <a:rPr lang="en-US"/>
-              <a:t>11</a:t>
+              <a:t>13</a:t>
             </a:fld>
             <a:endParaRPr lang="en-US"/>
           </a:p>
@@ -583,7 +585,7 @@
           <a:p>
             <a:fld id="{F7021451-1387-4CA6-816F-3879F97B5CBC}" type="slidenum">
               <a:rPr lang="en-US"/>
-              <a:t>12</a:t>
+              <a:t>14</a:t>
             </a:fld>
             <a:endParaRPr lang="en-US"/>
           </a:p>
@@ -667,7 +669,7 @@
           <a:p>
             <a:fld id="{F7021451-1387-4CA6-816F-3879F97B5CBC}" type="slidenum">
               <a:rPr lang="en-US"/>
-              <a:t>13</a:t>
+              <a:t>15</a:t>
             </a:fld>
             <a:endParaRPr lang="en-US"/>
           </a:p>
@@ -751,7 +753,7 @@
           <a:p>
             <a:fld id="{F7021451-1387-4CA6-816F-3879F97B5CBC}" type="slidenum">
               <a:rPr lang="en-US"/>
-              <a:t>14</a:t>
+              <a:t>16</a:t>
             </a:fld>
             <a:endParaRPr lang="en-US"/>
           </a:p>
@@ -835,7 +837,7 @@
           <a:p>
             <a:fld id="{F7021451-1387-4CA6-816F-3879F97B5CBC}" type="slidenum">
               <a:rPr lang="en-US"/>
-              <a:t>15</a:t>
+              <a:t>17</a:t>
             </a:fld>
             <a:endParaRPr lang="en-US"/>
           </a:p>
@@ -1003,7 +1005,7 @@
           <a:p>
             <a:fld id="{F7021451-1387-4CA6-816F-3879F97B5CBC}" type="slidenum">
               <a:rPr lang="en-US"/>
-              <a:t>3</a:t>
+              <a:t>5</a:t>
             </a:fld>
             <a:endParaRPr lang="en-US"/>
           </a:p>
@@ -1087,7 +1089,7 @@
           <a:p>
             <a:fld id="{F7021451-1387-4CA6-816F-3879F97B5CBC}" type="slidenum">
               <a:rPr lang="en-US"/>
-              <a:t>4</a:t>
+              <a:t>6</a:t>
             </a:fld>
             <a:endParaRPr lang="en-US"/>
           </a:p>
@@ -1171,7 +1173,7 @@
           <a:p>
             <a:fld id="{F7021451-1387-4CA6-816F-3879F97B5CBC}" type="slidenum">
               <a:rPr lang="en-US"/>
-              <a:t>5</a:t>
+              <a:t>7</a:t>
             </a:fld>
             <a:endParaRPr lang="en-US"/>
           </a:p>
@@ -1255,7 +1257,7 @@
           <a:p>
             <a:fld id="{F7021451-1387-4CA6-816F-3879F97B5CBC}" type="slidenum">
               <a:rPr lang="en-US"/>
-              <a:t>6</a:t>
+              <a:t>8</a:t>
             </a:fld>
             <a:endParaRPr lang="en-US"/>
           </a:p>
@@ -1339,7 +1341,7 @@
           <a:p>
             <a:fld id="{F7021451-1387-4CA6-816F-3879F97B5CBC}" type="slidenum">
               <a:rPr lang="en-US"/>
-              <a:t>7</a:t>
+              <a:t>9</a:t>
             </a:fld>
             <a:endParaRPr lang="en-US"/>
           </a:p>
@@ -1423,7 +1425,7 @@
           <a:p>
             <a:fld id="{F7021451-1387-4CA6-816F-3879F97B5CBC}" type="slidenum">
               <a:rPr lang="en-US"/>
-              <a:t>8</a:t>
+              <a:t>10</a:t>
             </a:fld>
             <a:endParaRPr lang="en-US"/>
           </a:p>
@@ -1507,7 +1509,7 @@
           <a:p>
             <a:fld id="{F7021451-1387-4CA6-816F-3879F97B5CBC}" type="slidenum">
               <a:rPr lang="en-US"/>
-              <a:t>9</a:t>
+              <a:t>11</a:t>
             </a:fld>
             <a:endParaRPr lang="en-US"/>
           </a:p>
@@ -4943,6 +4945,1741 @@
 
 <file path=ppt/slides/slide10.xml><?xml version="1.0" encoding="utf-8"?>
 <p:sld xmlns:a="http://schemas.openxmlformats.org/drawingml/2006/main" xmlns:r="http://schemas.openxmlformats.org/officeDocument/2006/relationships" xmlns:p="http://schemas.openxmlformats.org/presentationml/2006/main">
+  <p:cSld name="Slide 8">
+    <p:spTree>
+      <p:nvGrpSpPr>
+        <p:cNvPr id="1" name=""/>
+        <p:cNvGrpSpPr/>
+        <p:nvPr/>
+      </p:nvGrpSpPr>
+      <p:grpSpPr>
+        <a:xfrm>
+          <a:off x="0" y="0"/>
+          <a:ext cx="0" cy="0"/>
+          <a:chOff x="0" y="0"/>
+          <a:chExt cx="0" cy="0"/>
+        </a:xfrm>
+      </p:grpSpPr>
+      <p:sp>
+        <p:nvSpPr>
+          <p:cNvPr id="2" name="Text 0"/>
+          <p:cNvSpPr/>
+          <p:nvPr/>
+        </p:nvSpPr>
+        <p:spPr>
+          <a:xfrm>
+            <a:off x="1133029" y="274886"/>
+            <a:ext cx="4085704" cy="311497"/>
+          </a:xfrm>
+          <a:prstGeom prst="rect">
+            <a:avLst/>
+          </a:prstGeom>
+          <a:noFill/>
+          <a:ln/>
+        </p:spPr>
+        <p:txBody>
+          <a:bodyPr wrap="none" lIns="0" tIns="0" rIns="0" bIns="0" rtlCol="0" anchor="t"/>
+          <a:lstStyle/>
+          <a:p>
+            <a:pPr marL="0" indent="0" algn="l">
+              <a:lnSpc>
+                <a:spcPct val="104000"/>
+              </a:lnSpc>
+              <a:buNone/>
+            </a:pPr>
+            <a:r>
+              <a:rPr lang="en-US" sz="2400" dirty="0">
+                <a:solidFill>
+                  <a:srgbClr val="1B1B27"/>
+                </a:solidFill>
+                <a:latin typeface="Times New Roman" panose="02020603050405020304" pitchFamily="18" charset="0"/>
+                <a:ea typeface="Raleway" pitchFamily="34" charset="-122"/>
+                <a:cs typeface="Times New Roman" panose="02020603050405020304" pitchFamily="18" charset="0"/>
+              </a:rPr>
+              <a:t>Disaster Recovery (DR) Strategy</a:t>
+            </a:r>
+            <a:endParaRPr lang="en-US" sz="2400" dirty="0">
+              <a:latin typeface="Times New Roman" panose="02020603050405020304" pitchFamily="18" charset="0"/>
+              <a:cs typeface="Times New Roman" panose="02020603050405020304" pitchFamily="18" charset="0"/>
+            </a:endParaRPr>
+          </a:p>
+        </p:txBody>
+      </p:sp>
+      <p:sp>
+        <p:nvSpPr>
+          <p:cNvPr id="3" name="Text 1"/>
+          <p:cNvSpPr/>
+          <p:nvPr/>
+        </p:nvSpPr>
+        <p:spPr>
+          <a:xfrm>
+            <a:off x="1133029" y="614363"/>
+            <a:ext cx="2627858" cy="155674"/>
+          </a:xfrm>
+          <a:prstGeom prst="rect">
+            <a:avLst/>
+          </a:prstGeom>
+          <a:noFill/>
+          <a:ln/>
+        </p:spPr>
+        <p:txBody>
+          <a:bodyPr wrap="none" lIns="0" tIns="0" rIns="0" bIns="0" rtlCol="0" anchor="t"/>
+          <a:lstStyle/>
+          <a:p>
+            <a:pPr marL="0" indent="0" algn="l">
+              <a:lnSpc>
+                <a:spcPct val="104000"/>
+              </a:lnSpc>
+              <a:buNone/>
+            </a:pPr>
+            <a:r>
+              <a:rPr lang="en-US" sz="1050" dirty="0">
+                <a:solidFill>
+                  <a:srgbClr val="1B1B27"/>
+                </a:solidFill>
+                <a:latin typeface="Times New Roman" panose="02020603050405020304" pitchFamily="18" charset="0"/>
+                <a:ea typeface="Raleway" pitchFamily="34" charset="-122"/>
+                <a:cs typeface="Times New Roman" panose="02020603050405020304" pitchFamily="18" charset="0"/>
+              </a:rPr>
+              <a:t>Active‑Standby Cross‑Region Failover</a:t>
+            </a:r>
+            <a:endParaRPr lang="en-US" sz="1050" dirty="0">
+              <a:latin typeface="Times New Roman" panose="02020603050405020304" pitchFamily="18" charset="0"/>
+              <a:cs typeface="Times New Roman" panose="02020603050405020304" pitchFamily="18" charset="0"/>
+            </a:endParaRPr>
+          </a:p>
+        </p:txBody>
+      </p:sp>
+      <p:pic>
+        <p:nvPicPr>
+          <p:cNvPr id="4" name="Image 0" descr="preencoded.png"/>
+          <p:cNvPicPr>
+            <a:picLocks noChangeAspect="1"/>
+          </p:cNvPicPr>
+          <p:nvPr/>
+        </p:nvPicPr>
+        <p:blipFill>
+          <a:blip r:embed="rId3"/>
+          <a:stretch>
+            <a:fillRect/>
+          </a:stretch>
+        </p:blipFill>
+        <p:spPr>
+          <a:xfrm>
+            <a:off x="1133029" y="875109"/>
+            <a:ext cx="6877869" cy="3095030"/>
+          </a:xfrm>
+          <a:prstGeom prst="rect">
+            <a:avLst/>
+          </a:prstGeom>
+        </p:spPr>
+      </p:pic>
+      <p:sp>
+        <p:nvSpPr>
+          <p:cNvPr id="5" name="Text 2"/>
+          <p:cNvSpPr/>
+          <p:nvPr/>
+        </p:nvSpPr>
+        <p:spPr>
+          <a:xfrm>
+            <a:off x="2169057" y="1025769"/>
+            <a:ext cx="1203623" cy="185999"/>
+          </a:xfrm>
+          <a:prstGeom prst="rect">
+            <a:avLst/>
+          </a:prstGeom>
+          <a:noFill/>
+          <a:ln/>
+        </p:spPr>
+        <p:txBody>
+          <a:bodyPr wrap="none" lIns="0" tIns="0" rIns="0" bIns="0" rtlCol="0" anchor="t"/>
+          <a:lstStyle/>
+          <a:p>
+            <a:pPr marL="0" indent="0" algn="ctr">
+              <a:lnSpc>
+                <a:spcPct val="104000"/>
+              </a:lnSpc>
+              <a:buNone/>
+            </a:pPr>
+            <a:r>
+              <a:rPr lang="en-US" sz="1400" dirty="0">
+                <a:solidFill>
+                  <a:srgbClr val="3C3939"/>
+                </a:solidFill>
+                <a:latin typeface="Times New Roman" panose="02020603050405020304" pitchFamily="18" charset="0"/>
+                <a:ea typeface="Raleway" pitchFamily="34" charset="-122"/>
+                <a:cs typeface="Times New Roman" panose="02020603050405020304" pitchFamily="18" charset="0"/>
+              </a:rPr>
+              <a:t>Primary Down</a:t>
+            </a:r>
+            <a:endParaRPr lang="en-US" sz="1400" dirty="0">
+              <a:latin typeface="Times New Roman" panose="02020603050405020304" pitchFamily="18" charset="0"/>
+              <a:cs typeface="Times New Roman" panose="02020603050405020304" pitchFamily="18" charset="0"/>
+            </a:endParaRPr>
+          </a:p>
+        </p:txBody>
+      </p:sp>
+      <p:sp>
+        <p:nvSpPr>
+          <p:cNvPr id="6" name="Text 3"/>
+          <p:cNvSpPr/>
+          <p:nvPr/>
+        </p:nvSpPr>
+        <p:spPr>
+          <a:xfrm>
+            <a:off x="2169057" y="1264675"/>
+            <a:ext cx="1203623" cy="253372"/>
+          </a:xfrm>
+          <a:prstGeom prst="rect">
+            <a:avLst/>
+          </a:prstGeom>
+          <a:noFill/>
+          <a:ln/>
+        </p:spPr>
+        <p:txBody>
+          <a:bodyPr wrap="square" lIns="0" tIns="0" rIns="0" bIns="0" rtlCol="0" anchor="t">
+            <a:noAutofit/>
+          </a:bodyPr>
+          <a:lstStyle/>
+          <a:p>
+            <a:pPr marL="0" indent="0" algn="ctr">
+              <a:lnSpc>
+                <a:spcPct val="89000"/>
+              </a:lnSpc>
+              <a:buNone/>
+            </a:pPr>
+            <a:r>
+              <a:rPr lang="en-US" sz="1050" dirty="0">
+                <a:solidFill>
+                  <a:srgbClr val="3C3939"/>
+                </a:solidFill>
+                <a:latin typeface="Times New Roman" panose="02020603050405020304" pitchFamily="18" charset="0"/>
+                <a:ea typeface="Roboto" pitchFamily="34" charset="-122"/>
+                <a:cs typeface="Times New Roman" panose="02020603050405020304" pitchFamily="18" charset="0"/>
+              </a:rPr>
+              <a:t>T+0 primary failure detected</a:t>
+            </a:r>
+            <a:endParaRPr lang="en-US" sz="1050" dirty="0">
+              <a:latin typeface="Times New Roman" panose="02020603050405020304" pitchFamily="18" charset="0"/>
+              <a:cs typeface="Times New Roman" panose="02020603050405020304" pitchFamily="18" charset="0"/>
+            </a:endParaRPr>
+          </a:p>
+        </p:txBody>
+      </p:sp>
+      <p:sp>
+        <p:nvSpPr>
+          <p:cNvPr id="7" name="Text 4"/>
+          <p:cNvSpPr/>
+          <p:nvPr/>
+        </p:nvSpPr>
+        <p:spPr>
+          <a:xfrm>
+            <a:off x="3359454" y="3347041"/>
+            <a:ext cx="1210236" cy="185999"/>
+          </a:xfrm>
+          <a:prstGeom prst="rect">
+            <a:avLst/>
+          </a:prstGeom>
+          <a:noFill/>
+          <a:ln/>
+        </p:spPr>
+        <p:txBody>
+          <a:bodyPr wrap="none" lIns="0" tIns="0" rIns="0" bIns="0" rtlCol="0" anchor="t"/>
+          <a:lstStyle/>
+          <a:p>
+            <a:pPr marL="0" indent="0" algn="ctr">
+              <a:lnSpc>
+                <a:spcPct val="104000"/>
+              </a:lnSpc>
+              <a:buNone/>
+            </a:pPr>
+            <a:r>
+              <a:rPr lang="en-US" sz="1400" dirty="0">
+                <a:solidFill>
+                  <a:srgbClr val="3C3939"/>
+                </a:solidFill>
+                <a:latin typeface="Times New Roman" panose="02020603050405020304" pitchFamily="18" charset="0"/>
+                <a:ea typeface="Raleway" pitchFamily="34" charset="-122"/>
+                <a:cs typeface="Times New Roman" panose="02020603050405020304" pitchFamily="18" charset="0"/>
+              </a:rPr>
+              <a:t>Probe Detects</a:t>
+            </a:r>
+            <a:endParaRPr lang="en-US" sz="1400" dirty="0">
+              <a:latin typeface="Times New Roman" panose="02020603050405020304" pitchFamily="18" charset="0"/>
+              <a:cs typeface="Times New Roman" panose="02020603050405020304" pitchFamily="18" charset="0"/>
+            </a:endParaRPr>
+          </a:p>
+        </p:txBody>
+      </p:sp>
+      <p:sp>
+        <p:nvSpPr>
+          <p:cNvPr id="8" name="Text 5"/>
+          <p:cNvSpPr/>
+          <p:nvPr/>
+        </p:nvSpPr>
+        <p:spPr>
+          <a:xfrm>
+            <a:off x="3359454" y="3585947"/>
+            <a:ext cx="1210236" cy="253372"/>
+          </a:xfrm>
+          <a:prstGeom prst="rect">
+            <a:avLst/>
+          </a:prstGeom>
+          <a:noFill/>
+          <a:ln/>
+        </p:spPr>
+        <p:txBody>
+          <a:bodyPr wrap="square" lIns="0" tIns="0" rIns="0" bIns="0" rtlCol="0" anchor="t">
+            <a:noAutofit/>
+          </a:bodyPr>
+          <a:lstStyle/>
+          <a:p>
+            <a:pPr marL="0" indent="0" algn="ctr">
+              <a:lnSpc>
+                <a:spcPct val="89000"/>
+              </a:lnSpc>
+              <a:buNone/>
+            </a:pPr>
+            <a:r>
+              <a:rPr lang="en-US" sz="1050" dirty="0">
+                <a:solidFill>
+                  <a:srgbClr val="3C3939"/>
+                </a:solidFill>
+                <a:latin typeface="Times New Roman" panose="02020603050405020304" pitchFamily="18" charset="0"/>
+                <a:ea typeface="Roboto" pitchFamily="34" charset="-122"/>
+                <a:cs typeface="Times New Roman" panose="02020603050405020304" pitchFamily="18" charset="0"/>
+              </a:rPr>
+              <a:t>T+30s Front Door health probe</a:t>
+            </a:r>
+            <a:endParaRPr lang="en-US" sz="1050" dirty="0">
+              <a:latin typeface="Times New Roman" panose="02020603050405020304" pitchFamily="18" charset="0"/>
+              <a:cs typeface="Times New Roman" panose="02020603050405020304" pitchFamily="18" charset="0"/>
+            </a:endParaRPr>
+          </a:p>
+        </p:txBody>
+      </p:sp>
+      <p:sp>
+        <p:nvSpPr>
+          <p:cNvPr id="9" name="Text 6"/>
+          <p:cNvSpPr/>
+          <p:nvPr/>
+        </p:nvSpPr>
+        <p:spPr>
+          <a:xfrm>
+            <a:off x="4536623" y="1002622"/>
+            <a:ext cx="1203623" cy="185999"/>
+          </a:xfrm>
+          <a:prstGeom prst="rect">
+            <a:avLst/>
+          </a:prstGeom>
+          <a:noFill/>
+          <a:ln/>
+        </p:spPr>
+        <p:txBody>
+          <a:bodyPr wrap="none" lIns="0" tIns="0" rIns="0" bIns="0" rtlCol="0" anchor="t"/>
+          <a:lstStyle/>
+          <a:p>
+            <a:pPr marL="0" indent="0" algn="ctr">
+              <a:lnSpc>
+                <a:spcPct val="104000"/>
+              </a:lnSpc>
+              <a:buNone/>
+            </a:pPr>
+            <a:r>
+              <a:rPr lang="en-US" sz="1400" dirty="0">
+                <a:solidFill>
+                  <a:srgbClr val="3C3939"/>
+                </a:solidFill>
+                <a:latin typeface="Times New Roman" panose="02020603050405020304" pitchFamily="18" charset="0"/>
+                <a:ea typeface="Raleway" pitchFamily="34" charset="-122"/>
+                <a:cs typeface="Times New Roman" panose="02020603050405020304" pitchFamily="18" charset="0"/>
+              </a:rPr>
+              <a:t>Traffic Routed</a:t>
+            </a:r>
+            <a:endParaRPr lang="en-US" sz="1400" dirty="0">
+              <a:latin typeface="Times New Roman" panose="02020603050405020304" pitchFamily="18" charset="0"/>
+              <a:cs typeface="Times New Roman" panose="02020603050405020304" pitchFamily="18" charset="0"/>
+            </a:endParaRPr>
+          </a:p>
+        </p:txBody>
+      </p:sp>
+      <p:sp>
+        <p:nvSpPr>
+          <p:cNvPr id="10" name="Text 7"/>
+          <p:cNvSpPr/>
+          <p:nvPr/>
+        </p:nvSpPr>
+        <p:spPr>
+          <a:xfrm>
+            <a:off x="4536623" y="1241528"/>
+            <a:ext cx="1203623" cy="253372"/>
+          </a:xfrm>
+          <a:prstGeom prst="rect">
+            <a:avLst/>
+          </a:prstGeom>
+          <a:noFill/>
+          <a:ln/>
+        </p:spPr>
+        <p:txBody>
+          <a:bodyPr wrap="square" lIns="0" tIns="0" rIns="0" bIns="0" rtlCol="0" anchor="t">
+            <a:noAutofit/>
+          </a:bodyPr>
+          <a:lstStyle/>
+          <a:p>
+            <a:pPr marL="0" indent="0" algn="ctr">
+              <a:lnSpc>
+                <a:spcPct val="89000"/>
+              </a:lnSpc>
+              <a:buNone/>
+            </a:pPr>
+            <a:r>
+              <a:rPr lang="en-US" sz="1050" dirty="0">
+                <a:solidFill>
+                  <a:srgbClr val="3C3939"/>
+                </a:solidFill>
+                <a:latin typeface="Times New Roman" panose="02020603050405020304" pitchFamily="18" charset="0"/>
+                <a:ea typeface="Roboto" pitchFamily="34" charset="-122"/>
+                <a:cs typeface="Times New Roman" panose="02020603050405020304" pitchFamily="18" charset="0"/>
+              </a:rPr>
+              <a:t>T+60s route to standby</a:t>
+            </a:r>
+            <a:endParaRPr lang="en-US" sz="1050" dirty="0">
+              <a:latin typeface="Times New Roman" panose="02020603050405020304" pitchFamily="18" charset="0"/>
+              <a:cs typeface="Times New Roman" panose="02020603050405020304" pitchFamily="18" charset="0"/>
+            </a:endParaRPr>
+          </a:p>
+        </p:txBody>
+      </p:sp>
+      <p:sp>
+        <p:nvSpPr>
+          <p:cNvPr id="11" name="Text 8"/>
+          <p:cNvSpPr/>
+          <p:nvPr/>
+        </p:nvSpPr>
+        <p:spPr>
+          <a:xfrm>
+            <a:off x="5727019" y="3347041"/>
+            <a:ext cx="1203622" cy="185999"/>
+          </a:xfrm>
+          <a:prstGeom prst="rect">
+            <a:avLst/>
+          </a:prstGeom>
+          <a:noFill/>
+          <a:ln/>
+        </p:spPr>
+        <p:txBody>
+          <a:bodyPr wrap="none" lIns="0" tIns="0" rIns="0" bIns="0" rtlCol="0" anchor="t"/>
+          <a:lstStyle/>
+          <a:p>
+            <a:pPr marL="0" indent="0" algn="ctr">
+              <a:lnSpc>
+                <a:spcPct val="104000"/>
+              </a:lnSpc>
+              <a:buNone/>
+            </a:pPr>
+            <a:r>
+              <a:rPr lang="en-US" sz="1400" dirty="0">
+                <a:solidFill>
+                  <a:srgbClr val="3C3939"/>
+                </a:solidFill>
+                <a:latin typeface="Times New Roman" panose="02020603050405020304" pitchFamily="18" charset="0"/>
+                <a:ea typeface="Raleway" pitchFamily="34" charset="-122"/>
+                <a:cs typeface="Times New Roman" panose="02020603050405020304" pitchFamily="18" charset="0"/>
+              </a:rPr>
+              <a:t>Recovery</a:t>
+            </a:r>
+            <a:endParaRPr lang="en-US" sz="1400" dirty="0">
+              <a:latin typeface="Times New Roman" panose="02020603050405020304" pitchFamily="18" charset="0"/>
+              <a:cs typeface="Times New Roman" panose="02020603050405020304" pitchFamily="18" charset="0"/>
+            </a:endParaRPr>
+          </a:p>
+        </p:txBody>
+      </p:sp>
+      <p:sp>
+        <p:nvSpPr>
+          <p:cNvPr id="12" name="Text 9"/>
+          <p:cNvSpPr/>
+          <p:nvPr/>
+        </p:nvSpPr>
+        <p:spPr>
+          <a:xfrm>
+            <a:off x="5727019" y="3585947"/>
+            <a:ext cx="1203622" cy="253372"/>
+          </a:xfrm>
+          <a:prstGeom prst="rect">
+            <a:avLst/>
+          </a:prstGeom>
+          <a:noFill/>
+          <a:ln/>
+        </p:spPr>
+        <p:txBody>
+          <a:bodyPr wrap="square" lIns="0" tIns="0" rIns="0" bIns="0" rtlCol="0" anchor="t">
+            <a:noAutofit/>
+          </a:bodyPr>
+          <a:lstStyle/>
+          <a:p>
+            <a:pPr marL="0" indent="0" algn="ctr">
+              <a:lnSpc>
+                <a:spcPct val="89000"/>
+              </a:lnSpc>
+              <a:buNone/>
+            </a:pPr>
+            <a:r>
+              <a:rPr lang="en-US" sz="1050" dirty="0">
+                <a:solidFill>
+                  <a:srgbClr val="3C3939"/>
+                </a:solidFill>
+                <a:latin typeface="Times New Roman" panose="02020603050405020304" pitchFamily="18" charset="0"/>
+                <a:ea typeface="Roboto" pitchFamily="34" charset="-122"/>
+                <a:cs typeface="Times New Roman" panose="02020603050405020304" pitchFamily="18" charset="0"/>
+              </a:rPr>
+              <a:t>T+5min replica promoted, scaled</a:t>
+            </a:r>
+            <a:endParaRPr lang="en-US" sz="1050" dirty="0">
+              <a:latin typeface="Times New Roman" panose="02020603050405020304" pitchFamily="18" charset="0"/>
+              <a:cs typeface="Times New Roman" panose="02020603050405020304" pitchFamily="18" charset="0"/>
+            </a:endParaRPr>
+          </a:p>
+        </p:txBody>
+      </p:sp>
+      <p:sp>
+        <p:nvSpPr>
+          <p:cNvPr id="13" name="Text 10"/>
+          <p:cNvSpPr/>
+          <p:nvPr/>
+        </p:nvSpPr>
+        <p:spPr>
+          <a:xfrm>
+            <a:off x="1133029" y="4048944"/>
+            <a:ext cx="6877869" cy="350416"/>
+          </a:xfrm>
+          <a:prstGeom prst="rect">
+            <a:avLst/>
+          </a:prstGeom>
+          <a:noFill/>
+          <a:ln/>
+        </p:spPr>
+        <p:txBody>
+          <a:bodyPr wrap="square" lIns="0" tIns="0" rIns="0" bIns="0" rtlCol="0" anchor="t"/>
+          <a:lstStyle/>
+          <a:p>
+            <a:pPr marL="0" indent="0" algn="l">
+              <a:lnSpc>
+                <a:spcPct val="114000"/>
+              </a:lnSpc>
+              <a:spcAft>
+                <a:spcPts val="600"/>
+              </a:spcAft>
+              <a:buNone/>
+            </a:pPr>
+            <a:r>
+              <a:rPr lang="en-US" sz="900" dirty="0">
+                <a:solidFill>
+                  <a:srgbClr val="3C3939"/>
+                </a:solidFill>
+                <a:latin typeface="Times New Roman" panose="02020603050405020304" pitchFamily="18" charset="0"/>
+                <a:ea typeface="Roboto" pitchFamily="34" charset="-122"/>
+                <a:cs typeface="Times New Roman" panose="02020603050405020304" pitchFamily="18" charset="0"/>
+              </a:rPr>
+              <a:t>Key metrics: RTO ≈ 5 minutes. RPO ≈ 5 minutes (replication lag dependent).</a:t>
+            </a:r>
+            <a:endParaRPr lang="en-US" sz="900" dirty="0">
+              <a:latin typeface="Times New Roman" panose="02020603050405020304" pitchFamily="18" charset="0"/>
+              <a:cs typeface="Times New Roman" panose="02020603050405020304" pitchFamily="18" charset="0"/>
+            </a:endParaRPr>
+          </a:p>
+          <a:p>
+            <a:pPr marL="0" indent="0" algn="l">
+              <a:lnSpc>
+                <a:spcPct val="114000"/>
+              </a:lnSpc>
+              <a:buNone/>
+            </a:pPr>
+            <a:r>
+              <a:rPr lang="en-US" sz="900" dirty="0">
+                <a:solidFill>
+                  <a:srgbClr val="3C3939"/>
+                </a:solidFill>
+                <a:latin typeface="Times New Roman" panose="02020603050405020304" pitchFamily="18" charset="0"/>
+                <a:ea typeface="Roboto" pitchFamily="34" charset="-122"/>
+                <a:cs typeface="Times New Roman" panose="02020603050405020304" pitchFamily="18" charset="0"/>
+              </a:rPr>
+              <a:t>Core components: Azure Front Door, PostgreSQL cross‑region read replica, Automation Account runbooks, scaled Container Apps in DR region.</a:t>
+            </a:r>
+            <a:endParaRPr lang="en-US" sz="900" dirty="0">
+              <a:latin typeface="Times New Roman" panose="02020603050405020304" pitchFamily="18" charset="0"/>
+              <a:cs typeface="Times New Roman" panose="02020603050405020304" pitchFamily="18" charset="0"/>
+            </a:endParaRPr>
+          </a:p>
+        </p:txBody>
+      </p:sp>
+    </p:spTree>
+  </p:cSld>
+  <p:clrMapOvr>
+    <a:masterClrMapping/>
+  </p:clrMapOvr>
+</p:sld>
+</file>
+
+<file path=ppt/slides/slide11.xml><?xml version="1.0" encoding="utf-8"?>
+<p:sld xmlns:a="http://schemas.openxmlformats.org/drawingml/2006/main" xmlns:r="http://schemas.openxmlformats.org/officeDocument/2006/relationships" xmlns:p="http://schemas.openxmlformats.org/presentationml/2006/main">
+  <p:cSld name="Slide 9">
+    <p:spTree>
+      <p:nvGrpSpPr>
+        <p:cNvPr id="1" name=""/>
+        <p:cNvGrpSpPr/>
+        <p:nvPr/>
+      </p:nvGrpSpPr>
+      <p:grpSpPr>
+        <a:xfrm>
+          <a:off x="0" y="0"/>
+          <a:ext cx="0" cy="0"/>
+          <a:chOff x="0" y="0"/>
+          <a:chExt cx="0" cy="0"/>
+        </a:xfrm>
+      </p:grpSpPr>
+      <p:sp>
+        <p:nvSpPr>
+          <p:cNvPr id="2" name="Text 0"/>
+          <p:cNvSpPr/>
+          <p:nvPr/>
+        </p:nvSpPr>
+        <p:spPr>
+          <a:xfrm>
+            <a:off x="1744414" y="229642"/>
+            <a:ext cx="3397448" cy="256059"/>
+          </a:xfrm>
+          <a:prstGeom prst="rect">
+            <a:avLst/>
+          </a:prstGeom>
+          <a:noFill/>
+          <a:ln/>
+        </p:spPr>
+        <p:txBody>
+          <a:bodyPr wrap="none" lIns="0" tIns="0" rIns="0" bIns="0" rtlCol="0" anchor="t"/>
+          <a:lstStyle/>
+          <a:p>
+            <a:pPr marL="0" indent="0" algn="l">
+              <a:lnSpc>
+                <a:spcPct val="104000"/>
+              </a:lnSpc>
+              <a:buNone/>
+            </a:pPr>
+            <a:r>
+              <a:rPr lang="en-US" sz="1600" dirty="0">
+                <a:solidFill>
+                  <a:srgbClr val="1B1B27"/>
+                </a:solidFill>
+                <a:latin typeface="Raleway" pitchFamily="34" charset="0"/>
+                <a:ea typeface="Raleway" pitchFamily="34" charset="-122"/>
+                <a:cs typeface="Raleway" pitchFamily="34" charset="-120"/>
+              </a:rPr>
+              <a:t>Security &amp; Secret Management</a:t>
+            </a:r>
+            <a:endParaRPr lang="en-US" sz="1600" dirty="0"/>
+          </a:p>
+        </p:txBody>
+      </p:sp>
+      <p:sp>
+        <p:nvSpPr>
+          <p:cNvPr id="3" name="Text 1"/>
+          <p:cNvSpPr/>
+          <p:nvPr/>
+        </p:nvSpPr>
+        <p:spPr>
+          <a:xfrm>
+            <a:off x="1744414" y="504602"/>
+            <a:ext cx="3055590" cy="128067"/>
+          </a:xfrm>
+          <a:prstGeom prst="rect">
+            <a:avLst/>
+          </a:prstGeom>
+          <a:noFill/>
+          <a:ln/>
+        </p:spPr>
+        <p:txBody>
+          <a:bodyPr wrap="none" lIns="0" tIns="0" rIns="0" bIns="0" rtlCol="0" anchor="t"/>
+          <a:lstStyle/>
+          <a:p>
+            <a:pPr marL="0" indent="0" algn="l">
+              <a:lnSpc>
+                <a:spcPct val="104000"/>
+              </a:lnSpc>
+              <a:buNone/>
+            </a:pPr>
+            <a:r>
+              <a:rPr lang="en-US" sz="800" dirty="0">
+                <a:solidFill>
+                  <a:srgbClr val="1B1B27"/>
+                </a:solidFill>
+                <a:latin typeface="Raleway" pitchFamily="34" charset="0"/>
+                <a:ea typeface="Raleway" pitchFamily="34" charset="-122"/>
+                <a:cs typeface="Raleway" pitchFamily="34" charset="-120"/>
+              </a:rPr>
+              <a:t>Zero Secrets in Code — Managed Identities &amp; Key Vault</a:t>
+            </a:r>
+            <a:endParaRPr lang="en-US" sz="800" dirty="0"/>
+          </a:p>
+        </p:txBody>
+      </p:sp>
+      <p:pic>
+        <p:nvPicPr>
+          <p:cNvPr id="4" name="Image 0" descr="preencoded.png"/>
+          <p:cNvPicPr>
+            <a:picLocks noChangeAspect="1"/>
+          </p:cNvPicPr>
+          <p:nvPr/>
+        </p:nvPicPr>
+        <p:blipFill>
+          <a:blip r:embed="rId3"/>
+          <a:stretch>
+            <a:fillRect/>
+          </a:stretch>
+        </p:blipFill>
+        <p:spPr>
+          <a:xfrm>
+            <a:off x="2577852" y="703734"/>
+            <a:ext cx="3988222" cy="3077021"/>
+          </a:xfrm>
+          <a:prstGeom prst="rect">
+            <a:avLst/>
+          </a:prstGeom>
+        </p:spPr>
+      </p:pic>
+      <p:sp>
+        <p:nvSpPr>
+          <p:cNvPr id="5" name="Text 2"/>
+          <p:cNvSpPr/>
+          <p:nvPr/>
+        </p:nvSpPr>
+        <p:spPr>
+          <a:xfrm>
+            <a:off x="4219084" y="1989890"/>
+            <a:ext cx="695564" cy="477140"/>
+          </a:xfrm>
+          <a:prstGeom prst="rect">
+            <a:avLst/>
+          </a:prstGeom>
+          <a:noFill/>
+          <a:ln/>
+        </p:spPr>
+        <p:txBody>
+          <a:bodyPr wrap="square" lIns="0" tIns="0" rIns="0" bIns="0" rtlCol="0" anchor="t">
+            <a:normAutofit/>
+          </a:bodyPr>
+          <a:lstStyle/>
+          <a:p>
+            <a:pPr marL="0" indent="0" algn="ctr">
+              <a:lnSpc>
+                <a:spcPct val="104000"/>
+              </a:lnSpc>
+              <a:buNone/>
+            </a:pPr>
+            <a:r>
+              <a:rPr lang="en-US" sz="1000" dirty="0">
+                <a:solidFill>
+                  <a:srgbClr val="FFFFFF"/>
+                </a:solidFill>
+                <a:latin typeface="Raleway" pitchFamily="34" charset="0"/>
+                <a:ea typeface="Raleway" pitchFamily="34" charset="-122"/>
+                <a:cs typeface="Raleway" pitchFamily="34" charset="-120"/>
+              </a:rPr>
+              <a:t>Secure Secret Flow</a:t>
+            </a:r>
+            <a:endParaRPr lang="en-US" sz="1000" dirty="0"/>
+          </a:p>
+        </p:txBody>
+      </p:sp>
+      <p:sp>
+        <p:nvSpPr>
+          <p:cNvPr id="6" name="Text 3"/>
+          <p:cNvSpPr/>
+          <p:nvPr/>
+        </p:nvSpPr>
+        <p:spPr>
+          <a:xfrm>
+            <a:off x="4903338" y="2967056"/>
+            <a:ext cx="1034776" cy="318093"/>
+          </a:xfrm>
+          <a:prstGeom prst="rect">
+            <a:avLst/>
+          </a:prstGeom>
+          <a:noFill/>
+          <a:ln/>
+        </p:spPr>
+        <p:txBody>
+          <a:bodyPr wrap="square" lIns="0" tIns="0" rIns="0" bIns="0" rtlCol="0" anchor="t">
+            <a:normAutofit/>
+          </a:bodyPr>
+          <a:lstStyle/>
+          <a:p>
+            <a:pPr marL="0" indent="0" algn="ctr">
+              <a:lnSpc>
+                <a:spcPct val="104000"/>
+              </a:lnSpc>
+              <a:buNone/>
+            </a:pPr>
+            <a:r>
+              <a:rPr lang="en-US" sz="1000" dirty="0">
+                <a:solidFill>
+                  <a:srgbClr val="3C3939"/>
+                </a:solidFill>
+                <a:latin typeface="Raleway" pitchFamily="34" charset="0"/>
+                <a:ea typeface="Raleway" pitchFamily="34" charset="-122"/>
+                <a:cs typeface="Raleway" pitchFamily="34" charset="-120"/>
+              </a:rPr>
+              <a:t>Key Vault response</a:t>
+            </a:r>
+            <a:endParaRPr lang="en-US" sz="1000" dirty="0"/>
+          </a:p>
+        </p:txBody>
+      </p:sp>
+      <p:sp>
+        <p:nvSpPr>
+          <p:cNvPr id="7" name="Text 4"/>
+          <p:cNvSpPr/>
+          <p:nvPr/>
+        </p:nvSpPr>
+        <p:spPr>
+          <a:xfrm>
+            <a:off x="4903338" y="3330389"/>
+            <a:ext cx="1034776" cy="200752"/>
+          </a:xfrm>
+          <a:prstGeom prst="rect">
+            <a:avLst/>
+          </a:prstGeom>
+          <a:noFill/>
+          <a:ln/>
+        </p:spPr>
+        <p:txBody>
+          <a:bodyPr wrap="square" lIns="0" tIns="0" rIns="0" bIns="0" rtlCol="0" anchor="t">
+            <a:normAutofit lnSpcReduction="10000"/>
+          </a:bodyPr>
+          <a:lstStyle/>
+          <a:p>
+            <a:pPr marL="0" indent="0" algn="ctr">
+              <a:lnSpc>
+                <a:spcPct val="82000"/>
+              </a:lnSpc>
+              <a:buNone/>
+            </a:pPr>
+            <a:r>
+              <a:rPr lang="en-US" sz="800" dirty="0">
+                <a:solidFill>
+                  <a:srgbClr val="3C3939"/>
+                </a:solidFill>
+                <a:latin typeface="Roboto" pitchFamily="34" charset="0"/>
+                <a:ea typeface="Roboto" pitchFamily="34" charset="-122"/>
+                <a:cs typeface="Roboto" pitchFamily="34" charset="-120"/>
+              </a:rPr>
+              <a:t>Secret returned over private network</a:t>
+            </a:r>
+            <a:endParaRPr lang="en-US" sz="800" dirty="0"/>
+          </a:p>
+        </p:txBody>
+      </p:sp>
+      <p:sp>
+        <p:nvSpPr>
+          <p:cNvPr id="8" name="Text 5"/>
+          <p:cNvSpPr/>
+          <p:nvPr/>
+        </p:nvSpPr>
+        <p:spPr>
+          <a:xfrm>
+            <a:off x="2743131" y="1949157"/>
+            <a:ext cx="1057396" cy="318093"/>
+          </a:xfrm>
+          <a:prstGeom prst="rect">
+            <a:avLst/>
+          </a:prstGeom>
+          <a:noFill/>
+          <a:ln/>
+        </p:spPr>
+        <p:txBody>
+          <a:bodyPr wrap="square" lIns="0" tIns="0" rIns="0" bIns="0" rtlCol="0" anchor="t">
+            <a:normAutofit/>
+          </a:bodyPr>
+          <a:lstStyle/>
+          <a:p>
+            <a:pPr marL="0" indent="0" algn="ctr">
+              <a:lnSpc>
+                <a:spcPct val="104000"/>
+              </a:lnSpc>
+              <a:buNone/>
+            </a:pPr>
+            <a:r>
+              <a:rPr lang="en-US" sz="1000" dirty="0">
+                <a:solidFill>
+                  <a:srgbClr val="3C3939"/>
+                </a:solidFill>
+                <a:latin typeface="Raleway" pitchFamily="34" charset="0"/>
+                <a:ea typeface="Raleway" pitchFamily="34" charset="-122"/>
+                <a:cs typeface="Raleway" pitchFamily="34" charset="-120"/>
+              </a:rPr>
+              <a:t>No public DB access</a:t>
+            </a:r>
+            <a:endParaRPr lang="en-US" sz="1000" dirty="0"/>
+          </a:p>
+        </p:txBody>
+      </p:sp>
+      <p:sp>
+        <p:nvSpPr>
+          <p:cNvPr id="9" name="Text 6"/>
+          <p:cNvSpPr/>
+          <p:nvPr/>
+        </p:nvSpPr>
+        <p:spPr>
+          <a:xfrm>
+            <a:off x="2743131" y="2312490"/>
+            <a:ext cx="1057396" cy="200752"/>
+          </a:xfrm>
+          <a:prstGeom prst="rect">
+            <a:avLst/>
+          </a:prstGeom>
+          <a:noFill/>
+          <a:ln/>
+        </p:spPr>
+        <p:txBody>
+          <a:bodyPr wrap="square" lIns="0" tIns="0" rIns="0" bIns="0" rtlCol="0" anchor="t">
+            <a:normAutofit lnSpcReduction="10000"/>
+          </a:bodyPr>
+          <a:lstStyle/>
+          <a:p>
+            <a:pPr marL="0" indent="0" algn="ctr">
+              <a:lnSpc>
+                <a:spcPct val="82000"/>
+              </a:lnSpc>
+              <a:buNone/>
+            </a:pPr>
+            <a:r>
+              <a:rPr lang="en-US" sz="800" dirty="0">
+                <a:solidFill>
+                  <a:srgbClr val="3C3939"/>
+                </a:solidFill>
+                <a:latin typeface="Roboto" pitchFamily="34" charset="0"/>
+                <a:ea typeface="Roboto" pitchFamily="34" charset="-122"/>
+                <a:cs typeface="Roboto" pitchFamily="34" charset="-120"/>
+              </a:rPr>
+              <a:t>Databases deny direct public connections</a:t>
+            </a:r>
+            <a:endParaRPr lang="en-US" sz="800" dirty="0"/>
+          </a:p>
+        </p:txBody>
+      </p:sp>
+      <p:sp>
+        <p:nvSpPr>
+          <p:cNvPr id="10" name="Text 7"/>
+          <p:cNvSpPr/>
+          <p:nvPr/>
+        </p:nvSpPr>
+        <p:spPr>
+          <a:xfrm>
+            <a:off x="3178565" y="2967056"/>
+            <a:ext cx="1034776" cy="318093"/>
+          </a:xfrm>
+          <a:prstGeom prst="rect">
+            <a:avLst/>
+          </a:prstGeom>
+          <a:noFill/>
+          <a:ln/>
+        </p:spPr>
+        <p:txBody>
+          <a:bodyPr wrap="square" lIns="0" tIns="0" rIns="0" bIns="0" rtlCol="0" anchor="t">
+            <a:normAutofit/>
+          </a:bodyPr>
+          <a:lstStyle/>
+          <a:p>
+            <a:pPr marL="0" indent="0" algn="ctr">
+              <a:lnSpc>
+                <a:spcPct val="104000"/>
+              </a:lnSpc>
+              <a:buNone/>
+            </a:pPr>
+            <a:r>
+              <a:rPr lang="en-US" sz="1000" dirty="0">
+                <a:solidFill>
+                  <a:srgbClr val="3C3939"/>
+                </a:solidFill>
+                <a:latin typeface="Raleway" pitchFamily="34" charset="0"/>
+                <a:ea typeface="Raleway" pitchFamily="34" charset="-122"/>
+                <a:cs typeface="Raleway" pitchFamily="34" charset="-120"/>
+              </a:rPr>
+              <a:t>Network protections</a:t>
+            </a:r>
+            <a:endParaRPr lang="en-US" sz="1000" dirty="0"/>
+          </a:p>
+        </p:txBody>
+      </p:sp>
+      <p:sp>
+        <p:nvSpPr>
+          <p:cNvPr id="11" name="Text 8"/>
+          <p:cNvSpPr/>
+          <p:nvPr/>
+        </p:nvSpPr>
+        <p:spPr>
+          <a:xfrm>
+            <a:off x="3178565" y="3330389"/>
+            <a:ext cx="1034776" cy="200752"/>
+          </a:xfrm>
+          <a:prstGeom prst="rect">
+            <a:avLst/>
+          </a:prstGeom>
+          <a:noFill/>
+          <a:ln/>
+        </p:spPr>
+        <p:txBody>
+          <a:bodyPr wrap="square" lIns="0" tIns="0" rIns="0" bIns="0" rtlCol="0" anchor="t">
+            <a:normAutofit lnSpcReduction="10000"/>
+          </a:bodyPr>
+          <a:lstStyle/>
+          <a:p>
+            <a:pPr marL="0" indent="0" algn="ctr">
+              <a:lnSpc>
+                <a:spcPct val="82000"/>
+              </a:lnSpc>
+              <a:buNone/>
+            </a:pPr>
+            <a:r>
+              <a:rPr lang="en-US" sz="800" dirty="0">
+                <a:solidFill>
+                  <a:srgbClr val="3C3939"/>
+                </a:solidFill>
+                <a:latin typeface="Roboto" pitchFamily="34" charset="0"/>
+                <a:ea typeface="Roboto" pitchFamily="34" charset="-122"/>
+                <a:cs typeface="Roboto" pitchFamily="34" charset="-120"/>
+              </a:rPr>
+              <a:t>NSGs and restricted subnets</a:t>
+            </a:r>
+            <a:endParaRPr lang="en-US" sz="800" dirty="0"/>
+          </a:p>
+        </p:txBody>
+      </p:sp>
+      <p:sp>
+        <p:nvSpPr>
+          <p:cNvPr id="12" name="Text 9"/>
+          <p:cNvSpPr/>
+          <p:nvPr/>
+        </p:nvSpPr>
+        <p:spPr>
+          <a:xfrm>
+            <a:off x="5333117" y="1943502"/>
+            <a:ext cx="1057396" cy="318093"/>
+          </a:xfrm>
+          <a:prstGeom prst="rect">
+            <a:avLst/>
+          </a:prstGeom>
+          <a:noFill/>
+          <a:ln/>
+        </p:spPr>
+        <p:txBody>
+          <a:bodyPr wrap="square" lIns="0" tIns="0" rIns="0" bIns="0" rtlCol="0" anchor="t">
+            <a:normAutofit/>
+          </a:bodyPr>
+          <a:lstStyle/>
+          <a:p>
+            <a:pPr marL="0" indent="0" algn="ctr">
+              <a:lnSpc>
+                <a:spcPct val="104000"/>
+              </a:lnSpc>
+              <a:buNone/>
+            </a:pPr>
+            <a:r>
+              <a:rPr lang="en-US" sz="1000" dirty="0">
+                <a:solidFill>
+                  <a:srgbClr val="3C3939"/>
+                </a:solidFill>
+                <a:latin typeface="Raleway" pitchFamily="34" charset="0"/>
+                <a:ea typeface="Raleway" pitchFamily="34" charset="-122"/>
+                <a:cs typeface="Raleway" pitchFamily="34" charset="-120"/>
+              </a:rPr>
+              <a:t>Private endpoint request</a:t>
+            </a:r>
+            <a:endParaRPr lang="en-US" sz="1000" dirty="0"/>
+          </a:p>
+        </p:txBody>
+      </p:sp>
+      <p:sp>
+        <p:nvSpPr>
+          <p:cNvPr id="13" name="Text 10"/>
+          <p:cNvSpPr/>
+          <p:nvPr/>
+        </p:nvSpPr>
+        <p:spPr>
+          <a:xfrm>
+            <a:off x="5333117" y="2306835"/>
+            <a:ext cx="1057396" cy="200752"/>
+          </a:xfrm>
+          <a:prstGeom prst="rect">
+            <a:avLst/>
+          </a:prstGeom>
+          <a:noFill/>
+          <a:ln/>
+        </p:spPr>
+        <p:txBody>
+          <a:bodyPr wrap="square" lIns="0" tIns="0" rIns="0" bIns="0" rtlCol="0" anchor="t">
+            <a:normAutofit lnSpcReduction="10000"/>
+          </a:bodyPr>
+          <a:lstStyle/>
+          <a:p>
+            <a:pPr marL="0" indent="0" algn="ctr">
+              <a:lnSpc>
+                <a:spcPct val="82000"/>
+              </a:lnSpc>
+              <a:buNone/>
+            </a:pPr>
+            <a:r>
+              <a:rPr lang="en-US" sz="800" dirty="0">
+                <a:solidFill>
+                  <a:srgbClr val="3C3939"/>
+                </a:solidFill>
+                <a:latin typeface="Roboto" pitchFamily="34" charset="0"/>
+                <a:ea typeface="Roboto" pitchFamily="34" charset="-122"/>
+                <a:cs typeface="Roboto" pitchFamily="34" charset="-120"/>
+              </a:rPr>
+              <a:t>Key Vault accessed via private endpoint</a:t>
+            </a:r>
+            <a:endParaRPr lang="en-US" sz="800" dirty="0"/>
+          </a:p>
+        </p:txBody>
+      </p:sp>
+      <p:sp>
+        <p:nvSpPr>
+          <p:cNvPr id="14" name="Text 11"/>
+          <p:cNvSpPr/>
+          <p:nvPr/>
+        </p:nvSpPr>
+        <p:spPr>
+          <a:xfrm>
+            <a:off x="4015504" y="883190"/>
+            <a:ext cx="1063051" cy="318093"/>
+          </a:xfrm>
+          <a:prstGeom prst="rect">
+            <a:avLst/>
+          </a:prstGeom>
+          <a:noFill/>
+          <a:ln/>
+        </p:spPr>
+        <p:txBody>
+          <a:bodyPr wrap="square" lIns="0" tIns="0" rIns="0" bIns="0" rtlCol="0" anchor="t">
+            <a:normAutofit/>
+          </a:bodyPr>
+          <a:lstStyle/>
+          <a:p>
+            <a:pPr marL="0" indent="0" algn="ctr">
+              <a:lnSpc>
+                <a:spcPct val="104000"/>
+              </a:lnSpc>
+              <a:buNone/>
+            </a:pPr>
+            <a:r>
+              <a:rPr lang="en-US" sz="1000" dirty="0">
+                <a:solidFill>
+                  <a:srgbClr val="3C3939"/>
+                </a:solidFill>
+                <a:latin typeface="Raleway" pitchFamily="34" charset="0"/>
+                <a:ea typeface="Raleway" pitchFamily="34" charset="-122"/>
+                <a:cs typeface="Raleway" pitchFamily="34" charset="-120"/>
+              </a:rPr>
+              <a:t>Container App identity</a:t>
+            </a:r>
+            <a:endParaRPr lang="en-US" sz="1000" dirty="0"/>
+          </a:p>
+        </p:txBody>
+      </p:sp>
+      <p:sp>
+        <p:nvSpPr>
+          <p:cNvPr id="15" name="Text 12"/>
+          <p:cNvSpPr/>
+          <p:nvPr/>
+        </p:nvSpPr>
+        <p:spPr>
+          <a:xfrm>
+            <a:off x="4015504" y="1246524"/>
+            <a:ext cx="1063051" cy="200752"/>
+          </a:xfrm>
+          <a:prstGeom prst="rect">
+            <a:avLst/>
+          </a:prstGeom>
+          <a:noFill/>
+          <a:ln/>
+        </p:spPr>
+        <p:txBody>
+          <a:bodyPr wrap="square" lIns="0" tIns="0" rIns="0" bIns="0" rtlCol="0" anchor="t">
+            <a:normAutofit lnSpcReduction="10000"/>
+          </a:bodyPr>
+          <a:lstStyle/>
+          <a:p>
+            <a:pPr marL="0" indent="0" algn="ctr">
+              <a:lnSpc>
+                <a:spcPct val="82000"/>
+              </a:lnSpc>
+              <a:buNone/>
+            </a:pPr>
+            <a:r>
+              <a:rPr lang="en-US" sz="800" dirty="0">
+                <a:solidFill>
+                  <a:srgbClr val="3C3939"/>
+                </a:solidFill>
+                <a:latin typeface="Roboto" pitchFamily="34" charset="0"/>
+                <a:ea typeface="Roboto" pitchFamily="34" charset="-122"/>
+                <a:cs typeface="Roboto" pitchFamily="34" charset="-120"/>
+              </a:rPr>
+              <a:t>System-assigned managed identity</a:t>
+            </a:r>
+            <a:endParaRPr lang="en-US" sz="800" dirty="0"/>
+          </a:p>
+        </p:txBody>
+      </p:sp>
+      <p:sp>
+        <p:nvSpPr>
+          <p:cNvPr id="16" name="Shape 13"/>
+          <p:cNvSpPr/>
+          <p:nvPr/>
+        </p:nvSpPr>
+        <p:spPr>
+          <a:xfrm>
+            <a:off x="1744414" y="3834036"/>
+            <a:ext cx="1378297" cy="743620"/>
+          </a:xfrm>
+          <a:prstGeom prst="roundRect">
+            <a:avLst>
+              <a:gd name="adj" fmla="val 4629"/>
+            </a:avLst>
+          </a:prstGeom>
+          <a:solidFill>
+            <a:srgbClr val="E1E1EA"/>
+          </a:solidFill>
+          <a:ln w="4763">
+            <a:solidFill>
+              <a:srgbClr val="C7C7D0"/>
+            </a:solidFill>
+            <a:prstDash val="solid"/>
+          </a:ln>
+        </p:spPr>
+      </p:sp>
+      <p:sp>
+        <p:nvSpPr>
+          <p:cNvPr id="17" name="Text 14"/>
+          <p:cNvSpPr/>
+          <p:nvPr/>
+        </p:nvSpPr>
+        <p:spPr>
+          <a:xfrm>
+            <a:off x="1831107" y="3920728"/>
+            <a:ext cx="1024458" cy="128067"/>
+          </a:xfrm>
+          <a:prstGeom prst="rect">
+            <a:avLst/>
+          </a:prstGeom>
+          <a:noFill/>
+          <a:ln/>
+        </p:spPr>
+        <p:txBody>
+          <a:bodyPr wrap="none" lIns="0" tIns="0" rIns="0" bIns="0" rtlCol="0" anchor="t"/>
+          <a:lstStyle/>
+          <a:p>
+            <a:pPr marL="0" indent="0" algn="l">
+              <a:lnSpc>
+                <a:spcPct val="104000"/>
+              </a:lnSpc>
+              <a:buNone/>
+            </a:pPr>
+            <a:r>
+              <a:rPr lang="en-US" sz="800" dirty="0">
+                <a:solidFill>
+                  <a:srgbClr val="3C3939"/>
+                </a:solidFill>
+                <a:latin typeface="Raleway" pitchFamily="34" charset="0"/>
+                <a:ea typeface="Raleway" pitchFamily="34" charset="-122"/>
+                <a:cs typeface="Raleway" pitchFamily="34" charset="-120"/>
+              </a:rPr>
+              <a:t>Network Security</a:t>
+            </a:r>
+            <a:endParaRPr lang="en-US" sz="800" dirty="0"/>
+          </a:p>
+        </p:txBody>
+      </p:sp>
+      <p:sp>
+        <p:nvSpPr>
+          <p:cNvPr id="18" name="Text 15"/>
+          <p:cNvSpPr/>
+          <p:nvPr/>
+        </p:nvSpPr>
+        <p:spPr>
+          <a:xfrm>
+            <a:off x="1831107" y="4077221"/>
+            <a:ext cx="1204913" cy="310307"/>
+          </a:xfrm>
+          <a:prstGeom prst="rect">
+            <a:avLst/>
+          </a:prstGeom>
+          <a:noFill/>
+          <a:ln/>
+        </p:spPr>
+        <p:txBody>
+          <a:bodyPr wrap="square" lIns="0" tIns="0" rIns="0" bIns="0" rtlCol="0" anchor="t">
+            <a:normAutofit/>
+          </a:bodyPr>
+          <a:lstStyle/>
+          <a:p>
+            <a:pPr marL="0" indent="0" algn="l">
+              <a:lnSpc>
+                <a:spcPct val="105000"/>
+              </a:lnSpc>
+              <a:buNone/>
+            </a:pPr>
+            <a:r>
+              <a:rPr lang="en-US" sz="600" dirty="0">
+                <a:solidFill>
+                  <a:srgbClr val="3C3939"/>
+                </a:solidFill>
+                <a:latin typeface="Roboto" pitchFamily="34" charset="0"/>
+                <a:ea typeface="Roboto" pitchFamily="34" charset="-122"/>
+                <a:cs typeface="Roboto" pitchFamily="34" charset="-120"/>
+              </a:rPr>
+              <a:t>Private endpoints for data services · NSGs on subnets · No public DB access</a:t>
+            </a:r>
+            <a:endParaRPr lang="en-US" sz="600" dirty="0"/>
+          </a:p>
+        </p:txBody>
+      </p:sp>
+      <p:sp>
+        <p:nvSpPr>
+          <p:cNvPr id="19" name="Shape 16"/>
+          <p:cNvSpPr/>
+          <p:nvPr/>
+        </p:nvSpPr>
+        <p:spPr>
+          <a:xfrm>
+            <a:off x="3170039" y="3834036"/>
+            <a:ext cx="1378297" cy="743620"/>
+          </a:xfrm>
+          <a:prstGeom prst="roundRect">
+            <a:avLst>
+              <a:gd name="adj" fmla="val 4629"/>
+            </a:avLst>
+          </a:prstGeom>
+          <a:solidFill>
+            <a:srgbClr val="E1E1EA"/>
+          </a:solidFill>
+          <a:ln w="4763">
+            <a:solidFill>
+              <a:srgbClr val="C7C7D0"/>
+            </a:solidFill>
+            <a:prstDash val="solid"/>
+          </a:ln>
+        </p:spPr>
+      </p:sp>
+      <p:sp>
+        <p:nvSpPr>
+          <p:cNvPr id="20" name="Text 17"/>
+          <p:cNvSpPr/>
+          <p:nvPr/>
+        </p:nvSpPr>
+        <p:spPr>
+          <a:xfrm>
+            <a:off x="3256731" y="3920728"/>
+            <a:ext cx="1024458" cy="128067"/>
+          </a:xfrm>
+          <a:prstGeom prst="rect">
+            <a:avLst/>
+          </a:prstGeom>
+          <a:noFill/>
+          <a:ln/>
+        </p:spPr>
+        <p:txBody>
+          <a:bodyPr wrap="none" lIns="0" tIns="0" rIns="0" bIns="0" rtlCol="0" anchor="t"/>
+          <a:lstStyle/>
+          <a:p>
+            <a:pPr marL="0" indent="0" algn="l">
+              <a:lnSpc>
+                <a:spcPct val="104000"/>
+              </a:lnSpc>
+              <a:buNone/>
+            </a:pPr>
+            <a:r>
+              <a:rPr lang="en-US" sz="800" dirty="0">
+                <a:solidFill>
+                  <a:srgbClr val="3C3939"/>
+                </a:solidFill>
+                <a:latin typeface="Raleway" pitchFamily="34" charset="0"/>
+                <a:ea typeface="Raleway" pitchFamily="34" charset="-122"/>
+                <a:cs typeface="Raleway" pitchFamily="34" charset="-120"/>
+              </a:rPr>
+              <a:t>Identity &amp; Access</a:t>
+            </a:r>
+            <a:endParaRPr lang="en-US" sz="800" dirty="0"/>
+          </a:p>
+        </p:txBody>
+      </p:sp>
+      <p:sp>
+        <p:nvSpPr>
+          <p:cNvPr id="21" name="Text 18"/>
+          <p:cNvSpPr/>
+          <p:nvPr/>
+        </p:nvSpPr>
+        <p:spPr>
+          <a:xfrm>
+            <a:off x="3256731" y="4077221"/>
+            <a:ext cx="1204913" cy="310307"/>
+          </a:xfrm>
+          <a:prstGeom prst="rect">
+            <a:avLst/>
+          </a:prstGeom>
+          <a:noFill/>
+          <a:ln/>
+        </p:spPr>
+        <p:txBody>
+          <a:bodyPr wrap="square" lIns="0" tIns="0" rIns="0" bIns="0" rtlCol="0" anchor="t">
+            <a:normAutofit/>
+          </a:bodyPr>
+          <a:lstStyle/>
+          <a:p>
+            <a:pPr marL="0" indent="0" algn="l">
+              <a:lnSpc>
+                <a:spcPct val="105000"/>
+              </a:lnSpc>
+              <a:buNone/>
+            </a:pPr>
+            <a:r>
+              <a:rPr lang="en-US" sz="600" dirty="0">
+                <a:solidFill>
+                  <a:srgbClr val="3C3939"/>
+                </a:solidFill>
+                <a:latin typeface="Roboto" pitchFamily="34" charset="0"/>
+                <a:ea typeface="Roboto" pitchFamily="34" charset="-122"/>
+                <a:cs typeface="Roboto" pitchFamily="34" charset="-120"/>
+              </a:rPr>
+              <a:t>Azure RBAC, system‑assigned managed identities, least‑privilege assignments</a:t>
+            </a:r>
+            <a:endParaRPr lang="en-US" sz="600" dirty="0"/>
+          </a:p>
+        </p:txBody>
+      </p:sp>
+      <p:sp>
+        <p:nvSpPr>
+          <p:cNvPr id="22" name="Shape 19"/>
+          <p:cNvSpPr/>
+          <p:nvPr/>
+        </p:nvSpPr>
+        <p:spPr>
+          <a:xfrm>
+            <a:off x="4595664" y="3834036"/>
+            <a:ext cx="1378297" cy="743620"/>
+          </a:xfrm>
+          <a:prstGeom prst="roundRect">
+            <a:avLst>
+              <a:gd name="adj" fmla="val 4629"/>
+            </a:avLst>
+          </a:prstGeom>
+          <a:solidFill>
+            <a:srgbClr val="E1E1EA"/>
+          </a:solidFill>
+          <a:ln w="4763">
+            <a:solidFill>
+              <a:srgbClr val="C7C7D0"/>
+            </a:solidFill>
+            <a:prstDash val="solid"/>
+          </a:ln>
+        </p:spPr>
+      </p:sp>
+      <p:sp>
+        <p:nvSpPr>
+          <p:cNvPr id="23" name="Text 20"/>
+          <p:cNvSpPr/>
+          <p:nvPr/>
+        </p:nvSpPr>
+        <p:spPr>
+          <a:xfrm>
+            <a:off x="4682356" y="3920728"/>
+            <a:ext cx="1024458" cy="128067"/>
+          </a:xfrm>
+          <a:prstGeom prst="rect">
+            <a:avLst/>
+          </a:prstGeom>
+          <a:noFill/>
+          <a:ln/>
+        </p:spPr>
+        <p:txBody>
+          <a:bodyPr wrap="none" lIns="0" tIns="0" rIns="0" bIns="0" rtlCol="0" anchor="t"/>
+          <a:lstStyle/>
+          <a:p>
+            <a:pPr marL="0" indent="0" algn="l">
+              <a:lnSpc>
+                <a:spcPct val="104000"/>
+              </a:lnSpc>
+              <a:buNone/>
+            </a:pPr>
+            <a:r>
+              <a:rPr lang="en-US" sz="800" dirty="0">
+                <a:solidFill>
+                  <a:srgbClr val="3C3939"/>
+                </a:solidFill>
+                <a:latin typeface="Raleway" pitchFamily="34" charset="0"/>
+                <a:ea typeface="Raleway" pitchFamily="34" charset="-122"/>
+                <a:cs typeface="Raleway" pitchFamily="34" charset="-120"/>
+              </a:rPr>
+              <a:t>Application Security</a:t>
+            </a:r>
+            <a:endParaRPr lang="en-US" sz="800" dirty="0"/>
+          </a:p>
+        </p:txBody>
+      </p:sp>
+      <p:sp>
+        <p:nvSpPr>
+          <p:cNvPr id="24" name="Text 21"/>
+          <p:cNvSpPr/>
+          <p:nvPr/>
+        </p:nvSpPr>
+        <p:spPr>
+          <a:xfrm>
+            <a:off x="4682356" y="4077221"/>
+            <a:ext cx="1204913" cy="206871"/>
+          </a:xfrm>
+          <a:prstGeom prst="rect">
+            <a:avLst/>
+          </a:prstGeom>
+          <a:noFill/>
+          <a:ln/>
+        </p:spPr>
+        <p:txBody>
+          <a:bodyPr wrap="square" lIns="0" tIns="0" rIns="0" bIns="0" rtlCol="0" anchor="t">
+            <a:normAutofit/>
+          </a:bodyPr>
+          <a:lstStyle/>
+          <a:p>
+            <a:pPr marL="0" indent="0" algn="l">
+              <a:lnSpc>
+                <a:spcPct val="105000"/>
+              </a:lnSpc>
+              <a:buNone/>
+            </a:pPr>
+            <a:r>
+              <a:rPr lang="en-US" sz="600" dirty="0">
+                <a:solidFill>
+                  <a:srgbClr val="3C3939"/>
+                </a:solidFill>
+                <a:latin typeface="Roboto" pitchFamily="34" charset="0"/>
+                <a:ea typeface="Roboto" pitchFamily="34" charset="-122"/>
+                <a:cs typeface="Roboto" pitchFamily="34" charset="-120"/>
+              </a:rPr>
+              <a:t>WAF v2 (OWASP rules), TLS 1.2+, monitoring &amp; alerts</a:t>
+            </a:r>
+            <a:endParaRPr lang="en-US" sz="600" dirty="0"/>
+          </a:p>
+        </p:txBody>
+      </p:sp>
+      <p:sp>
+        <p:nvSpPr>
+          <p:cNvPr id="25" name="Shape 22"/>
+          <p:cNvSpPr/>
+          <p:nvPr/>
+        </p:nvSpPr>
+        <p:spPr>
+          <a:xfrm>
+            <a:off x="6021288" y="3834036"/>
+            <a:ext cx="1378297" cy="743620"/>
+          </a:xfrm>
+          <a:prstGeom prst="roundRect">
+            <a:avLst>
+              <a:gd name="adj" fmla="val 4629"/>
+            </a:avLst>
+          </a:prstGeom>
+          <a:solidFill>
+            <a:srgbClr val="E1E1EA"/>
+          </a:solidFill>
+          <a:ln w="4763">
+            <a:solidFill>
+              <a:srgbClr val="C7C7D0"/>
+            </a:solidFill>
+            <a:prstDash val="solid"/>
+          </a:ln>
+        </p:spPr>
+      </p:sp>
+      <p:sp>
+        <p:nvSpPr>
+          <p:cNvPr id="26" name="Text 23"/>
+          <p:cNvSpPr/>
+          <p:nvPr/>
+        </p:nvSpPr>
+        <p:spPr>
+          <a:xfrm>
+            <a:off x="6107981" y="3920728"/>
+            <a:ext cx="1024458" cy="128067"/>
+          </a:xfrm>
+          <a:prstGeom prst="rect">
+            <a:avLst/>
+          </a:prstGeom>
+          <a:noFill/>
+          <a:ln/>
+        </p:spPr>
+        <p:txBody>
+          <a:bodyPr wrap="none" lIns="0" tIns="0" rIns="0" bIns="0" rtlCol="0" anchor="t"/>
+          <a:lstStyle/>
+          <a:p>
+            <a:pPr marL="0" indent="0" algn="l">
+              <a:lnSpc>
+                <a:spcPct val="104000"/>
+              </a:lnSpc>
+              <a:buNone/>
+            </a:pPr>
+            <a:r>
+              <a:rPr lang="en-US" sz="800" dirty="0">
+                <a:solidFill>
+                  <a:srgbClr val="3C3939"/>
+                </a:solidFill>
+                <a:latin typeface="Raleway" pitchFamily="34" charset="0"/>
+                <a:ea typeface="Raleway" pitchFamily="34" charset="-122"/>
+                <a:cs typeface="Raleway" pitchFamily="34" charset="-120"/>
+              </a:rPr>
+              <a:t>Secrets</a:t>
+            </a:r>
+            <a:endParaRPr lang="en-US" sz="800" dirty="0"/>
+          </a:p>
+        </p:txBody>
+      </p:sp>
+      <p:sp>
+        <p:nvSpPr>
+          <p:cNvPr id="27" name="Text 24"/>
+          <p:cNvSpPr/>
+          <p:nvPr/>
+        </p:nvSpPr>
+        <p:spPr>
+          <a:xfrm>
+            <a:off x="6107981" y="4077221"/>
+            <a:ext cx="1204913" cy="413742"/>
+          </a:xfrm>
+          <a:prstGeom prst="rect">
+            <a:avLst/>
+          </a:prstGeom>
+          <a:noFill/>
+          <a:ln/>
+        </p:spPr>
+        <p:txBody>
+          <a:bodyPr wrap="square" lIns="0" tIns="0" rIns="0" bIns="0" rtlCol="0" anchor="t">
+            <a:normAutofit/>
+          </a:bodyPr>
+          <a:lstStyle/>
+          <a:p>
+            <a:pPr marL="0" indent="0" algn="l">
+              <a:lnSpc>
+                <a:spcPct val="105000"/>
+              </a:lnSpc>
+              <a:buNone/>
+            </a:pPr>
+            <a:r>
+              <a:rPr lang="en-US" sz="600" dirty="0">
+                <a:solidFill>
+                  <a:srgbClr val="3C3939"/>
+                </a:solidFill>
+                <a:latin typeface="Roboto" pitchFamily="34" charset="0"/>
+                <a:ea typeface="Roboto" pitchFamily="34" charset="-122"/>
+                <a:cs typeface="Roboto" pitchFamily="34" charset="-120"/>
+              </a:rPr>
+              <a:t>All secrets in Key Vault · auto‑generated passwords (random_password) · soft delete &amp; purge protection</a:t>
+            </a:r>
+            <a:endParaRPr lang="en-US" sz="600" dirty="0"/>
+          </a:p>
+        </p:txBody>
+      </p:sp>
+      <p:sp>
+        <p:nvSpPr>
+          <p:cNvPr id="28" name="Shape 25"/>
+          <p:cNvSpPr/>
+          <p:nvPr/>
+        </p:nvSpPr>
+        <p:spPr>
+          <a:xfrm>
+            <a:off x="1744414" y="4630936"/>
+            <a:ext cx="5655171" cy="229642"/>
+          </a:xfrm>
+          <a:prstGeom prst="roundRect">
+            <a:avLst>
+              <a:gd name="adj" fmla="val 14990"/>
+            </a:avLst>
+          </a:prstGeom>
+          <a:solidFill>
+            <a:srgbClr val="FFB3B4"/>
+          </a:solidFill>
+          <a:ln/>
+        </p:spPr>
+      </p:sp>
+      <p:pic>
+        <p:nvPicPr>
+          <p:cNvPr id="29" name="Image 1" descr="preencoded.png"/>
+          <p:cNvPicPr>
+            <a:picLocks noChangeAspect="1"/>
+          </p:cNvPicPr>
+          <p:nvPr/>
+        </p:nvPicPr>
+        <p:blipFill>
+          <a:blip r:embed="rId4"/>
+          <a:stretch>
+            <a:fillRect/>
+          </a:stretch>
+        </p:blipFill>
+        <p:spPr>
+          <a:xfrm>
+            <a:off x="1826344" y="4733330"/>
+            <a:ext cx="102394" cy="81930"/>
+          </a:xfrm>
+          <a:prstGeom prst="rect">
+            <a:avLst/>
+          </a:prstGeom>
+        </p:spPr>
+      </p:pic>
+      <p:sp>
+        <p:nvSpPr>
+          <p:cNvPr id="30" name="Text 26"/>
+          <p:cNvSpPr/>
+          <p:nvPr/>
+        </p:nvSpPr>
+        <p:spPr>
+          <a:xfrm>
+            <a:off x="2010668" y="4694039"/>
+            <a:ext cx="5764188" cy="103436"/>
+          </a:xfrm>
+          <a:prstGeom prst="rect">
+            <a:avLst/>
+          </a:prstGeom>
+          <a:noFill/>
+          <a:ln/>
+        </p:spPr>
+        <p:txBody>
+          <a:bodyPr wrap="none" lIns="0" tIns="0" rIns="0" bIns="0" rtlCol="0" anchor="t"/>
+          <a:lstStyle/>
+          <a:p>
+            <a:pPr marL="0" indent="0" algn="l">
+              <a:lnSpc>
+                <a:spcPct val="105000"/>
+              </a:lnSpc>
+              <a:buNone/>
+            </a:pPr>
+            <a:r>
+              <a:rPr lang="en-US" sz="600" dirty="0">
+                <a:solidFill>
+                  <a:srgbClr val="000000"/>
+                </a:solidFill>
+                <a:latin typeface="Roboto" pitchFamily="34" charset="0"/>
+                <a:ea typeface="Roboto" pitchFamily="34" charset="-122"/>
+                <a:cs typeface="Roboto" pitchFamily="34" charset="-120"/>
+              </a:rPr>
+              <a:t>Clahan Academy | Vignesh | 9/10</a:t>
+            </a:r>
+            <a:endParaRPr lang="en-US" sz="600" dirty="0"/>
+          </a:p>
+        </p:txBody>
+      </p:sp>
+    </p:spTree>
+  </p:cSld>
+  <p:clrMapOvr>
+    <a:masterClrMapping/>
+  </p:clrMapOvr>
+</p:sld>
+</file>
+
+<file path=ppt/slides/slide12.xml><?xml version="1.0" encoding="utf-8"?>
+<p:sld xmlns:a="http://schemas.openxmlformats.org/drawingml/2006/main" xmlns:r="http://schemas.openxmlformats.org/officeDocument/2006/relationships" xmlns:p="http://schemas.openxmlformats.org/presentationml/2006/main">
   <p:cSld name="Slide 10">
     <p:spTree>
       <p:nvGrpSpPr>
@@ -4986,17 +6723,20 @@
               <a:buNone/>
             </a:pPr>
             <a:r>
-              <a:rPr lang="en-US" sz="2750" dirty="0">
+              <a:rPr lang="en-US" sz="3200" dirty="0">
                 <a:solidFill>
                   <a:srgbClr val="1B1B27"/>
                 </a:solidFill>
-                <a:latin typeface="Raleway" pitchFamily="34" charset="0"/>
+                <a:latin typeface="Times New Roman" panose="02020603050405020304" pitchFamily="18" charset="0"/>
                 <a:ea typeface="Raleway" pitchFamily="34" charset="-122"/>
-                <a:cs typeface="Raleway" pitchFamily="34" charset="-120"/>
+                <a:cs typeface="Times New Roman" panose="02020603050405020304" pitchFamily="18" charset="0"/>
               </a:rPr>
               <a:t>Demo &amp; Next Steps</a:t>
             </a:r>
-            <a:endParaRPr lang="en-US" sz="2750" dirty="0"/>
+            <a:endParaRPr lang="en-US" sz="3200" dirty="0">
+              <a:latin typeface="Times New Roman" panose="02020603050405020304" pitchFamily="18" charset="0"/>
+              <a:cs typeface="Times New Roman" panose="02020603050405020304" pitchFamily="18" charset="0"/>
+            </a:endParaRPr>
           </a:p>
         </p:txBody>
       </p:sp>
@@ -5028,17 +6768,20 @@
               <a:buNone/>
             </a:pPr>
             <a:r>
-              <a:rPr lang="en-US" sz="1350" dirty="0">
+              <a:rPr lang="en-US" sz="1600" dirty="0">
                 <a:solidFill>
                   <a:srgbClr val="1B1B27"/>
                 </a:solidFill>
-                <a:latin typeface="Raleway" pitchFamily="34" charset="0"/>
+                <a:latin typeface="Times New Roman" panose="02020603050405020304" pitchFamily="18" charset="0"/>
                 <a:ea typeface="Raleway" pitchFamily="34" charset="-122"/>
-                <a:cs typeface="Raleway" pitchFamily="34" charset="-120"/>
+                <a:cs typeface="Times New Roman" panose="02020603050405020304" pitchFamily="18" charset="0"/>
               </a:rPr>
               <a:t>Quick Demo Flow</a:t>
             </a:r>
-            <a:endParaRPr lang="en-US" sz="1350" dirty="0"/>
+            <a:endParaRPr lang="en-US" sz="1600" dirty="0">
+              <a:latin typeface="Times New Roman" panose="02020603050405020304" pitchFamily="18" charset="0"/>
+              <a:cs typeface="Times New Roman" panose="02020603050405020304" pitchFamily="18" charset="0"/>
+            </a:endParaRPr>
           </a:p>
         </p:txBody>
       </p:sp>
@@ -5061,7 +6804,7 @@
         </p:spPr>
         <p:txBody>
           <a:bodyPr wrap="square" lIns="0" tIns="0" rIns="0" bIns="0" rtlCol="0" anchor="t">
-            <a:normAutofit/>
+            <a:noAutofit/>
           </a:bodyPr>
           <a:lstStyle/>
           <a:p>
@@ -5074,17 +6817,20 @@
               <a:buAutoNum type="arabicPeriod"/>
             </a:pPr>
             <a:r>
-              <a:rPr lang="en-US" sz="1100" dirty="0">
+              <a:rPr lang="en-US" sz="1400" dirty="0">
                 <a:solidFill>
                   <a:srgbClr val="3C3939"/>
                 </a:solidFill>
-                <a:latin typeface="Roboto" pitchFamily="34" charset="0"/>
+                <a:latin typeface="Times New Roman" panose="02020603050405020304" pitchFamily="18" charset="0"/>
                 <a:ea typeface="Roboto" pitchFamily="34" charset="-122"/>
-                <a:cs typeface="Roboto" pitchFamily="34" charset="-120"/>
+                <a:cs typeface="Times New Roman" panose="02020603050405020304" pitchFamily="18" charset="0"/>
               </a:rPr>
               <a:t>terraform init</a:t>
             </a:r>
-            <a:endParaRPr lang="en-US" sz="1100" dirty="0"/>
+            <a:endParaRPr lang="en-US" sz="1400" dirty="0">
+              <a:latin typeface="Times New Roman" panose="02020603050405020304" pitchFamily="18" charset="0"/>
+              <a:cs typeface="Times New Roman" panose="02020603050405020304" pitchFamily="18" charset="0"/>
+            </a:endParaRPr>
           </a:p>
           <a:p>
             <a:pPr marL="342900" indent="-342900" algn="l">
@@ -5096,17 +6842,20 @@
               <a:buAutoNum type="arabicPeriod" startAt="2"/>
             </a:pPr>
             <a:r>
-              <a:rPr lang="en-US" sz="1100" dirty="0">
+              <a:rPr lang="en-US" sz="1400" dirty="0">
                 <a:solidFill>
                   <a:srgbClr val="3C3939"/>
                 </a:solidFill>
-                <a:latin typeface="Roboto" pitchFamily="34" charset="0"/>
+                <a:latin typeface="Times New Roman" panose="02020603050405020304" pitchFamily="18" charset="0"/>
                 <a:ea typeface="Roboto" pitchFamily="34" charset="-122"/>
-                <a:cs typeface="Roboto" pitchFamily="34" charset="-120"/>
+                <a:cs typeface="Times New Roman" panose="02020603050405020304" pitchFamily="18" charset="0"/>
               </a:rPr>
               <a:t>terraform workspace select prod</a:t>
             </a:r>
-            <a:endParaRPr lang="en-US" sz="1100" dirty="0"/>
+            <a:endParaRPr lang="en-US" sz="1400" dirty="0">
+              <a:latin typeface="Times New Roman" panose="02020603050405020304" pitchFamily="18" charset="0"/>
+              <a:cs typeface="Times New Roman" panose="02020603050405020304" pitchFamily="18" charset="0"/>
+            </a:endParaRPr>
           </a:p>
           <a:p>
             <a:pPr marL="342900" indent="-342900" algn="l">
@@ -5118,17 +6867,20 @@
               <a:buAutoNum type="arabicPeriod" startAt="3"/>
             </a:pPr>
             <a:r>
-              <a:rPr lang="en-US" sz="1100" dirty="0">
+              <a:rPr lang="en-US" sz="1400" dirty="0">
                 <a:solidFill>
                   <a:srgbClr val="3C3939"/>
                 </a:solidFill>
-                <a:latin typeface="Roboto" pitchFamily="34" charset="0"/>
+                <a:latin typeface="Times New Roman" panose="02020603050405020304" pitchFamily="18" charset="0"/>
                 <a:ea typeface="Roboto" pitchFamily="34" charset="-122"/>
-                <a:cs typeface="Roboto" pitchFamily="34" charset="-120"/>
+                <a:cs typeface="Times New Roman" panose="02020603050405020304" pitchFamily="18" charset="0"/>
               </a:rPr>
               <a:t>terraform plan -var-file=environments/prod.tfvars</a:t>
             </a:r>
-            <a:endParaRPr lang="en-US" sz="1100" dirty="0"/>
+            <a:endParaRPr lang="en-US" sz="1400" dirty="0">
+              <a:latin typeface="Times New Roman" panose="02020603050405020304" pitchFamily="18" charset="0"/>
+              <a:cs typeface="Times New Roman" panose="02020603050405020304" pitchFamily="18" charset="0"/>
+            </a:endParaRPr>
           </a:p>
           <a:p>
             <a:pPr marL="342900" indent="-342900" algn="l">
@@ -5140,17 +6892,20 @@
               <a:buAutoNum type="arabicPeriod" startAt="4"/>
             </a:pPr>
             <a:r>
-              <a:rPr lang="en-US" sz="1100" dirty="0">
+              <a:rPr lang="en-US" sz="1400" dirty="0">
                 <a:solidFill>
                   <a:srgbClr val="3C3939"/>
                 </a:solidFill>
-                <a:latin typeface="Roboto" pitchFamily="34" charset="0"/>
+                <a:latin typeface="Times New Roman" panose="02020603050405020304" pitchFamily="18" charset="0"/>
                 <a:ea typeface="Roboto" pitchFamily="34" charset="-122"/>
-                <a:cs typeface="Roboto" pitchFamily="34" charset="-120"/>
+                <a:cs typeface="Times New Roman" panose="02020603050405020304" pitchFamily="18" charset="0"/>
               </a:rPr>
               <a:t>terraform apply</a:t>
             </a:r>
-            <a:endParaRPr lang="en-US" sz="1100" dirty="0"/>
+            <a:endParaRPr lang="en-US" sz="1400" dirty="0">
+              <a:latin typeface="Times New Roman" panose="02020603050405020304" pitchFamily="18" charset="0"/>
+              <a:cs typeface="Times New Roman" panose="02020603050405020304" pitchFamily="18" charset="0"/>
+            </a:endParaRPr>
           </a:p>
           <a:p>
             <a:pPr marL="342900" indent="-342900" algn="l">
@@ -5162,17 +6917,20 @@
               <a:buAutoNum type="arabicPeriod" startAt="5"/>
             </a:pPr>
             <a:r>
-              <a:rPr lang="en-US" sz="1100" dirty="0">
+              <a:rPr lang="en-US" sz="1400" dirty="0">
                 <a:solidFill>
                   <a:srgbClr val="3C3939"/>
                 </a:solidFill>
-                <a:latin typeface="Roboto" pitchFamily="34" charset="0"/>
+                <a:latin typeface="Times New Roman" panose="02020603050405020304" pitchFamily="18" charset="0"/>
                 <a:ea typeface="Roboto" pitchFamily="34" charset="-122"/>
-                <a:cs typeface="Roboto" pitchFamily="34" charset="-120"/>
+                <a:cs typeface="Times New Roman" panose="02020603050405020304" pitchFamily="18" charset="0"/>
               </a:rPr>
               <a:t>Access app via Front Door URL</a:t>
             </a:r>
-            <a:endParaRPr lang="en-US" sz="1100" dirty="0"/>
+            <a:endParaRPr lang="en-US" sz="1400" dirty="0">
+              <a:latin typeface="Times New Roman" panose="02020603050405020304" pitchFamily="18" charset="0"/>
+              <a:cs typeface="Times New Roman" panose="02020603050405020304" pitchFamily="18" charset="0"/>
+            </a:endParaRPr>
           </a:p>
           <a:p>
             <a:pPr marL="342900" indent="-342900" algn="l">
@@ -5184,17 +6942,20 @@
               <a:buAutoNum type="arabicPeriod" startAt="6"/>
             </a:pPr>
             <a:r>
-              <a:rPr lang="en-US" sz="1100" dirty="0">
+              <a:rPr lang="en-US" sz="1400" dirty="0">
                 <a:solidFill>
                   <a:srgbClr val="3C3939"/>
                 </a:solidFill>
-                <a:latin typeface="Roboto" pitchFamily="34" charset="0"/>
+                <a:latin typeface="Times New Roman" panose="02020603050405020304" pitchFamily="18" charset="0"/>
                 <a:ea typeface="Roboto" pitchFamily="34" charset="-122"/>
-                <a:cs typeface="Roboto" pitchFamily="34" charset="-120"/>
+                <a:cs typeface="Times New Roman" panose="02020603050405020304" pitchFamily="18" charset="0"/>
               </a:rPr>
               <a:t>Simulate DR failover and validate promotion</a:t>
             </a:r>
-            <a:endParaRPr lang="en-US" sz="1100" dirty="0"/>
+            <a:endParaRPr lang="en-US" sz="1400" dirty="0">
+              <a:latin typeface="Times New Roman" panose="02020603050405020304" pitchFamily="18" charset="0"/>
+              <a:cs typeface="Times New Roman" panose="02020603050405020304" pitchFamily="18" charset="0"/>
+            </a:endParaRPr>
           </a:p>
         </p:txBody>
       </p:sp>
@@ -5226,17 +6987,20 @@
               <a:buNone/>
             </a:pPr>
             <a:r>
-              <a:rPr lang="en-US" sz="1350" dirty="0">
+              <a:rPr lang="en-US" sz="1600" dirty="0">
                 <a:solidFill>
                   <a:srgbClr val="1B1B27"/>
                 </a:solidFill>
-                <a:latin typeface="Raleway" pitchFamily="34" charset="0"/>
+                <a:latin typeface="Times New Roman" panose="02020603050405020304" pitchFamily="18" charset="0"/>
                 <a:ea typeface="Raleway" pitchFamily="34" charset="-122"/>
-                <a:cs typeface="Raleway" pitchFamily="34" charset="-120"/>
+                <a:cs typeface="Times New Roman" panose="02020603050405020304" pitchFamily="18" charset="0"/>
               </a:rPr>
               <a:t>Key Learnings</a:t>
             </a:r>
-            <a:endParaRPr lang="en-US" sz="1350" dirty="0"/>
+            <a:endParaRPr lang="en-US" sz="1600" dirty="0">
+              <a:latin typeface="Times New Roman" panose="02020603050405020304" pitchFamily="18" charset="0"/>
+              <a:cs typeface="Times New Roman" panose="02020603050405020304" pitchFamily="18" charset="0"/>
+            </a:endParaRPr>
           </a:p>
         </p:txBody>
       </p:sp>
@@ -5259,7 +7023,7 @@
         </p:spPr>
         <p:txBody>
           <a:bodyPr wrap="square" lIns="0" tIns="0" rIns="0" bIns="0" rtlCol="0" anchor="t">
-            <a:normAutofit/>
+            <a:normAutofit fontScale="92500"/>
           </a:bodyPr>
           <a:lstStyle/>
           <a:p>
@@ -5271,28 +7035,31 @@
               <a:buChar char="•"/>
             </a:pPr>
             <a:r>
-              <a:rPr lang="en-US" sz="1100" dirty="0">
+              <a:rPr lang="en-US" sz="1400" dirty="0">
                 <a:solidFill>
                   <a:srgbClr val="000000"/>
                 </a:solidFill>
-                <a:latin typeface="Roboto" pitchFamily="34" charset="0"/>
+                <a:latin typeface="Times New Roman" panose="02020603050405020304" pitchFamily="18" charset="0"/>
                 <a:ea typeface="Roboto" pitchFamily="34" charset="-122"/>
-                <a:cs typeface="Roboto" pitchFamily="34" charset="-120"/>
+                <a:cs typeface="Times New Roman" panose="02020603050405020304" pitchFamily="18" charset="0"/>
               </a:rPr>
               <a:t>✅</a:t>
             </a:r>
             <a:r>
-              <a:rPr lang="en-US" sz="1100" dirty="0">
+              <a:rPr lang="en-US" sz="1400" dirty="0">
                 <a:solidFill>
                   <a:srgbClr val="3C3939"/>
                 </a:solidFill>
-                <a:latin typeface="Roboto" pitchFamily="34" charset="0"/>
+                <a:latin typeface="Times New Roman" panose="02020603050405020304" pitchFamily="18" charset="0"/>
                 <a:ea typeface="Roboto" pitchFamily="34" charset="-122"/>
-                <a:cs typeface="Roboto" pitchFamily="34" charset="-120"/>
+                <a:cs typeface="Times New Roman" panose="02020603050405020304" pitchFamily="18" charset="0"/>
               </a:rPr>
               <a:t> Multi‑region Azure deployment with Front Door</a:t>
             </a:r>
-            <a:endParaRPr lang="en-US" sz="1100" dirty="0"/>
+            <a:endParaRPr lang="en-US" sz="1400" dirty="0">
+              <a:latin typeface="Times New Roman" panose="02020603050405020304" pitchFamily="18" charset="0"/>
+              <a:cs typeface="Times New Roman" panose="02020603050405020304" pitchFamily="18" charset="0"/>
+            </a:endParaRPr>
           </a:p>
           <a:p>
             <a:pPr marL="342900" indent="-342900" algn="l">
@@ -5303,28 +7070,31 @@
               <a:buChar char="•"/>
             </a:pPr>
             <a:r>
-              <a:rPr lang="en-US" sz="1100" dirty="0">
+              <a:rPr lang="en-US" sz="1400" dirty="0">
                 <a:solidFill>
                   <a:srgbClr val="000000"/>
                 </a:solidFill>
-                <a:latin typeface="Roboto" pitchFamily="34" charset="0"/>
+                <a:latin typeface="Times New Roman" panose="02020603050405020304" pitchFamily="18" charset="0"/>
                 <a:ea typeface="Roboto" pitchFamily="34" charset="-122"/>
-                <a:cs typeface="Roboto" pitchFamily="34" charset="-120"/>
+                <a:cs typeface="Times New Roman" panose="02020603050405020304" pitchFamily="18" charset="0"/>
               </a:rPr>
               <a:t>✅</a:t>
             </a:r>
             <a:r>
-              <a:rPr lang="en-US" sz="1100" dirty="0">
+              <a:rPr lang="en-US" sz="1400" dirty="0">
                 <a:solidFill>
                   <a:srgbClr val="3C3939"/>
                 </a:solidFill>
-                <a:latin typeface="Roboto" pitchFamily="34" charset="0"/>
+                <a:latin typeface="Times New Roman" panose="02020603050405020304" pitchFamily="18" charset="0"/>
                 <a:ea typeface="Roboto" pitchFamily="34" charset="-122"/>
-                <a:cs typeface="Roboto" pitchFamily="34" charset="-120"/>
+                <a:cs typeface="Times New Roman" panose="02020603050405020304" pitchFamily="18" charset="0"/>
               </a:rPr>
               <a:t> Terraform modularisation and workspace strategy</a:t>
             </a:r>
-            <a:endParaRPr lang="en-US" sz="1100" dirty="0"/>
+            <a:endParaRPr lang="en-US" sz="1400" dirty="0">
+              <a:latin typeface="Times New Roman" panose="02020603050405020304" pitchFamily="18" charset="0"/>
+              <a:cs typeface="Times New Roman" panose="02020603050405020304" pitchFamily="18" charset="0"/>
+            </a:endParaRPr>
           </a:p>
           <a:p>
             <a:pPr marL="342900" indent="-342900" algn="l">
@@ -5335,28 +7105,31 @@
               <a:buChar char="•"/>
             </a:pPr>
             <a:r>
-              <a:rPr lang="en-US" sz="1100" dirty="0">
+              <a:rPr lang="en-US" sz="1400" dirty="0">
                 <a:solidFill>
                   <a:srgbClr val="000000"/>
                 </a:solidFill>
-                <a:latin typeface="Roboto" pitchFamily="34" charset="0"/>
+                <a:latin typeface="Times New Roman" panose="02020603050405020304" pitchFamily="18" charset="0"/>
                 <a:ea typeface="Roboto" pitchFamily="34" charset="-122"/>
-                <a:cs typeface="Roboto" pitchFamily="34" charset="-120"/>
+                <a:cs typeface="Times New Roman" panose="02020603050405020304" pitchFamily="18" charset="0"/>
               </a:rPr>
               <a:t>✅</a:t>
             </a:r>
             <a:r>
-              <a:rPr lang="en-US" sz="1100" dirty="0">
+              <a:rPr lang="en-US" sz="1400" dirty="0">
                 <a:solidFill>
                   <a:srgbClr val="3C3939"/>
                 </a:solidFill>
-                <a:latin typeface="Roboto" pitchFamily="34" charset="0"/>
+                <a:latin typeface="Times New Roman" panose="02020603050405020304" pitchFamily="18" charset="0"/>
                 <a:ea typeface="Roboto" pitchFamily="34" charset="-122"/>
-                <a:cs typeface="Roboto" pitchFamily="34" charset="-120"/>
+                <a:cs typeface="Times New Roman" panose="02020603050405020304" pitchFamily="18" charset="0"/>
               </a:rPr>
               <a:t> Automated DR promotion &amp; runbooks</a:t>
             </a:r>
-            <a:endParaRPr lang="en-US" sz="1100" dirty="0"/>
+            <a:endParaRPr lang="en-US" sz="1400" dirty="0">
+              <a:latin typeface="Times New Roman" panose="02020603050405020304" pitchFamily="18" charset="0"/>
+              <a:cs typeface="Times New Roman" panose="02020603050405020304" pitchFamily="18" charset="0"/>
+            </a:endParaRPr>
           </a:p>
           <a:p>
             <a:pPr marL="342900" indent="-342900" algn="l">
@@ -5367,28 +7140,31 @@
               <a:buChar char="•"/>
             </a:pPr>
             <a:r>
-              <a:rPr lang="en-US" sz="1100" dirty="0">
+              <a:rPr lang="en-US" sz="1400" dirty="0">
                 <a:solidFill>
                   <a:srgbClr val="000000"/>
                 </a:solidFill>
-                <a:latin typeface="Roboto" pitchFamily="34" charset="0"/>
+                <a:latin typeface="Times New Roman" panose="02020603050405020304" pitchFamily="18" charset="0"/>
                 <a:ea typeface="Roboto" pitchFamily="34" charset="-122"/>
-                <a:cs typeface="Roboto" pitchFamily="34" charset="-120"/>
+                <a:cs typeface="Times New Roman" panose="02020603050405020304" pitchFamily="18" charset="0"/>
               </a:rPr>
               <a:t>✅</a:t>
             </a:r>
             <a:r>
-              <a:rPr lang="en-US" sz="1100" dirty="0">
+              <a:rPr lang="en-US" sz="1400" dirty="0">
                 <a:solidFill>
                   <a:srgbClr val="3C3939"/>
                 </a:solidFill>
-                <a:latin typeface="Roboto" pitchFamily="34" charset="0"/>
+                <a:latin typeface="Times New Roman" panose="02020603050405020304" pitchFamily="18" charset="0"/>
                 <a:ea typeface="Roboto" pitchFamily="34" charset="-122"/>
-                <a:cs typeface="Roboto" pitchFamily="34" charset="-120"/>
+                <a:cs typeface="Times New Roman" panose="02020603050405020304" pitchFamily="18" charset="0"/>
               </a:rPr>
               <a:t> Secrets managed by Key Vault; no secrets in code</a:t>
             </a:r>
-            <a:endParaRPr lang="en-US" sz="1100" dirty="0"/>
+            <a:endParaRPr lang="en-US" sz="1400" dirty="0">
+              <a:latin typeface="Times New Roman" panose="02020603050405020304" pitchFamily="18" charset="0"/>
+              <a:cs typeface="Times New Roman" panose="02020603050405020304" pitchFamily="18" charset="0"/>
+            </a:endParaRPr>
           </a:p>
         </p:txBody>
       </p:sp>
@@ -5400,7 +7176,7 @@
 </p:sld>
 </file>
 
-<file path=ppt/slides/slide11.xml><?xml version="1.0" encoding="utf-8"?>
+<file path=ppt/slides/slide13.xml><?xml version="1.0" encoding="utf-8"?>
 <p:sld xmlns:a="http://schemas.openxmlformats.org/drawingml/2006/main" xmlns:r="http://schemas.openxmlformats.org/officeDocument/2006/relationships" xmlns:p="http://schemas.openxmlformats.org/presentationml/2006/main">
   <p:cSld name="Slide 11">
     <p:spTree>
@@ -5456,7 +7232,7 @@
 </p:sld>
 </file>
 
-<file path=ppt/slides/slide12.xml><?xml version="1.0" encoding="utf-8"?>
+<file path=ppt/slides/slide14.xml><?xml version="1.0" encoding="utf-8"?>
 <p:sld xmlns:a="http://schemas.openxmlformats.org/drawingml/2006/main" xmlns:r="http://schemas.openxmlformats.org/officeDocument/2006/relationships" xmlns:p="http://schemas.openxmlformats.org/presentationml/2006/main">
   <p:cSld name="Slide 12">
     <p:spTree>
@@ -5512,7 +7288,7 @@
 </p:sld>
 </file>
 
-<file path=ppt/slides/slide13.xml><?xml version="1.0" encoding="utf-8"?>
+<file path=ppt/slides/slide15.xml><?xml version="1.0" encoding="utf-8"?>
 <p:sld xmlns:a="http://schemas.openxmlformats.org/drawingml/2006/main" xmlns:r="http://schemas.openxmlformats.org/officeDocument/2006/relationships" xmlns:p="http://schemas.openxmlformats.org/presentationml/2006/main">
   <p:cSld name="Slide 13">
     <p:spTree>
@@ -5568,7 +7344,7 @@
 </p:sld>
 </file>
 
-<file path=ppt/slides/slide14.xml><?xml version="1.0" encoding="utf-8"?>
+<file path=ppt/slides/slide16.xml><?xml version="1.0" encoding="utf-8"?>
 <p:sld xmlns:a="http://schemas.openxmlformats.org/drawingml/2006/main" xmlns:r="http://schemas.openxmlformats.org/officeDocument/2006/relationships" xmlns:p="http://schemas.openxmlformats.org/presentationml/2006/main">
   <p:cSld name="Slide 14">
     <p:spTree>
@@ -5624,7 +7400,7 @@
 </p:sld>
 </file>
 
-<file path=ppt/slides/slide15.xml><?xml version="1.0" encoding="utf-8"?>
+<file path=ppt/slides/slide17.xml><?xml version="1.0" encoding="utf-8"?>
 <p:sld xmlns:a="http://schemas.openxmlformats.org/drawingml/2006/main" xmlns:r="http://schemas.openxmlformats.org/officeDocument/2006/relationships" xmlns:p="http://schemas.openxmlformats.org/presentationml/2006/main">
   <p:cSld name="Slide 15">
     <p:spTree>
@@ -6182,6 +7958,125 @@
 
 <file path=ppt/slides/slide3.xml><?xml version="1.0" encoding="utf-8"?>
 <p:sld xmlns:a="http://schemas.openxmlformats.org/drawingml/2006/main" xmlns:r="http://schemas.openxmlformats.org/officeDocument/2006/relationships" xmlns:p="http://schemas.openxmlformats.org/presentationml/2006/main">
+  <p:cSld>
+    <p:spTree>
+      <p:nvGrpSpPr>
+        <p:cNvPr id="1" name=""/>
+        <p:cNvGrpSpPr/>
+        <p:nvPr/>
+      </p:nvGrpSpPr>
+      <p:grpSpPr>
+        <a:xfrm>
+          <a:off x="0" y="0"/>
+          <a:ext cx="0" cy="0"/>
+          <a:chOff x="0" y="0"/>
+          <a:chExt cx="0" cy="0"/>
+        </a:xfrm>
+      </p:grpSpPr>
+      <p:pic>
+        <p:nvPicPr>
+          <p:cNvPr id="3" name="Picture 2">
+            <a:extLst>
+              <a:ext uri="{FF2B5EF4-FFF2-40B4-BE49-F238E27FC236}">
+                <a16:creationId xmlns:a16="http://schemas.microsoft.com/office/drawing/2014/main" id="{0D54F70D-2C1B-B5BF-80DB-3D477F790348}"/>
+              </a:ext>
+            </a:extLst>
+          </p:cNvPr>
+          <p:cNvPicPr>
+            <a:picLocks noChangeAspect="1"/>
+          </p:cNvPicPr>
+          <p:nvPr/>
+        </p:nvPicPr>
+        <p:blipFill>
+          <a:blip r:embed="rId2"/>
+          <a:srcRect/>
+          <a:stretch/>
+        </p:blipFill>
+        <p:spPr>
+          <a:xfrm>
+            <a:off x="364331" y="122783"/>
+            <a:ext cx="8486775" cy="5020717"/>
+          </a:xfrm>
+          <a:prstGeom prst="rect">
+            <a:avLst/>
+          </a:prstGeom>
+        </p:spPr>
+      </p:pic>
+    </p:spTree>
+    <p:extLst>
+      <p:ext uri="{BB962C8B-B14F-4D97-AF65-F5344CB8AC3E}">
+        <p14:creationId xmlns:p14="http://schemas.microsoft.com/office/powerpoint/2010/main" val="3906707863"/>
+      </p:ext>
+    </p:extLst>
+  </p:cSld>
+  <p:clrMapOvr>
+    <a:masterClrMapping/>
+  </p:clrMapOvr>
+</p:sld>
+</file>
+
+<file path=ppt/slides/slide4.xml><?xml version="1.0" encoding="utf-8"?>
+<p:sld xmlns:a="http://schemas.openxmlformats.org/drawingml/2006/main" xmlns:r="http://schemas.openxmlformats.org/officeDocument/2006/relationships" xmlns:p="http://schemas.openxmlformats.org/presentationml/2006/main">
+  <p:cSld>
+    <p:spTree>
+      <p:nvGrpSpPr>
+        <p:cNvPr id="1" name=""/>
+        <p:cNvGrpSpPr/>
+        <p:nvPr/>
+      </p:nvGrpSpPr>
+      <p:grpSpPr>
+        <a:xfrm>
+          <a:off x="0" y="0"/>
+          <a:ext cx="0" cy="0"/>
+          <a:chOff x="0" y="0"/>
+          <a:chExt cx="0" cy="0"/>
+        </a:xfrm>
+      </p:grpSpPr>
+      <p:pic>
+        <p:nvPicPr>
+          <p:cNvPr id="3" name="Picture 2">
+            <a:extLst>
+              <a:ext uri="{FF2B5EF4-FFF2-40B4-BE49-F238E27FC236}">
+                <a16:creationId xmlns:a16="http://schemas.microsoft.com/office/drawing/2014/main" id="{A43C8B01-419C-7D71-D1D1-382952C93AF6}"/>
+              </a:ext>
+            </a:extLst>
+          </p:cNvPr>
+          <p:cNvPicPr>
+            <a:picLocks noChangeAspect="1"/>
+          </p:cNvPicPr>
+          <p:nvPr/>
+        </p:nvPicPr>
+        <p:blipFill>
+          <a:blip r:embed="rId2"/>
+          <a:stretch>
+            <a:fillRect/>
+          </a:stretch>
+        </p:blipFill>
+        <p:spPr>
+          <a:xfrm>
+            <a:off x="0" y="642938"/>
+            <a:ext cx="8929688" cy="4407694"/>
+          </a:xfrm>
+          <a:prstGeom prst="rect">
+            <a:avLst/>
+          </a:prstGeom>
+        </p:spPr>
+      </p:pic>
+    </p:spTree>
+    <p:extLst>
+      <p:ext uri="{BB962C8B-B14F-4D97-AF65-F5344CB8AC3E}">
+        <p14:creationId xmlns:p14="http://schemas.microsoft.com/office/powerpoint/2010/main" val="4125956088"/>
+      </p:ext>
+    </p:extLst>
+  </p:cSld>
+  <p:clrMapOvr>
+    <a:masterClrMapping/>
+  </p:clrMapOvr>
+</p:sld>
+</file>
+
+<file path=ppt/slides/slide5.xml><?xml version="1.0" encoding="utf-8"?>
+<p:sld xmlns:a="http://schemas.openxmlformats.org/drawingml/2006/main" xmlns:r="http://schemas.openxmlformats.org/officeDocument/2006/relationships" xmlns:p="http://schemas.openxmlformats.org/presentationml/2006/main">
   <p:cSld name="Slide 3">
     <p:spTree>
       <p:nvGrpSpPr>
@@ -6225,17 +8120,20 @@
               <a:buNone/>
             </a:pPr>
             <a:r>
-              <a:rPr lang="en-US" sz="2750" dirty="0">
+              <a:rPr lang="en-US" sz="3200" dirty="0">
                 <a:solidFill>
                   <a:srgbClr val="1B1B27"/>
                 </a:solidFill>
-                <a:latin typeface="Raleway" pitchFamily="34" charset="0"/>
+                <a:latin typeface="Times New Roman" panose="02020603050405020304" pitchFamily="18" charset="0"/>
                 <a:ea typeface="Raleway" pitchFamily="34" charset="-122"/>
-                <a:cs typeface="Raleway" pitchFamily="34" charset="-120"/>
+                <a:cs typeface="Times New Roman" panose="02020603050405020304" pitchFamily="18" charset="0"/>
               </a:rPr>
               <a:t>Technology Stack</a:t>
             </a:r>
-            <a:endParaRPr lang="en-US" sz="2750" dirty="0"/>
+            <a:endParaRPr lang="en-US" sz="3200" dirty="0">
+              <a:latin typeface="Times New Roman" panose="02020603050405020304" pitchFamily="18" charset="0"/>
+              <a:cs typeface="Times New Roman" panose="02020603050405020304" pitchFamily="18" charset="0"/>
+            </a:endParaRPr>
           </a:p>
         </p:txBody>
       </p:sp>
@@ -6267,17 +8165,20 @@
               <a:buNone/>
             </a:pPr>
             <a:r>
-              <a:rPr lang="en-US" sz="1100" dirty="0">
+              <a:rPr lang="en-US" sz="1400" dirty="0">
                 <a:solidFill>
                   <a:srgbClr val="3C3939"/>
                 </a:solidFill>
-                <a:latin typeface="Roboto" pitchFamily="34" charset="0"/>
+                <a:latin typeface="Times New Roman" panose="02020603050405020304" pitchFamily="18" charset="0"/>
                 <a:ea typeface="Roboto" pitchFamily="34" charset="-122"/>
-                <a:cs typeface="Roboto" pitchFamily="34" charset="-120"/>
+                <a:cs typeface="Times New Roman" panose="02020603050405020304" pitchFamily="18" charset="0"/>
               </a:rPr>
               <a:t>A concise, enterprise‑grade stack organised by domain.</a:t>
             </a:r>
-            <a:endParaRPr lang="en-US" sz="1100" dirty="0"/>
+            <a:endParaRPr lang="en-US" sz="1400" dirty="0">
+              <a:latin typeface="Times New Roman" panose="02020603050405020304" pitchFamily="18" charset="0"/>
+              <a:cs typeface="Times New Roman" panose="02020603050405020304" pitchFamily="18" charset="0"/>
+            </a:endParaRPr>
           </a:p>
         </p:txBody>
       </p:sp>
@@ -6339,17 +8240,20 @@
               <a:buNone/>
             </a:pPr>
             <a:r>
-              <a:rPr lang="en-US" sz="1350" dirty="0">
+              <a:rPr lang="en-US" sz="1600" dirty="0">
                 <a:solidFill>
                   <a:srgbClr val="3C3939"/>
                 </a:solidFill>
-                <a:latin typeface="Raleway" pitchFamily="34" charset="0"/>
+                <a:latin typeface="Times New Roman" panose="02020603050405020304" pitchFamily="18" charset="0"/>
                 <a:ea typeface="Raleway" pitchFamily="34" charset="-122"/>
-                <a:cs typeface="Raleway" pitchFamily="34" charset="-120"/>
+                <a:cs typeface="Times New Roman" panose="02020603050405020304" pitchFamily="18" charset="0"/>
               </a:rPr>
               <a:t>Cloud &amp; Infrastructure</a:t>
             </a:r>
-            <a:endParaRPr lang="en-US" sz="1350" dirty="0"/>
+            <a:endParaRPr lang="en-US" sz="1600" dirty="0">
+              <a:latin typeface="Times New Roman" panose="02020603050405020304" pitchFamily="18" charset="0"/>
+              <a:cs typeface="Times New Roman" panose="02020603050405020304" pitchFamily="18" charset="0"/>
+            </a:endParaRPr>
           </a:p>
         </p:txBody>
       </p:sp>
@@ -6381,17 +8285,20 @@
               <a:buNone/>
             </a:pPr>
             <a:r>
-              <a:rPr lang="en-US" sz="1100" dirty="0">
+              <a:rPr lang="en-US" sz="1400" dirty="0">
                 <a:solidFill>
                   <a:srgbClr val="3C3939"/>
                 </a:solidFill>
-                <a:latin typeface="Roboto" pitchFamily="34" charset="0"/>
+                <a:latin typeface="Times New Roman" panose="02020603050405020304" pitchFamily="18" charset="0"/>
                 <a:ea typeface="Roboto" pitchFamily="34" charset="-122"/>
-                <a:cs typeface="Roboto" pitchFamily="34" charset="-120"/>
+                <a:cs typeface="Times New Roman" panose="02020603050405020304" pitchFamily="18" charset="0"/>
               </a:rPr>
               <a:t>Microsoft Azure · Terraform · Azure CLI</a:t>
             </a:r>
-            <a:endParaRPr lang="en-US" sz="1100" dirty="0"/>
+            <a:endParaRPr lang="en-US" sz="1400" dirty="0">
+              <a:latin typeface="Times New Roman" panose="02020603050405020304" pitchFamily="18" charset="0"/>
+              <a:cs typeface="Times New Roman" panose="02020603050405020304" pitchFamily="18" charset="0"/>
+            </a:endParaRPr>
           </a:p>
         </p:txBody>
       </p:sp>
@@ -6453,17 +8360,20 @@
               <a:buNone/>
             </a:pPr>
             <a:r>
-              <a:rPr lang="en-US" sz="1350" dirty="0">
+              <a:rPr lang="en-US" sz="1600" dirty="0">
                 <a:solidFill>
                   <a:srgbClr val="3C3939"/>
                 </a:solidFill>
-                <a:latin typeface="Raleway" pitchFamily="34" charset="0"/>
+                <a:latin typeface="Times New Roman" panose="02020603050405020304" pitchFamily="18" charset="0"/>
                 <a:ea typeface="Raleway" pitchFamily="34" charset="-122"/>
-                <a:cs typeface="Raleway" pitchFamily="34" charset="-120"/>
+                <a:cs typeface="Times New Roman" panose="02020603050405020304" pitchFamily="18" charset="0"/>
               </a:rPr>
               <a:t>Compute &amp; Networking</a:t>
             </a:r>
-            <a:endParaRPr lang="en-US" sz="1350" dirty="0"/>
+            <a:endParaRPr lang="en-US" sz="1600" dirty="0">
+              <a:latin typeface="Times New Roman" panose="02020603050405020304" pitchFamily="18" charset="0"/>
+              <a:cs typeface="Times New Roman" panose="02020603050405020304" pitchFamily="18" charset="0"/>
+            </a:endParaRPr>
           </a:p>
         </p:txBody>
       </p:sp>
@@ -6486,7 +8396,7 @@
         </p:spPr>
         <p:txBody>
           <a:bodyPr wrap="square" lIns="0" tIns="0" rIns="0" bIns="0" rtlCol="0" anchor="t">
-            <a:normAutofit/>
+            <a:noAutofit/>
           </a:bodyPr>
           <a:lstStyle/>
           <a:p>
@@ -6497,17 +8407,20 @@
               <a:buNone/>
             </a:pPr>
             <a:r>
-              <a:rPr lang="en-US" sz="1100" dirty="0">
+              <a:rPr lang="en-US" sz="1400" dirty="0">
                 <a:solidFill>
                   <a:srgbClr val="3C3939"/>
                 </a:solidFill>
-                <a:latin typeface="Roboto" pitchFamily="34" charset="0"/>
+                <a:latin typeface="Times New Roman" panose="02020603050405020304" pitchFamily="18" charset="0"/>
                 <a:ea typeface="Roboto" pitchFamily="34" charset="-122"/>
-                <a:cs typeface="Roboto" pitchFamily="34" charset="-120"/>
+                <a:cs typeface="Times New Roman" panose="02020603050405020304" pitchFamily="18" charset="0"/>
               </a:rPr>
               <a:t>Azure Container Apps · Azure Front Door · App Gateway + WAF v2</a:t>
             </a:r>
-            <a:endParaRPr lang="en-US" sz="1100" dirty="0"/>
+            <a:endParaRPr lang="en-US" sz="1400" dirty="0">
+              <a:latin typeface="Times New Roman" panose="02020603050405020304" pitchFamily="18" charset="0"/>
+              <a:cs typeface="Times New Roman" panose="02020603050405020304" pitchFamily="18" charset="0"/>
+            </a:endParaRPr>
           </a:p>
         </p:txBody>
       </p:sp>
@@ -6569,17 +8482,20 @@
               <a:buNone/>
             </a:pPr>
             <a:r>
-              <a:rPr lang="en-US" sz="1350" dirty="0">
+              <a:rPr lang="en-US" sz="1600" dirty="0">
                 <a:solidFill>
                   <a:srgbClr val="3C3939"/>
                 </a:solidFill>
-                <a:latin typeface="Raleway" pitchFamily="34" charset="0"/>
+                <a:latin typeface="Times New Roman" panose="02020603050405020304" pitchFamily="18" charset="0"/>
                 <a:ea typeface="Raleway" pitchFamily="34" charset="-122"/>
-                <a:cs typeface="Raleway" pitchFamily="34" charset="-120"/>
+                <a:cs typeface="Times New Roman" panose="02020603050405020304" pitchFamily="18" charset="0"/>
               </a:rPr>
               <a:t>Data &amp; Storage</a:t>
             </a:r>
-            <a:endParaRPr lang="en-US" sz="1350" dirty="0"/>
+            <a:endParaRPr lang="en-US" sz="1600" dirty="0">
+              <a:latin typeface="Times New Roman" panose="02020603050405020304" pitchFamily="18" charset="0"/>
+              <a:cs typeface="Times New Roman" panose="02020603050405020304" pitchFamily="18" charset="0"/>
+            </a:endParaRPr>
           </a:p>
         </p:txBody>
       </p:sp>
@@ -6602,7 +8518,7 @@
         </p:spPr>
         <p:txBody>
           <a:bodyPr wrap="square" lIns="0" tIns="0" rIns="0" bIns="0" rtlCol="0" anchor="t">
-            <a:normAutofit/>
+            <a:noAutofit/>
           </a:bodyPr>
           <a:lstStyle/>
           <a:p>
@@ -6613,17 +8529,20 @@
               <a:buNone/>
             </a:pPr>
             <a:r>
-              <a:rPr lang="en-US" sz="1100" dirty="0">
+              <a:rPr lang="en-US" sz="1400" dirty="0">
                 <a:solidFill>
                   <a:srgbClr val="3C3939"/>
                 </a:solidFill>
-                <a:latin typeface="Roboto" pitchFamily="34" charset="0"/>
+                <a:latin typeface="Times New Roman" panose="02020603050405020304" pitchFamily="18" charset="0"/>
                 <a:ea typeface="Roboto" pitchFamily="34" charset="-122"/>
-                <a:cs typeface="Roboto" pitchFamily="34" charset="-120"/>
+                <a:cs typeface="Times New Roman" panose="02020603050405020304" pitchFamily="18" charset="0"/>
               </a:rPr>
               <a:t>PostgreSQL Flexible Server · Azure Cache for Redis · Service Bus</a:t>
             </a:r>
-            <a:endParaRPr lang="en-US" sz="1100" dirty="0"/>
+            <a:endParaRPr lang="en-US" sz="1400" dirty="0">
+              <a:latin typeface="Times New Roman" panose="02020603050405020304" pitchFamily="18" charset="0"/>
+              <a:cs typeface="Times New Roman" panose="02020603050405020304" pitchFamily="18" charset="0"/>
+            </a:endParaRPr>
           </a:p>
         </p:txBody>
       </p:sp>
@@ -6685,17 +8604,20 @@
               <a:buNone/>
             </a:pPr>
             <a:r>
-              <a:rPr lang="en-US" sz="1350" dirty="0">
+              <a:rPr lang="en-US" sz="1600" dirty="0">
                 <a:solidFill>
                   <a:srgbClr val="3C3939"/>
                 </a:solidFill>
-                <a:latin typeface="Raleway" pitchFamily="34" charset="0"/>
+                <a:latin typeface="Times New Roman" panose="02020603050405020304" pitchFamily="18" charset="0"/>
                 <a:ea typeface="Raleway" pitchFamily="34" charset="-122"/>
-                <a:cs typeface="Raleway" pitchFamily="34" charset="-120"/>
+                <a:cs typeface="Times New Roman" panose="02020603050405020304" pitchFamily="18" charset="0"/>
               </a:rPr>
               <a:t>DevOps &amp; Security</a:t>
             </a:r>
-            <a:endParaRPr lang="en-US" sz="1350" dirty="0"/>
+            <a:endParaRPr lang="en-US" sz="1600" dirty="0">
+              <a:latin typeface="Times New Roman" panose="02020603050405020304" pitchFamily="18" charset="0"/>
+              <a:cs typeface="Times New Roman" panose="02020603050405020304" pitchFamily="18" charset="0"/>
+            </a:endParaRPr>
           </a:p>
         </p:txBody>
       </p:sp>
@@ -6718,7 +8640,7 @@
         </p:spPr>
         <p:txBody>
           <a:bodyPr wrap="square" lIns="0" tIns="0" rIns="0" bIns="0" rtlCol="0" anchor="t">
-            <a:normAutofit/>
+            <a:normAutofit fontScale="92500" lnSpcReduction="20000"/>
           </a:bodyPr>
           <a:lstStyle/>
           <a:p>
@@ -6729,105 +8651,20 @@
               <a:buNone/>
             </a:pPr>
             <a:r>
-              <a:rPr lang="en-US" sz="1100" dirty="0">
+              <a:rPr lang="en-US" sz="1400" dirty="0">
                 <a:solidFill>
                   <a:srgbClr val="3C3939"/>
                 </a:solidFill>
-                <a:latin typeface="Roboto" pitchFamily="34" charset="0"/>
+                <a:latin typeface="Times New Roman" panose="02020603050405020304" pitchFamily="18" charset="0"/>
                 <a:ea typeface="Roboto" pitchFamily="34" charset="-122"/>
-                <a:cs typeface="Roboto" pitchFamily="34" charset="-120"/>
+                <a:cs typeface="Times New Roman" panose="02020603050405020304" pitchFamily="18" charset="0"/>
               </a:rPr>
               <a:t>Docker Hub (vignesh8386) · Key Vault · Azure Monitor &amp; Log Analytics</a:t>
             </a:r>
-            <a:endParaRPr lang="en-US" sz="1100" dirty="0"/>
-          </a:p>
-        </p:txBody>
-      </p:sp>
-      <p:sp>
-        <p:nvSpPr>
-          <p:cNvPr id="16" name="Shape 10"/>
-          <p:cNvSpPr/>
-          <p:nvPr/>
-        </p:nvSpPr>
-        <p:spPr>
-          <a:xfrm>
-            <a:off x="496119" y="3753669"/>
-            <a:ext cx="8151763" cy="552748"/>
-          </a:xfrm>
-          <a:prstGeom prst="roundRect">
-            <a:avLst>
-              <a:gd name="adj" fmla="val 10772"/>
-            </a:avLst>
-          </a:prstGeom>
-          <a:solidFill>
-            <a:srgbClr val="D2D2E0"/>
-          </a:solidFill>
-          <a:ln/>
-        </p:spPr>
-      </p:sp>
-      <p:pic>
-        <p:nvPicPr>
-          <p:cNvPr id="17" name="Image 4" descr="preencoded.png"/>
-          <p:cNvPicPr>
-            <a:picLocks noChangeAspect="1"/>
-          </p:cNvPicPr>
-          <p:nvPr/>
-        </p:nvPicPr>
-        <p:blipFill>
-          <a:blip r:embed="rId7"/>
-          <a:stretch>
-            <a:fillRect/>
-          </a:stretch>
-        </p:blipFill>
-        <p:spPr>
-          <a:xfrm>
-            <a:off x="637877" y="3954438"/>
-            <a:ext cx="177180" cy="141759"/>
-          </a:xfrm>
-          <a:prstGeom prst="rect">
-            <a:avLst/>
-          </a:prstGeom>
-        </p:spPr>
-      </p:pic>
-      <p:sp>
-        <p:nvSpPr>
-          <p:cNvPr id="18" name="Text 11"/>
-          <p:cNvSpPr/>
-          <p:nvPr/>
-        </p:nvSpPr>
-        <p:spPr>
-          <a:xfrm>
-            <a:off x="956816" y="3916635"/>
-            <a:ext cx="8006507" cy="226814"/>
-          </a:xfrm>
-          <a:prstGeom prst="rect">
-            <a:avLst/>
-          </a:prstGeom>
-          <a:noFill/>
-          <a:ln/>
-        </p:spPr>
-        <p:txBody>
-          <a:bodyPr wrap="none" lIns="0" tIns="0" rIns="0" bIns="0" rtlCol="0" anchor="t"/>
-          <a:lstStyle/>
-          <a:p>
-            <a:pPr marL="0" indent="0" algn="l">
-              <a:lnSpc>
-                <a:spcPct val="133000"/>
-              </a:lnSpc>
-              <a:buNone/>
-            </a:pPr>
-            <a:r>
-              <a:rPr lang="en-US" sz="1100" dirty="0">
-                <a:solidFill>
-                  <a:srgbClr val="000000"/>
-                </a:solidFill>
-                <a:latin typeface="Roboto" pitchFamily="34" charset="0"/>
-                <a:ea typeface="Roboto" pitchFamily="34" charset="-122"/>
-                <a:cs typeface="Roboto" pitchFamily="34" charset="-120"/>
-              </a:rPr>
-              <a:t>Clahan Academy | Vignesh | 3/10</a:t>
-            </a:r>
-            <a:endParaRPr lang="en-US" sz="1100" dirty="0"/>
+            <a:endParaRPr lang="en-US" sz="1400" dirty="0">
+              <a:latin typeface="Times New Roman" panose="02020603050405020304" pitchFamily="18" charset="0"/>
+              <a:cs typeface="Times New Roman" panose="02020603050405020304" pitchFamily="18" charset="0"/>
+            </a:endParaRPr>
           </a:p>
         </p:txBody>
       </p:sp>
@@ -6839,7 +8676,7 @@
 </p:sld>
 </file>
 
-<file path=ppt/slides/slide4.xml><?xml version="1.0" encoding="utf-8"?>
+<file path=ppt/slides/slide6.xml><?xml version="1.0" encoding="utf-8"?>
 <p:sld xmlns:a="http://schemas.openxmlformats.org/drawingml/2006/main" xmlns:r="http://schemas.openxmlformats.org/officeDocument/2006/relationships" xmlns:p="http://schemas.openxmlformats.org/presentationml/2006/main">
   <p:cSld name="Slide 4">
     <p:spTree>
@@ -6884,17 +8721,20 @@
               <a:buNone/>
             </a:pPr>
             <a:r>
-              <a:rPr lang="en-US" sz="2000" dirty="0">
+              <a:rPr lang="en-US" sz="2800" dirty="0">
                 <a:solidFill>
                   <a:srgbClr val="1B1B27"/>
                 </a:solidFill>
-                <a:latin typeface="Raleway" pitchFamily="34" charset="0"/>
+                <a:latin typeface="Times New Roman" panose="02020603050405020304" pitchFamily="18" charset="0"/>
                 <a:ea typeface="Raleway" pitchFamily="34" charset="-122"/>
-                <a:cs typeface="Raleway" pitchFamily="34" charset="-120"/>
+                <a:cs typeface="Times New Roman" panose="02020603050405020304" pitchFamily="18" charset="0"/>
               </a:rPr>
               <a:t>Architecture Overview</a:t>
             </a:r>
-            <a:endParaRPr lang="en-US" sz="2000" dirty="0"/>
+            <a:endParaRPr lang="en-US" sz="2800" dirty="0">
+              <a:latin typeface="Times New Roman" panose="02020603050405020304" pitchFamily="18" charset="0"/>
+              <a:cs typeface="Times New Roman" panose="02020603050405020304" pitchFamily="18" charset="0"/>
+            </a:endParaRPr>
           </a:p>
         </p:txBody>
       </p:sp>
@@ -6926,17 +8766,20 @@
               <a:buNone/>
             </a:pPr>
             <a:r>
-              <a:rPr lang="en-US" sz="1000" dirty="0">
+              <a:rPr lang="en-US" sz="1100" dirty="0">
                 <a:solidFill>
                   <a:srgbClr val="1B1B27"/>
                 </a:solidFill>
-                <a:latin typeface="Raleway" pitchFamily="34" charset="0"/>
+                <a:latin typeface="Times New Roman" panose="02020603050405020304" pitchFamily="18" charset="0"/>
                 <a:ea typeface="Raleway" pitchFamily="34" charset="-122"/>
-                <a:cs typeface="Raleway" pitchFamily="34" charset="-120"/>
+                <a:cs typeface="Times New Roman" panose="02020603050405020304" pitchFamily="18" charset="0"/>
               </a:rPr>
               <a:t>Active‑Standby Cross‑Region Deployment</a:t>
             </a:r>
-            <a:endParaRPr lang="en-US" sz="1000" dirty="0"/>
+            <a:endParaRPr lang="en-US" sz="1100" dirty="0">
+              <a:latin typeface="Times New Roman" panose="02020603050405020304" pitchFamily="18" charset="0"/>
+              <a:cs typeface="Times New Roman" panose="02020603050405020304" pitchFamily="18" charset="0"/>
+            </a:endParaRPr>
           </a:p>
         </p:txBody>
       </p:sp>
@@ -6992,17 +8835,20 @@
               <a:buNone/>
             </a:pPr>
             <a:r>
-              <a:rPr lang="en-US" sz="1150" dirty="0">
+              <a:rPr lang="en-US" sz="1400" dirty="0">
                 <a:solidFill>
                   <a:srgbClr val="3C3939"/>
                 </a:solidFill>
-                <a:latin typeface="Raleway" pitchFamily="34" charset="0"/>
+                <a:latin typeface="Times New Roman" panose="02020603050405020304" pitchFamily="18" charset="0"/>
                 <a:ea typeface="Raleway" pitchFamily="34" charset="-122"/>
-                <a:cs typeface="Raleway" pitchFamily="34" charset="-120"/>
+                <a:cs typeface="Times New Roman" panose="02020603050405020304" pitchFamily="18" charset="0"/>
               </a:rPr>
               <a:t>Global Routing</a:t>
             </a:r>
-            <a:endParaRPr lang="en-US" sz="1150" dirty="0"/>
+            <a:endParaRPr lang="en-US" sz="1400" dirty="0">
+              <a:latin typeface="Times New Roman" panose="02020603050405020304" pitchFamily="18" charset="0"/>
+              <a:cs typeface="Times New Roman" panose="02020603050405020304" pitchFamily="18" charset="0"/>
+            </a:endParaRPr>
           </a:p>
         </p:txBody>
       </p:sp>
@@ -7025,7 +8871,7 @@
         </p:spPr>
         <p:txBody>
           <a:bodyPr wrap="square" lIns="0" tIns="0" rIns="0" bIns="0" rtlCol="0" anchor="t">
-            <a:normAutofit/>
+            <a:noAutofit/>
           </a:bodyPr>
           <a:lstStyle/>
           <a:p>
@@ -7036,17 +8882,20 @@
               <a:buNone/>
             </a:pPr>
             <a:r>
-              <a:rPr lang="en-US" sz="950" dirty="0">
+              <a:rPr lang="en-US" sz="1050" dirty="0">
                 <a:solidFill>
                   <a:srgbClr val="3C3939"/>
                 </a:solidFill>
-                <a:latin typeface="Roboto" pitchFamily="34" charset="0"/>
+                <a:latin typeface="Times New Roman" panose="02020603050405020304" pitchFamily="18" charset="0"/>
                 <a:ea typeface="Roboto" pitchFamily="34" charset="-122"/>
-                <a:cs typeface="Roboto" pitchFamily="34" charset="-120"/>
+                <a:cs typeface="Times New Roman" panose="02020603050405020304" pitchFamily="18" charset="0"/>
               </a:rPr>
               <a:t>Azure Front Door health probes</a:t>
             </a:r>
-            <a:endParaRPr lang="en-US" sz="950" dirty="0"/>
+            <a:endParaRPr lang="en-US" sz="1050" dirty="0">
+              <a:latin typeface="Times New Roman" panose="02020603050405020304" pitchFamily="18" charset="0"/>
+              <a:cs typeface="Times New Roman" panose="02020603050405020304" pitchFamily="18" charset="0"/>
+            </a:endParaRPr>
           </a:p>
         </p:txBody>
       </p:sp>
@@ -7069,7 +8918,7 @@
         </p:spPr>
         <p:txBody>
           <a:bodyPr wrap="square" lIns="0" tIns="0" rIns="0" bIns="0" rtlCol="0" anchor="t">
-            <a:normAutofit/>
+            <a:noAutofit/>
           </a:bodyPr>
           <a:lstStyle/>
           <a:p>
@@ -7080,17 +8929,20 @@
               <a:buNone/>
             </a:pPr>
             <a:r>
-              <a:rPr lang="en-US" sz="1150" dirty="0">
+              <a:rPr lang="en-US" sz="1400" dirty="0">
                 <a:solidFill>
                   <a:srgbClr val="1B1B27"/>
                 </a:solidFill>
-                <a:latin typeface="Raleway" pitchFamily="34" charset="0"/>
+                <a:latin typeface="Times New Roman" panose="02020603050405020304" pitchFamily="18" charset="0"/>
                 <a:ea typeface="Raleway" pitchFamily="34" charset="-122"/>
-                <a:cs typeface="Raleway" pitchFamily="34" charset="-120"/>
+                <a:cs typeface="Times New Roman" panose="02020603050405020304" pitchFamily="18" charset="0"/>
               </a:rPr>
               <a:t>Standby Region</a:t>
             </a:r>
-            <a:endParaRPr lang="en-US" sz="1150" dirty="0"/>
+            <a:endParaRPr lang="en-US" sz="1400" dirty="0">
+              <a:latin typeface="Times New Roman" panose="02020603050405020304" pitchFamily="18" charset="0"/>
+              <a:cs typeface="Times New Roman" panose="02020603050405020304" pitchFamily="18" charset="0"/>
+            </a:endParaRPr>
           </a:p>
         </p:txBody>
       </p:sp>
@@ -7113,7 +8965,7 @@
         </p:spPr>
         <p:txBody>
           <a:bodyPr wrap="square" lIns="0" tIns="0" rIns="0" bIns="0" rtlCol="0" anchor="t">
-            <a:normAutofit/>
+            <a:noAutofit/>
           </a:bodyPr>
           <a:lstStyle/>
           <a:p>
@@ -7124,17 +8976,20 @@
               <a:buNone/>
             </a:pPr>
             <a:r>
-              <a:rPr lang="en-US" sz="950" dirty="0">
+              <a:rPr lang="en-US" sz="1050" dirty="0">
                 <a:solidFill>
                   <a:srgbClr val="3C3939"/>
                 </a:solidFill>
-                <a:latin typeface="Roboto" pitchFamily="34" charset="0"/>
+                <a:latin typeface="Times New Roman" panose="02020603050405020304" pitchFamily="18" charset="0"/>
                 <a:ea typeface="Roboto" pitchFamily="34" charset="-122"/>
-                <a:cs typeface="Roboto" pitchFamily="34" charset="-120"/>
+                <a:cs typeface="Times New Roman" panose="02020603050405020304" pitchFamily="18" charset="0"/>
               </a:rPr>
               <a:t>Indonesia: replicas and scaled containers</a:t>
             </a:r>
-            <a:endParaRPr lang="en-US" sz="950" dirty="0"/>
+            <a:endParaRPr lang="en-US" sz="1050" dirty="0">
+              <a:latin typeface="Times New Roman" panose="02020603050405020304" pitchFamily="18" charset="0"/>
+              <a:cs typeface="Times New Roman" panose="02020603050405020304" pitchFamily="18" charset="0"/>
+            </a:endParaRPr>
           </a:p>
         </p:txBody>
       </p:sp>
@@ -7166,17 +9021,20 @@
               <a:buNone/>
             </a:pPr>
             <a:r>
-              <a:rPr lang="en-US" sz="1150" dirty="0">
+              <a:rPr lang="en-US" sz="1400" dirty="0">
                 <a:solidFill>
                   <a:srgbClr val="3C3939"/>
                 </a:solidFill>
-                <a:latin typeface="Raleway" pitchFamily="34" charset="0"/>
+                <a:latin typeface="Times New Roman" panose="02020603050405020304" pitchFamily="18" charset="0"/>
                 <a:ea typeface="Raleway" pitchFamily="34" charset="-122"/>
-                <a:cs typeface="Raleway" pitchFamily="34" charset="-120"/>
+                <a:cs typeface="Times New Roman" panose="02020603050405020304" pitchFamily="18" charset="0"/>
               </a:rPr>
               <a:t>User Entry</a:t>
             </a:r>
-            <a:endParaRPr lang="en-US" sz="1150" dirty="0"/>
+            <a:endParaRPr lang="en-US" sz="1400" dirty="0">
+              <a:latin typeface="Times New Roman" panose="02020603050405020304" pitchFamily="18" charset="0"/>
+              <a:cs typeface="Times New Roman" panose="02020603050405020304" pitchFamily="18" charset="0"/>
+            </a:endParaRPr>
           </a:p>
         </p:txBody>
       </p:sp>
@@ -7199,7 +9057,7 @@
         </p:spPr>
         <p:txBody>
           <a:bodyPr wrap="square" lIns="0" tIns="0" rIns="0" bIns="0" rtlCol="0" anchor="t">
-            <a:normAutofit/>
+            <a:noAutofit/>
           </a:bodyPr>
           <a:lstStyle/>
           <a:p>
@@ -7210,17 +9068,20 @@
               <a:buNone/>
             </a:pPr>
             <a:r>
-              <a:rPr lang="en-US" sz="950" dirty="0">
+              <a:rPr lang="en-US" sz="1050" dirty="0">
                 <a:solidFill>
                   <a:srgbClr val="3C3939"/>
                 </a:solidFill>
-                <a:latin typeface="Roboto" pitchFamily="34" charset="0"/>
+                <a:latin typeface="Times New Roman" panose="02020603050405020304" pitchFamily="18" charset="0"/>
                 <a:ea typeface="Roboto" pitchFamily="34" charset="-122"/>
-                <a:cs typeface="Roboto" pitchFamily="34" charset="-120"/>
+                <a:cs typeface="Times New Roman" panose="02020603050405020304" pitchFamily="18" charset="0"/>
               </a:rPr>
               <a:t>Client request to Front Door</a:t>
             </a:r>
-            <a:endParaRPr lang="en-US" sz="950" dirty="0"/>
+            <a:endParaRPr lang="en-US" sz="1050" dirty="0">
+              <a:latin typeface="Times New Roman" panose="02020603050405020304" pitchFamily="18" charset="0"/>
+              <a:cs typeface="Times New Roman" panose="02020603050405020304" pitchFamily="18" charset="0"/>
+            </a:endParaRPr>
           </a:p>
         </p:txBody>
       </p:sp>
@@ -7252,17 +9113,20 @@
               <a:buNone/>
             </a:pPr>
             <a:r>
-              <a:rPr lang="en-US" sz="1150" dirty="0">
+              <a:rPr lang="en-US" sz="1400" dirty="0">
                 <a:solidFill>
                   <a:srgbClr val="3C3939"/>
                 </a:solidFill>
-                <a:latin typeface="Raleway" pitchFamily="34" charset="0"/>
+                <a:latin typeface="Times New Roman" panose="02020603050405020304" pitchFamily="18" charset="0"/>
                 <a:ea typeface="Raleway" pitchFamily="34" charset="-122"/>
-                <a:cs typeface="Raleway" pitchFamily="34" charset="-120"/>
+                <a:cs typeface="Times New Roman" panose="02020603050405020304" pitchFamily="18" charset="0"/>
               </a:rPr>
               <a:t>Failover</a:t>
             </a:r>
-            <a:endParaRPr lang="en-US" sz="1150" dirty="0"/>
+            <a:endParaRPr lang="en-US" sz="1400" dirty="0">
+              <a:latin typeface="Times New Roman" panose="02020603050405020304" pitchFamily="18" charset="0"/>
+              <a:cs typeface="Times New Roman" panose="02020603050405020304" pitchFamily="18" charset="0"/>
+            </a:endParaRPr>
           </a:p>
         </p:txBody>
       </p:sp>
@@ -7285,7 +9149,7 @@
         </p:spPr>
         <p:txBody>
           <a:bodyPr wrap="square" lIns="0" tIns="0" rIns="0" bIns="0" rtlCol="0" anchor="t">
-            <a:normAutofit/>
+            <a:noAutofit/>
           </a:bodyPr>
           <a:lstStyle/>
           <a:p>
@@ -7296,17 +9160,20 @@
               <a:buNone/>
             </a:pPr>
             <a:r>
-              <a:rPr lang="en-US" sz="950" dirty="0">
+              <a:rPr lang="en-US" sz="1050" dirty="0">
                 <a:solidFill>
                   <a:srgbClr val="3C3939"/>
                 </a:solidFill>
-                <a:latin typeface="Roboto" pitchFamily="34" charset="0"/>
+                <a:latin typeface="Times New Roman" panose="02020603050405020304" pitchFamily="18" charset="0"/>
                 <a:ea typeface="Roboto" pitchFamily="34" charset="-122"/>
-                <a:cs typeface="Roboto" pitchFamily="34" charset="-120"/>
+                <a:cs typeface="Times New Roman" panose="02020603050405020304" pitchFamily="18" charset="0"/>
               </a:rPr>
               <a:t>Front Door shifts to standby on probe failure</a:t>
             </a:r>
-            <a:endParaRPr lang="en-US" sz="950" dirty="0"/>
+            <a:endParaRPr lang="en-US" sz="1050" dirty="0">
+              <a:latin typeface="Times New Roman" panose="02020603050405020304" pitchFamily="18" charset="0"/>
+              <a:cs typeface="Times New Roman" panose="02020603050405020304" pitchFamily="18" charset="0"/>
+            </a:endParaRPr>
           </a:p>
         </p:txBody>
       </p:sp>
@@ -7329,7 +9196,7 @@
         </p:spPr>
         <p:txBody>
           <a:bodyPr wrap="square" lIns="0" tIns="0" rIns="0" bIns="0" rtlCol="0" anchor="t">
-            <a:normAutofit/>
+            <a:noAutofit/>
           </a:bodyPr>
           <a:lstStyle/>
           <a:p>
@@ -7340,17 +9207,20 @@
               <a:buNone/>
             </a:pPr>
             <a:r>
-              <a:rPr lang="en-US" sz="1150" dirty="0">
+              <a:rPr lang="en-US" sz="1400" dirty="0">
                 <a:solidFill>
                   <a:srgbClr val="1B1B27"/>
                 </a:solidFill>
-                <a:latin typeface="Raleway" pitchFamily="34" charset="0"/>
+                <a:latin typeface="Times New Roman" panose="02020603050405020304" pitchFamily="18" charset="0"/>
                 <a:ea typeface="Raleway" pitchFamily="34" charset="-122"/>
-                <a:cs typeface="Raleway" pitchFamily="34" charset="-120"/>
+                <a:cs typeface="Times New Roman" panose="02020603050405020304" pitchFamily="18" charset="0"/>
               </a:rPr>
               <a:t>Primary Region</a:t>
             </a:r>
-            <a:endParaRPr lang="en-US" sz="1150" dirty="0"/>
+            <a:endParaRPr lang="en-US" sz="1400" dirty="0">
+              <a:latin typeface="Times New Roman" panose="02020603050405020304" pitchFamily="18" charset="0"/>
+              <a:cs typeface="Times New Roman" panose="02020603050405020304" pitchFamily="18" charset="0"/>
+            </a:endParaRPr>
           </a:p>
         </p:txBody>
       </p:sp>
@@ -7373,7 +9243,7 @@
         </p:spPr>
         <p:txBody>
           <a:bodyPr wrap="square" lIns="0" tIns="0" rIns="0" bIns="0" rtlCol="0" anchor="t">
-            <a:normAutofit/>
+            <a:noAutofit/>
           </a:bodyPr>
           <a:lstStyle/>
           <a:p>
@@ -7384,17 +9254,20 @@
               <a:buNone/>
             </a:pPr>
             <a:r>
-              <a:rPr lang="en-US" sz="950" dirty="0">
+              <a:rPr lang="en-US" sz="1050" dirty="0">
                 <a:solidFill>
                   <a:srgbClr val="3C3939"/>
                 </a:solidFill>
-                <a:latin typeface="Roboto" pitchFamily="34" charset="0"/>
+                <a:latin typeface="Times New Roman" panose="02020603050405020304" pitchFamily="18" charset="0"/>
                 <a:ea typeface="Roboto" pitchFamily="34" charset="-122"/>
-                <a:cs typeface="Roboto" pitchFamily="34" charset="-120"/>
+                <a:cs typeface="Times New Roman" panose="02020603050405020304" pitchFamily="18" charset="0"/>
               </a:rPr>
               <a:t>India: AppGW+WAF, 11 Containers, Postgres, Redis</a:t>
             </a:r>
-            <a:endParaRPr lang="en-US" sz="950" dirty="0"/>
+            <a:endParaRPr lang="en-US" sz="1050" dirty="0">
+              <a:latin typeface="Times New Roman" panose="02020603050405020304" pitchFamily="18" charset="0"/>
+              <a:cs typeface="Times New Roman" panose="02020603050405020304" pitchFamily="18" charset="0"/>
+            </a:endParaRPr>
           </a:p>
         </p:txBody>
       </p:sp>
@@ -7417,7 +9290,7 @@
         </p:spPr>
         <p:txBody>
           <a:bodyPr wrap="square" lIns="0" tIns="0" rIns="0" bIns="0" rtlCol="0" anchor="t">
-            <a:normAutofit/>
+            <a:normAutofit fontScale="92500" lnSpcReduction="10000"/>
           </a:bodyPr>
           <a:lstStyle/>
           <a:p>
@@ -7428,17 +9301,20 @@
               <a:buNone/>
             </a:pPr>
             <a:r>
-              <a:rPr lang="en-US" sz="800" dirty="0">
+              <a:rPr lang="en-US" sz="1000" dirty="0">
                 <a:solidFill>
                   <a:srgbClr val="3C3939"/>
                 </a:solidFill>
-                <a:latin typeface="Roboto" pitchFamily="34" charset="0"/>
+                <a:latin typeface="Times New Roman" panose="02020603050405020304" pitchFamily="18" charset="0"/>
                 <a:ea typeface="Roboto" pitchFamily="34" charset="-122"/>
-                <a:cs typeface="Roboto" pitchFamily="34" charset="-120"/>
+                <a:cs typeface="Times New Roman" panose="02020603050405020304" pitchFamily="18" charset="0"/>
               </a:rPr>
               <a:t>Note: Front Door performs health probes and routes traffic to the highest‑priority healthy region. Primary: India. Standby: Indonesia (replication &amp; scaled containers).</a:t>
             </a:r>
-            <a:endParaRPr lang="en-US" sz="800" dirty="0"/>
+            <a:endParaRPr lang="en-US" sz="1000" dirty="0">
+              <a:latin typeface="Times New Roman" panose="02020603050405020304" pitchFamily="18" charset="0"/>
+              <a:cs typeface="Times New Roman" panose="02020603050405020304" pitchFamily="18" charset="0"/>
+            </a:endParaRPr>
           </a:p>
         </p:txBody>
       </p:sp>
@@ -7450,7 +9326,7 @@
 </p:sld>
 </file>
 
-<file path=ppt/slides/slide5.xml><?xml version="1.0" encoding="utf-8"?>
+<file path=ppt/slides/slide7.xml><?xml version="1.0" encoding="utf-8"?>
 <p:sld xmlns:a="http://schemas.openxmlformats.org/drawingml/2006/main" xmlns:r="http://schemas.openxmlformats.org/officeDocument/2006/relationships" xmlns:p="http://schemas.openxmlformats.org/presentationml/2006/main">
   <p:cSld name="Slide 5">
     <p:spTree>
@@ -7499,13 +9375,16 @@
                 <a:solidFill>
                   <a:srgbClr val="1B1B27"/>
                 </a:solidFill>
-                <a:latin typeface="Raleway" pitchFamily="34" charset="0"/>
+                <a:latin typeface="Times New Roman" panose="02020603050405020304" pitchFamily="18" charset="0"/>
                 <a:ea typeface="Raleway" pitchFamily="34" charset="-122"/>
-                <a:cs typeface="Raleway" pitchFamily="34" charset="-120"/>
+                <a:cs typeface="Times New Roman" panose="02020603050405020304" pitchFamily="18" charset="0"/>
               </a:rPr>
               <a:t>Microservices Architecture</a:t>
             </a:r>
-            <a:endParaRPr lang="en-US" sz="2000" dirty="0"/>
+            <a:endParaRPr lang="en-US" sz="2000" dirty="0">
+              <a:latin typeface="Times New Roman" panose="02020603050405020304" pitchFamily="18" charset="0"/>
+              <a:cs typeface="Times New Roman" panose="02020603050405020304" pitchFamily="18" charset="0"/>
+            </a:endParaRPr>
           </a:p>
         </p:txBody>
       </p:sp>
@@ -7541,13 +9420,16 @@
                 <a:solidFill>
                   <a:srgbClr val="1B1B27"/>
                 </a:solidFill>
-                <a:latin typeface="Raleway" pitchFamily="34" charset="0"/>
+                <a:latin typeface="Times New Roman" panose="02020603050405020304" pitchFamily="18" charset="0"/>
                 <a:ea typeface="Raleway" pitchFamily="34" charset="-122"/>
-                <a:cs typeface="Raleway" pitchFamily="34" charset="-120"/>
+                <a:cs typeface="Times New Roman" panose="02020603050405020304" pitchFamily="18" charset="0"/>
               </a:rPr>
               <a:t>Containerised on Azure Container Apps — 11 services</a:t>
             </a:r>
-            <a:endParaRPr lang="en-US" sz="1000" dirty="0"/>
+            <a:endParaRPr lang="en-US" sz="1000" dirty="0">
+              <a:latin typeface="Times New Roman" panose="02020603050405020304" pitchFamily="18" charset="0"/>
+              <a:cs typeface="Times New Roman" panose="02020603050405020304" pitchFamily="18" charset="0"/>
+            </a:endParaRPr>
           </a:p>
         </p:txBody>
       </p:sp>
@@ -7610,13 +9492,16 @@
                 <a:solidFill>
                   <a:srgbClr val="3C3939"/>
                 </a:solidFill>
-                <a:latin typeface="Roboto" pitchFamily="34" charset="0"/>
+                <a:latin typeface="Times New Roman" panose="02020603050405020304" pitchFamily="18" charset="0"/>
                 <a:ea typeface="Roboto" pitchFamily="34" charset="-122"/>
-                <a:cs typeface="Roboto" pitchFamily="34" charset="-120"/>
+                <a:cs typeface="Times New Roman" panose="02020603050405020304" pitchFamily="18" charset="0"/>
               </a:rPr>
               <a:t>Service</a:t>
             </a:r>
-            <a:endParaRPr lang="en-US" sz="800" dirty="0"/>
+            <a:endParaRPr lang="en-US" sz="800" dirty="0">
+              <a:latin typeface="Times New Roman" panose="02020603050405020304" pitchFamily="18" charset="0"/>
+              <a:cs typeface="Times New Roman" panose="02020603050405020304" pitchFamily="18" charset="0"/>
+            </a:endParaRPr>
           </a:p>
         </p:txBody>
       </p:sp>
@@ -7652,13 +9537,16 @@
                 <a:solidFill>
                   <a:srgbClr val="3C3939"/>
                 </a:solidFill>
-                <a:latin typeface="Roboto" pitchFamily="34" charset="0"/>
+                <a:latin typeface="Times New Roman" panose="02020603050405020304" pitchFamily="18" charset="0"/>
                 <a:ea typeface="Roboto" pitchFamily="34" charset="-122"/>
-                <a:cs typeface="Roboto" pitchFamily="34" charset="-120"/>
+                <a:cs typeface="Times New Roman" panose="02020603050405020304" pitchFamily="18" charset="0"/>
               </a:rPr>
               <a:t>Image (tag)</a:t>
             </a:r>
-            <a:endParaRPr lang="en-US" sz="800" dirty="0"/>
+            <a:endParaRPr lang="en-US" sz="800" dirty="0">
+              <a:latin typeface="Times New Roman" panose="02020603050405020304" pitchFamily="18" charset="0"/>
+              <a:cs typeface="Times New Roman" panose="02020603050405020304" pitchFamily="18" charset="0"/>
+            </a:endParaRPr>
           </a:p>
         </p:txBody>
       </p:sp>
@@ -7694,13 +9582,16 @@
                 <a:solidFill>
                   <a:srgbClr val="3C3939"/>
                 </a:solidFill>
-                <a:latin typeface="Roboto" pitchFamily="34" charset="0"/>
+                <a:latin typeface="Times New Roman" panose="02020603050405020304" pitchFamily="18" charset="0"/>
                 <a:ea typeface="Roboto" pitchFamily="34" charset="-122"/>
-                <a:cs typeface="Roboto" pitchFamily="34" charset="-120"/>
+                <a:cs typeface="Times New Roman" panose="02020603050405020304" pitchFamily="18" charset="0"/>
               </a:rPr>
               <a:t>Purpose</a:t>
             </a:r>
-            <a:endParaRPr lang="en-US" sz="800" dirty="0"/>
+            <a:endParaRPr lang="en-US" sz="800" dirty="0">
+              <a:latin typeface="Times New Roman" panose="02020603050405020304" pitchFamily="18" charset="0"/>
+              <a:cs typeface="Times New Roman" panose="02020603050405020304" pitchFamily="18" charset="0"/>
+            </a:endParaRPr>
           </a:p>
         </p:txBody>
       </p:sp>
@@ -7736,13 +9627,16 @@
                 <a:solidFill>
                   <a:srgbClr val="3C3939"/>
                 </a:solidFill>
-                <a:latin typeface="Roboto" pitchFamily="34" charset="0"/>
+                <a:latin typeface="Times New Roman" panose="02020603050405020304" pitchFamily="18" charset="0"/>
                 <a:ea typeface="Roboto" pitchFamily="34" charset="-122"/>
-                <a:cs typeface="Roboto" pitchFamily="34" charset="-120"/>
+                <a:cs typeface="Times New Roman" panose="02020603050405020304" pitchFamily="18" charset="0"/>
               </a:rPr>
               <a:t>frontend-service</a:t>
             </a:r>
-            <a:endParaRPr lang="en-US" sz="800" dirty="0"/>
+            <a:endParaRPr lang="en-US" sz="800" dirty="0">
+              <a:latin typeface="Times New Roman" panose="02020603050405020304" pitchFamily="18" charset="0"/>
+              <a:cs typeface="Times New Roman" panose="02020603050405020304" pitchFamily="18" charset="0"/>
+            </a:endParaRPr>
           </a:p>
         </p:txBody>
       </p:sp>
@@ -7778,13 +9672,16 @@
                 <a:solidFill>
                   <a:srgbClr val="3C3939"/>
                 </a:solidFill>
-                <a:latin typeface="Roboto" pitchFamily="34" charset="0"/>
+                <a:latin typeface="Times New Roman" panose="02020603050405020304" pitchFamily="18" charset="0"/>
                 <a:ea typeface="Roboto" pitchFamily="34" charset="-122"/>
-                <a:cs typeface="Roboto" pitchFamily="34" charset="-120"/>
+                <a:cs typeface="Times New Roman" panose="02020603050405020304" pitchFamily="18" charset="0"/>
               </a:rPr>
               <a:t>vignesh8386/frontend:v1.0.0</a:t>
             </a:r>
-            <a:endParaRPr lang="en-US" sz="800" dirty="0"/>
+            <a:endParaRPr lang="en-US" sz="800" dirty="0">
+              <a:latin typeface="Times New Roman" panose="02020603050405020304" pitchFamily="18" charset="0"/>
+              <a:cs typeface="Times New Roman" panose="02020603050405020304" pitchFamily="18" charset="0"/>
+            </a:endParaRPr>
           </a:p>
         </p:txBody>
       </p:sp>
@@ -7820,13 +9717,16 @@
                 <a:solidFill>
                   <a:srgbClr val="3C3939"/>
                 </a:solidFill>
-                <a:latin typeface="Roboto" pitchFamily="34" charset="0"/>
+                <a:latin typeface="Times New Roman" panose="02020603050405020304" pitchFamily="18" charset="0"/>
                 <a:ea typeface="Roboto" pitchFamily="34" charset="-122"/>
-                <a:cs typeface="Roboto" pitchFamily="34" charset="-120"/>
+                <a:cs typeface="Times New Roman" panose="02020603050405020304" pitchFamily="18" charset="0"/>
               </a:rPr>
               <a:t>React UI — student &amp; instructor portal</a:t>
             </a:r>
-            <a:endParaRPr lang="en-US" sz="800" dirty="0"/>
+            <a:endParaRPr lang="en-US" sz="800" dirty="0">
+              <a:latin typeface="Times New Roman" panose="02020603050405020304" pitchFamily="18" charset="0"/>
+              <a:cs typeface="Times New Roman" panose="02020603050405020304" pitchFamily="18" charset="0"/>
+            </a:endParaRPr>
           </a:p>
         </p:txBody>
       </p:sp>
@@ -7862,13 +9762,16 @@
                 <a:solidFill>
                   <a:srgbClr val="3C3939"/>
                 </a:solidFill>
-                <a:latin typeface="Roboto" pitchFamily="34" charset="0"/>
+                <a:latin typeface="Times New Roman" panose="02020603050405020304" pitchFamily="18" charset="0"/>
                 <a:ea typeface="Roboto" pitchFamily="34" charset="-122"/>
-                <a:cs typeface="Roboto" pitchFamily="34" charset="-120"/>
+                <a:cs typeface="Times New Roman" panose="02020603050405020304" pitchFamily="18" charset="0"/>
               </a:rPr>
               <a:t>auth-service</a:t>
             </a:r>
-            <a:endParaRPr lang="en-US" sz="800" dirty="0"/>
+            <a:endParaRPr lang="en-US" sz="800" dirty="0">
+              <a:latin typeface="Times New Roman" panose="02020603050405020304" pitchFamily="18" charset="0"/>
+              <a:cs typeface="Times New Roman" panose="02020603050405020304" pitchFamily="18" charset="0"/>
+            </a:endParaRPr>
           </a:p>
         </p:txBody>
       </p:sp>
@@ -7904,13 +9807,16 @@
                 <a:solidFill>
                   <a:srgbClr val="3C3939"/>
                 </a:solidFill>
-                <a:latin typeface="Roboto" pitchFamily="34" charset="0"/>
+                <a:latin typeface="Times New Roman" panose="02020603050405020304" pitchFamily="18" charset="0"/>
                 <a:ea typeface="Roboto" pitchFamily="34" charset="-122"/>
-                <a:cs typeface="Roboto" pitchFamily="34" charset="-120"/>
+                <a:cs typeface="Times New Roman" panose="02020603050405020304" pitchFamily="18" charset="0"/>
               </a:rPr>
               <a:t>vignesh8386/auth:v1.0.0</a:t>
             </a:r>
-            <a:endParaRPr lang="en-US" sz="800" dirty="0"/>
+            <a:endParaRPr lang="en-US" sz="800" dirty="0">
+              <a:latin typeface="Times New Roman" panose="02020603050405020304" pitchFamily="18" charset="0"/>
+              <a:cs typeface="Times New Roman" panose="02020603050405020304" pitchFamily="18" charset="0"/>
+            </a:endParaRPr>
           </a:p>
         </p:txBody>
       </p:sp>
@@ -7948,13 +9854,16 @@
                 <a:solidFill>
                   <a:srgbClr val="3C3939"/>
                 </a:solidFill>
-                <a:latin typeface="Roboto" pitchFamily="34" charset="0"/>
+                <a:latin typeface="Times New Roman" panose="02020603050405020304" pitchFamily="18" charset="0"/>
                 <a:ea typeface="Roboto" pitchFamily="34" charset="-122"/>
-                <a:cs typeface="Roboto" pitchFamily="34" charset="-120"/>
+                <a:cs typeface="Times New Roman" panose="02020603050405020304" pitchFamily="18" charset="0"/>
               </a:rPr>
               <a:t>Authentication &amp; authorization (JWT, RBAC)</a:t>
             </a:r>
-            <a:endParaRPr lang="en-US" sz="800" dirty="0"/>
+            <a:endParaRPr lang="en-US" sz="800" dirty="0">
+              <a:latin typeface="Times New Roman" panose="02020603050405020304" pitchFamily="18" charset="0"/>
+              <a:cs typeface="Times New Roman" panose="02020603050405020304" pitchFamily="18" charset="0"/>
+            </a:endParaRPr>
           </a:p>
         </p:txBody>
       </p:sp>
@@ -7990,13 +9899,16 @@
                 <a:solidFill>
                   <a:srgbClr val="3C3939"/>
                 </a:solidFill>
-                <a:latin typeface="Roboto" pitchFamily="34" charset="0"/>
+                <a:latin typeface="Times New Roman" panose="02020603050405020304" pitchFamily="18" charset="0"/>
                 <a:ea typeface="Roboto" pitchFamily="34" charset="-122"/>
-                <a:cs typeface="Roboto" pitchFamily="34" charset="-120"/>
+                <a:cs typeface="Times New Roman" panose="02020603050405020304" pitchFamily="18" charset="0"/>
               </a:rPr>
               <a:t>admin-service</a:t>
             </a:r>
-            <a:endParaRPr lang="en-US" sz="800" dirty="0"/>
+            <a:endParaRPr lang="en-US" sz="800" dirty="0">
+              <a:latin typeface="Times New Roman" panose="02020603050405020304" pitchFamily="18" charset="0"/>
+              <a:cs typeface="Times New Roman" panose="02020603050405020304" pitchFamily="18" charset="0"/>
+            </a:endParaRPr>
           </a:p>
         </p:txBody>
       </p:sp>
@@ -8032,13 +9944,16 @@
                 <a:solidFill>
                   <a:srgbClr val="3C3939"/>
                 </a:solidFill>
-                <a:latin typeface="Roboto" pitchFamily="34" charset="0"/>
+                <a:latin typeface="Times New Roman" panose="02020603050405020304" pitchFamily="18" charset="0"/>
                 <a:ea typeface="Roboto" pitchFamily="34" charset="-122"/>
-                <a:cs typeface="Roboto" pitchFamily="34" charset="-120"/>
+                <a:cs typeface="Times New Roman" panose="02020603050405020304" pitchFamily="18" charset="0"/>
               </a:rPr>
               <a:t>vignesh8386/admin:v1.0.0</a:t>
             </a:r>
-            <a:endParaRPr lang="en-US" sz="800" dirty="0"/>
+            <a:endParaRPr lang="en-US" sz="800" dirty="0">
+              <a:latin typeface="Times New Roman" panose="02020603050405020304" pitchFamily="18" charset="0"/>
+              <a:cs typeface="Times New Roman" panose="02020603050405020304" pitchFamily="18" charset="0"/>
+            </a:endParaRPr>
           </a:p>
         </p:txBody>
       </p:sp>
@@ -8074,13 +9989,16 @@
                 <a:solidFill>
                   <a:srgbClr val="3C3939"/>
                 </a:solidFill>
-                <a:latin typeface="Roboto" pitchFamily="34" charset="0"/>
+                <a:latin typeface="Times New Roman" panose="02020603050405020304" pitchFamily="18" charset="0"/>
                 <a:ea typeface="Roboto" pitchFamily="34" charset="-122"/>
-                <a:cs typeface="Roboto" pitchFamily="34" charset="-120"/>
+                <a:cs typeface="Times New Roman" panose="02020603050405020304" pitchFamily="18" charset="0"/>
               </a:rPr>
               <a:t>Admin dashboards &amp; management</a:t>
             </a:r>
-            <a:endParaRPr lang="en-US" sz="800" dirty="0"/>
+            <a:endParaRPr lang="en-US" sz="800" dirty="0">
+              <a:latin typeface="Times New Roman" panose="02020603050405020304" pitchFamily="18" charset="0"/>
+              <a:cs typeface="Times New Roman" panose="02020603050405020304" pitchFamily="18" charset="0"/>
+            </a:endParaRPr>
           </a:p>
         </p:txBody>
       </p:sp>
@@ -8116,13 +10034,16 @@
                 <a:solidFill>
                   <a:srgbClr val="3C3939"/>
                 </a:solidFill>
-                <a:latin typeface="Roboto" pitchFamily="34" charset="0"/>
+                <a:latin typeface="Times New Roman" panose="02020603050405020304" pitchFamily="18" charset="0"/>
                 <a:ea typeface="Roboto" pitchFamily="34" charset="-122"/>
-                <a:cs typeface="Roboto" pitchFamily="34" charset="-120"/>
+                <a:cs typeface="Times New Roman" panose="02020603050405020304" pitchFamily="18" charset="0"/>
               </a:rPr>
               <a:t>student-service</a:t>
             </a:r>
-            <a:endParaRPr lang="en-US" sz="800" dirty="0"/>
+            <a:endParaRPr lang="en-US" sz="800" dirty="0">
+              <a:latin typeface="Times New Roman" panose="02020603050405020304" pitchFamily="18" charset="0"/>
+              <a:cs typeface="Times New Roman" panose="02020603050405020304" pitchFamily="18" charset="0"/>
+            </a:endParaRPr>
           </a:p>
         </p:txBody>
       </p:sp>
@@ -8158,13 +10079,16 @@
                 <a:solidFill>
                   <a:srgbClr val="3C3939"/>
                 </a:solidFill>
-                <a:latin typeface="Roboto" pitchFamily="34" charset="0"/>
+                <a:latin typeface="Times New Roman" panose="02020603050405020304" pitchFamily="18" charset="0"/>
                 <a:ea typeface="Roboto" pitchFamily="34" charset="-122"/>
-                <a:cs typeface="Roboto" pitchFamily="34" charset="-120"/>
+                <a:cs typeface="Times New Roman" panose="02020603050405020304" pitchFamily="18" charset="0"/>
               </a:rPr>
               <a:t>vignesh8386/student:v1.0.0</a:t>
             </a:r>
-            <a:endParaRPr lang="en-US" sz="800" dirty="0"/>
+            <a:endParaRPr lang="en-US" sz="800" dirty="0">
+              <a:latin typeface="Times New Roman" panose="02020603050405020304" pitchFamily="18" charset="0"/>
+              <a:cs typeface="Times New Roman" panose="02020603050405020304" pitchFamily="18" charset="0"/>
+            </a:endParaRPr>
           </a:p>
         </p:txBody>
       </p:sp>
@@ -8200,13 +10124,16 @@
                 <a:solidFill>
                   <a:srgbClr val="3C3939"/>
                 </a:solidFill>
-                <a:latin typeface="Roboto" pitchFamily="34" charset="0"/>
+                <a:latin typeface="Times New Roman" panose="02020603050405020304" pitchFamily="18" charset="0"/>
                 <a:ea typeface="Roboto" pitchFamily="34" charset="-122"/>
-                <a:cs typeface="Roboto" pitchFamily="34" charset="-120"/>
+                <a:cs typeface="Times New Roman" panose="02020603050405020304" pitchFamily="18" charset="0"/>
               </a:rPr>
               <a:t>Profile &amp; enrollment</a:t>
             </a:r>
-            <a:endParaRPr lang="en-US" sz="800" dirty="0"/>
+            <a:endParaRPr lang="en-US" sz="800" dirty="0">
+              <a:latin typeface="Times New Roman" panose="02020603050405020304" pitchFamily="18" charset="0"/>
+              <a:cs typeface="Times New Roman" panose="02020603050405020304" pitchFamily="18" charset="0"/>
+            </a:endParaRPr>
           </a:p>
         </p:txBody>
       </p:sp>
@@ -8242,13 +10169,16 @@
                 <a:solidFill>
                   <a:srgbClr val="3C3939"/>
                 </a:solidFill>
-                <a:latin typeface="Roboto" pitchFamily="34" charset="0"/>
+                <a:latin typeface="Times New Roman" panose="02020603050405020304" pitchFamily="18" charset="0"/>
                 <a:ea typeface="Roboto" pitchFamily="34" charset="-122"/>
-                <a:cs typeface="Roboto" pitchFamily="34" charset="-120"/>
+                <a:cs typeface="Times New Roman" panose="02020603050405020304" pitchFamily="18" charset="0"/>
               </a:rPr>
               <a:t>exam-service</a:t>
             </a:r>
-            <a:endParaRPr lang="en-US" sz="800" dirty="0"/>
+            <a:endParaRPr lang="en-US" sz="800" dirty="0">
+              <a:latin typeface="Times New Roman" panose="02020603050405020304" pitchFamily="18" charset="0"/>
+              <a:cs typeface="Times New Roman" panose="02020603050405020304" pitchFamily="18" charset="0"/>
+            </a:endParaRPr>
           </a:p>
         </p:txBody>
       </p:sp>
@@ -8284,13 +10214,16 @@
                 <a:solidFill>
                   <a:srgbClr val="3C3939"/>
                 </a:solidFill>
-                <a:latin typeface="Roboto" pitchFamily="34" charset="0"/>
+                <a:latin typeface="Times New Roman" panose="02020603050405020304" pitchFamily="18" charset="0"/>
                 <a:ea typeface="Roboto" pitchFamily="34" charset="-122"/>
-                <a:cs typeface="Roboto" pitchFamily="34" charset="-120"/>
+                <a:cs typeface="Times New Roman" panose="02020603050405020304" pitchFamily="18" charset="0"/>
               </a:rPr>
               <a:t>vignesh8386/exam:v1.0.0</a:t>
             </a:r>
-            <a:endParaRPr lang="en-US" sz="800" dirty="0"/>
+            <a:endParaRPr lang="en-US" sz="800" dirty="0">
+              <a:latin typeface="Times New Roman" panose="02020603050405020304" pitchFamily="18" charset="0"/>
+              <a:cs typeface="Times New Roman" panose="02020603050405020304" pitchFamily="18" charset="0"/>
+            </a:endParaRPr>
           </a:p>
         </p:txBody>
       </p:sp>
@@ -8326,13 +10259,16 @@
                 <a:solidFill>
                   <a:srgbClr val="3C3939"/>
                 </a:solidFill>
-                <a:latin typeface="Roboto" pitchFamily="34" charset="0"/>
+                <a:latin typeface="Times New Roman" panose="02020603050405020304" pitchFamily="18" charset="0"/>
                 <a:ea typeface="Roboto" pitchFamily="34" charset="-122"/>
-                <a:cs typeface="Roboto" pitchFamily="34" charset="-120"/>
+                <a:cs typeface="Times New Roman" panose="02020603050405020304" pitchFamily="18" charset="0"/>
               </a:rPr>
               <a:t>Exam creation, scheduling, scoring</a:t>
             </a:r>
-            <a:endParaRPr lang="en-US" sz="800" dirty="0"/>
+            <a:endParaRPr lang="en-US" sz="800" dirty="0">
+              <a:latin typeface="Times New Roman" panose="02020603050405020304" pitchFamily="18" charset="0"/>
+              <a:cs typeface="Times New Roman" panose="02020603050405020304" pitchFamily="18" charset="0"/>
+            </a:endParaRPr>
           </a:p>
         </p:txBody>
       </p:sp>
@@ -8368,13 +10304,16 @@
                 <a:solidFill>
                   <a:srgbClr val="3C3939"/>
                 </a:solidFill>
-                <a:latin typeface="Roboto" pitchFamily="34" charset="0"/>
+                <a:latin typeface="Times New Roman" panose="02020603050405020304" pitchFamily="18" charset="0"/>
                 <a:ea typeface="Roboto" pitchFamily="34" charset="-122"/>
-                <a:cs typeface="Roboto" pitchFamily="34" charset="-120"/>
+                <a:cs typeface="Times New Roman" panose="02020603050405020304" pitchFamily="18" charset="0"/>
               </a:rPr>
               <a:t>notification-service</a:t>
             </a:r>
-            <a:endParaRPr lang="en-US" sz="800" dirty="0"/>
+            <a:endParaRPr lang="en-US" sz="800" dirty="0">
+              <a:latin typeface="Times New Roman" panose="02020603050405020304" pitchFamily="18" charset="0"/>
+              <a:cs typeface="Times New Roman" panose="02020603050405020304" pitchFamily="18" charset="0"/>
+            </a:endParaRPr>
           </a:p>
         </p:txBody>
       </p:sp>
@@ -8410,13 +10349,16 @@
                 <a:solidFill>
                   <a:srgbClr val="3C3939"/>
                 </a:solidFill>
-                <a:latin typeface="Roboto" pitchFamily="34" charset="0"/>
+                <a:latin typeface="Times New Roman" panose="02020603050405020304" pitchFamily="18" charset="0"/>
                 <a:ea typeface="Roboto" pitchFamily="34" charset="-122"/>
-                <a:cs typeface="Roboto" pitchFamily="34" charset="-120"/>
+                <a:cs typeface="Times New Roman" panose="02020603050405020304" pitchFamily="18" charset="0"/>
               </a:rPr>
               <a:t>vignesh8386/notify:v1.0.0</a:t>
             </a:r>
-            <a:endParaRPr lang="en-US" sz="800" dirty="0"/>
+            <a:endParaRPr lang="en-US" sz="800" dirty="0">
+              <a:latin typeface="Times New Roman" panose="02020603050405020304" pitchFamily="18" charset="0"/>
+              <a:cs typeface="Times New Roman" panose="02020603050405020304" pitchFamily="18" charset="0"/>
+            </a:endParaRPr>
           </a:p>
         </p:txBody>
       </p:sp>
@@ -8452,13 +10394,16 @@
                 <a:solidFill>
                   <a:srgbClr val="3C3939"/>
                 </a:solidFill>
-                <a:latin typeface="Roboto" pitchFamily="34" charset="0"/>
+                <a:latin typeface="Times New Roman" panose="02020603050405020304" pitchFamily="18" charset="0"/>
                 <a:ea typeface="Roboto" pitchFamily="34" charset="-122"/>
-                <a:cs typeface="Roboto" pitchFamily="34" charset="-120"/>
+                <a:cs typeface="Times New Roman" panose="02020603050405020304" pitchFamily="18" charset="0"/>
               </a:rPr>
               <a:t>Email / alerts</a:t>
             </a:r>
-            <a:endParaRPr lang="en-US" sz="800" dirty="0"/>
+            <a:endParaRPr lang="en-US" sz="800" dirty="0">
+              <a:latin typeface="Times New Roman" panose="02020603050405020304" pitchFamily="18" charset="0"/>
+              <a:cs typeface="Times New Roman" panose="02020603050405020304" pitchFamily="18" charset="0"/>
+            </a:endParaRPr>
           </a:p>
         </p:txBody>
       </p:sp>
@@ -8494,13 +10439,16 @@
                 <a:solidFill>
                   <a:srgbClr val="3C3939"/>
                 </a:solidFill>
-                <a:latin typeface="Roboto" pitchFamily="34" charset="0"/>
+                <a:latin typeface="Times New Roman" panose="02020603050405020304" pitchFamily="18" charset="0"/>
                 <a:ea typeface="Roboto" pitchFamily="34" charset="-122"/>
-                <a:cs typeface="Roboto" pitchFamily="34" charset="-120"/>
+                <a:cs typeface="Times New Roman" panose="02020603050405020304" pitchFamily="18" charset="0"/>
               </a:rPr>
               <a:t>proctoring-service</a:t>
             </a:r>
-            <a:endParaRPr lang="en-US" sz="800" dirty="0"/>
+            <a:endParaRPr lang="en-US" sz="800" dirty="0">
+              <a:latin typeface="Times New Roman" panose="02020603050405020304" pitchFamily="18" charset="0"/>
+              <a:cs typeface="Times New Roman" panose="02020603050405020304" pitchFamily="18" charset="0"/>
+            </a:endParaRPr>
           </a:p>
         </p:txBody>
       </p:sp>
@@ -8536,13 +10484,16 @@
                 <a:solidFill>
                   <a:srgbClr val="3C3939"/>
                 </a:solidFill>
-                <a:latin typeface="Roboto" pitchFamily="34" charset="0"/>
+                <a:latin typeface="Times New Roman" panose="02020603050405020304" pitchFamily="18" charset="0"/>
                 <a:ea typeface="Roboto" pitchFamily="34" charset="-122"/>
-                <a:cs typeface="Roboto" pitchFamily="34" charset="-120"/>
+                <a:cs typeface="Times New Roman" panose="02020603050405020304" pitchFamily="18" charset="0"/>
               </a:rPr>
               <a:t>vignesh8386/proctor:v1.0.0</a:t>
             </a:r>
-            <a:endParaRPr lang="en-US" sz="800" dirty="0"/>
+            <a:endParaRPr lang="en-US" sz="800" dirty="0">
+              <a:latin typeface="Times New Roman" panose="02020603050405020304" pitchFamily="18" charset="0"/>
+              <a:cs typeface="Times New Roman" panose="02020603050405020304" pitchFamily="18" charset="0"/>
+            </a:endParaRPr>
           </a:p>
         </p:txBody>
       </p:sp>
@@ -8578,13 +10529,16 @@
                 <a:solidFill>
                   <a:srgbClr val="3C3939"/>
                 </a:solidFill>
-                <a:latin typeface="Roboto" pitchFamily="34" charset="0"/>
+                <a:latin typeface="Times New Roman" panose="02020603050405020304" pitchFamily="18" charset="0"/>
                 <a:ea typeface="Roboto" pitchFamily="34" charset="-122"/>
-                <a:cs typeface="Roboto" pitchFamily="34" charset="-120"/>
+                <a:cs typeface="Times New Roman" panose="02020603050405020304" pitchFamily="18" charset="0"/>
               </a:rPr>
               <a:t>Live proctoring orchestration</a:t>
             </a:r>
-            <a:endParaRPr lang="en-US" sz="800" dirty="0"/>
+            <a:endParaRPr lang="en-US" sz="800" dirty="0">
+              <a:latin typeface="Times New Roman" panose="02020603050405020304" pitchFamily="18" charset="0"/>
+              <a:cs typeface="Times New Roman" panose="02020603050405020304" pitchFamily="18" charset="0"/>
+            </a:endParaRPr>
           </a:p>
         </p:txBody>
       </p:sp>
@@ -8620,13 +10574,16 @@
                 <a:solidFill>
                   <a:srgbClr val="3C3939"/>
                 </a:solidFill>
-                <a:latin typeface="Roboto" pitchFamily="34" charset="0"/>
+                <a:latin typeface="Times New Roman" panose="02020603050405020304" pitchFamily="18" charset="0"/>
                 <a:ea typeface="Roboto" pitchFamily="34" charset="-122"/>
-                <a:cs typeface="Roboto" pitchFamily="34" charset="-120"/>
+                <a:cs typeface="Times New Roman" panose="02020603050405020304" pitchFamily="18" charset="0"/>
               </a:rPr>
               <a:t>ai-service</a:t>
             </a:r>
-            <a:endParaRPr lang="en-US" sz="800" dirty="0"/>
+            <a:endParaRPr lang="en-US" sz="800" dirty="0">
+              <a:latin typeface="Times New Roman" panose="02020603050405020304" pitchFamily="18" charset="0"/>
+              <a:cs typeface="Times New Roman" panose="02020603050405020304" pitchFamily="18" charset="0"/>
+            </a:endParaRPr>
           </a:p>
         </p:txBody>
       </p:sp>
@@ -8662,13 +10619,16 @@
                 <a:solidFill>
                   <a:srgbClr val="3C3939"/>
                 </a:solidFill>
-                <a:latin typeface="Roboto" pitchFamily="34" charset="0"/>
+                <a:latin typeface="Times New Roman" panose="02020603050405020304" pitchFamily="18" charset="0"/>
                 <a:ea typeface="Roboto" pitchFamily="34" charset="-122"/>
-                <a:cs typeface="Roboto" pitchFamily="34" charset="-120"/>
+                <a:cs typeface="Times New Roman" panose="02020603050405020304" pitchFamily="18" charset="0"/>
               </a:rPr>
               <a:t>vignesh8386/ai:v1.0.0</a:t>
             </a:r>
-            <a:endParaRPr lang="en-US" sz="800" dirty="0"/>
+            <a:endParaRPr lang="en-US" sz="800" dirty="0">
+              <a:latin typeface="Times New Roman" panose="02020603050405020304" pitchFamily="18" charset="0"/>
+              <a:cs typeface="Times New Roman" panose="02020603050405020304" pitchFamily="18" charset="0"/>
+            </a:endParaRPr>
           </a:p>
         </p:txBody>
       </p:sp>
@@ -8704,13 +10664,16 @@
                 <a:solidFill>
                   <a:srgbClr val="3C3939"/>
                 </a:solidFill>
-                <a:latin typeface="Roboto" pitchFamily="34" charset="0"/>
+                <a:latin typeface="Times New Roman" panose="02020603050405020304" pitchFamily="18" charset="0"/>
                 <a:ea typeface="Roboto" pitchFamily="34" charset="-122"/>
-                <a:cs typeface="Roboto" pitchFamily="34" charset="-120"/>
+                <a:cs typeface="Times New Roman" panose="02020603050405020304" pitchFamily="18" charset="0"/>
               </a:rPr>
               <a:t>AI orchestration &amp; model routing</a:t>
             </a:r>
-            <a:endParaRPr lang="en-US" sz="800" dirty="0"/>
+            <a:endParaRPr lang="en-US" sz="800" dirty="0">
+              <a:latin typeface="Times New Roman" panose="02020603050405020304" pitchFamily="18" charset="0"/>
+              <a:cs typeface="Times New Roman" panose="02020603050405020304" pitchFamily="18" charset="0"/>
+            </a:endParaRPr>
           </a:p>
         </p:txBody>
       </p:sp>
@@ -8746,13 +10709,16 @@
                 <a:solidFill>
                   <a:srgbClr val="3C3939"/>
                 </a:solidFill>
-                <a:latin typeface="Roboto" pitchFamily="34" charset="0"/>
+                <a:latin typeface="Times New Roman" panose="02020603050405020304" pitchFamily="18" charset="0"/>
                 <a:ea typeface="Roboto" pitchFamily="34" charset="-122"/>
-                <a:cs typeface="Roboto" pitchFamily="34" charset="-120"/>
+                <a:cs typeface="Times New Roman" panose="02020603050405020304" pitchFamily="18" charset="0"/>
               </a:rPr>
               <a:t>yolo-v8</a:t>
             </a:r>
-            <a:endParaRPr lang="en-US" sz="800" dirty="0"/>
+            <a:endParaRPr lang="en-US" sz="800" dirty="0">
+              <a:latin typeface="Times New Roman" panose="02020603050405020304" pitchFamily="18" charset="0"/>
+              <a:cs typeface="Times New Roman" panose="02020603050405020304" pitchFamily="18" charset="0"/>
+            </a:endParaRPr>
           </a:p>
         </p:txBody>
       </p:sp>
@@ -8788,13 +10754,16 @@
                 <a:solidFill>
                   <a:srgbClr val="3C3939"/>
                 </a:solidFill>
-                <a:latin typeface="Roboto" pitchFamily="34" charset="0"/>
+                <a:latin typeface="Times New Roman" panose="02020603050405020304" pitchFamily="18" charset="0"/>
                 <a:ea typeface="Roboto" pitchFamily="34" charset="-122"/>
-                <a:cs typeface="Roboto" pitchFamily="34" charset="-120"/>
+                <a:cs typeface="Times New Roman" panose="02020603050405020304" pitchFamily="18" charset="0"/>
               </a:rPr>
               <a:t>ultralytics/ultralytics:latest</a:t>
             </a:r>
-            <a:endParaRPr lang="en-US" sz="800" dirty="0"/>
+            <a:endParaRPr lang="en-US" sz="800" dirty="0">
+              <a:latin typeface="Times New Roman" panose="02020603050405020304" pitchFamily="18" charset="0"/>
+              <a:cs typeface="Times New Roman" panose="02020603050405020304" pitchFamily="18" charset="0"/>
+            </a:endParaRPr>
           </a:p>
         </p:txBody>
       </p:sp>
@@ -8830,13 +10799,16 @@
                 <a:solidFill>
                   <a:srgbClr val="3C3939"/>
                 </a:solidFill>
-                <a:latin typeface="Roboto" pitchFamily="34" charset="0"/>
+                <a:latin typeface="Times New Roman" panose="02020603050405020304" pitchFamily="18" charset="0"/>
                 <a:ea typeface="Roboto" pitchFamily="34" charset="-122"/>
-                <a:cs typeface="Roboto" pitchFamily="34" charset="-120"/>
+                <a:cs typeface="Times New Roman" panose="02020603050405020304" pitchFamily="18" charset="0"/>
               </a:rPr>
               <a:t>Object detection for proctoring</a:t>
             </a:r>
-            <a:endParaRPr lang="en-US" sz="800" dirty="0"/>
+            <a:endParaRPr lang="en-US" sz="800" dirty="0">
+              <a:latin typeface="Times New Roman" panose="02020603050405020304" pitchFamily="18" charset="0"/>
+              <a:cs typeface="Times New Roman" panose="02020603050405020304" pitchFamily="18" charset="0"/>
+            </a:endParaRPr>
           </a:p>
         </p:txBody>
       </p:sp>
@@ -8872,13 +10844,16 @@
                 <a:solidFill>
                   <a:srgbClr val="3C3939"/>
                 </a:solidFill>
-                <a:latin typeface="Roboto" pitchFamily="34" charset="0"/>
+                <a:latin typeface="Times New Roman" panose="02020603050405020304" pitchFamily="18" charset="0"/>
                 <a:ea typeface="Roboto" pitchFamily="34" charset="-122"/>
-                <a:cs typeface="Roboto" pitchFamily="34" charset="-120"/>
+                <a:cs typeface="Times New Roman" panose="02020603050405020304" pitchFamily="18" charset="0"/>
               </a:rPr>
               <a:t>ocr</a:t>
             </a:r>
-            <a:endParaRPr lang="en-US" sz="800" dirty="0"/>
+            <a:endParaRPr lang="en-US" sz="800" dirty="0">
+              <a:latin typeface="Times New Roman" panose="02020603050405020304" pitchFamily="18" charset="0"/>
+              <a:cs typeface="Times New Roman" panose="02020603050405020304" pitchFamily="18" charset="0"/>
+            </a:endParaRPr>
           </a:p>
         </p:txBody>
       </p:sp>
@@ -8914,13 +10889,16 @@
                 <a:solidFill>
                   <a:srgbClr val="3C3939"/>
                 </a:solidFill>
-                <a:latin typeface="Roboto" pitchFamily="34" charset="0"/>
+                <a:latin typeface="Times New Roman" panose="02020603050405020304" pitchFamily="18" charset="0"/>
                 <a:ea typeface="Roboto" pitchFamily="34" charset="-122"/>
-                <a:cs typeface="Roboto" pitchFamily="34" charset="-120"/>
+                <a:cs typeface="Times New Roman" panose="02020603050405020304" pitchFamily="18" charset="0"/>
               </a:rPr>
               <a:t>openeuler/paddleocr:latest</a:t>
             </a:r>
-            <a:endParaRPr lang="en-US" sz="800" dirty="0"/>
+            <a:endParaRPr lang="en-US" sz="800" dirty="0">
+              <a:latin typeface="Times New Roman" panose="02020603050405020304" pitchFamily="18" charset="0"/>
+              <a:cs typeface="Times New Roman" panose="02020603050405020304" pitchFamily="18" charset="0"/>
+            </a:endParaRPr>
           </a:p>
         </p:txBody>
       </p:sp>
@@ -8956,13 +10934,16 @@
                 <a:solidFill>
                   <a:srgbClr val="3C3939"/>
                 </a:solidFill>
-                <a:latin typeface="Roboto" pitchFamily="34" charset="0"/>
+                <a:latin typeface="Times New Roman" panose="02020603050405020304" pitchFamily="18" charset="0"/>
                 <a:ea typeface="Roboto" pitchFamily="34" charset="-122"/>
-                <a:cs typeface="Roboto" pitchFamily="34" charset="-120"/>
+                <a:cs typeface="Times New Roman" panose="02020603050405020304" pitchFamily="18" charset="0"/>
               </a:rPr>
               <a:t>Text recognition for image checks</a:t>
             </a:r>
-            <a:endParaRPr lang="en-US" sz="800" dirty="0"/>
+            <a:endParaRPr lang="en-US" sz="800" dirty="0">
+              <a:latin typeface="Times New Roman" panose="02020603050405020304" pitchFamily="18" charset="0"/>
+              <a:cs typeface="Times New Roman" panose="02020603050405020304" pitchFamily="18" charset="0"/>
+            </a:endParaRPr>
           </a:p>
         </p:txBody>
       </p:sp>
@@ -8998,13 +10979,16 @@
                 <a:solidFill>
                   <a:srgbClr val="3C3939"/>
                 </a:solidFill>
-                <a:latin typeface="Roboto" pitchFamily="34" charset="0"/>
+                <a:latin typeface="Times New Roman" panose="02020603050405020304" pitchFamily="18" charset="0"/>
                 <a:ea typeface="Roboto" pitchFamily="34" charset="-122"/>
-                <a:cs typeface="Roboto" pitchFamily="34" charset="-120"/>
+                <a:cs typeface="Times New Roman" panose="02020603050405020304" pitchFamily="18" charset="0"/>
               </a:rPr>
               <a:t>ollama</a:t>
             </a:r>
-            <a:endParaRPr lang="en-US" sz="800" dirty="0"/>
+            <a:endParaRPr lang="en-US" sz="800" dirty="0">
+              <a:latin typeface="Times New Roman" panose="02020603050405020304" pitchFamily="18" charset="0"/>
+              <a:cs typeface="Times New Roman" panose="02020603050405020304" pitchFamily="18" charset="0"/>
+            </a:endParaRPr>
           </a:p>
         </p:txBody>
       </p:sp>
@@ -9040,13 +11024,16 @@
                 <a:solidFill>
                   <a:srgbClr val="3C3939"/>
                 </a:solidFill>
-                <a:latin typeface="Roboto" pitchFamily="34" charset="0"/>
+                <a:latin typeface="Times New Roman" panose="02020603050405020304" pitchFamily="18" charset="0"/>
                 <a:ea typeface="Roboto" pitchFamily="34" charset="-122"/>
-                <a:cs typeface="Roboto" pitchFamily="34" charset="-120"/>
+                <a:cs typeface="Times New Roman" panose="02020603050405020304" pitchFamily="18" charset="0"/>
               </a:rPr>
               <a:t>ollama/ollama:latest</a:t>
             </a:r>
-            <a:endParaRPr lang="en-US" sz="800" dirty="0"/>
+            <a:endParaRPr lang="en-US" sz="800" dirty="0">
+              <a:latin typeface="Times New Roman" panose="02020603050405020304" pitchFamily="18" charset="0"/>
+              <a:cs typeface="Times New Roman" panose="02020603050405020304" pitchFamily="18" charset="0"/>
+            </a:endParaRPr>
           </a:p>
         </p:txBody>
       </p:sp>
@@ -9082,13 +11069,16 @@
                 <a:solidFill>
                   <a:srgbClr val="3C3939"/>
                 </a:solidFill>
-                <a:latin typeface="Roboto" pitchFamily="34" charset="0"/>
+                <a:latin typeface="Times New Roman" panose="02020603050405020304" pitchFamily="18" charset="0"/>
                 <a:ea typeface="Roboto" pitchFamily="34" charset="-122"/>
-                <a:cs typeface="Roboto" pitchFamily="34" charset="-120"/>
+                <a:cs typeface="Times New Roman" panose="02020603050405020304" pitchFamily="18" charset="0"/>
               </a:rPr>
               <a:t>LLM for assistant &amp; analysis</a:t>
             </a:r>
-            <a:endParaRPr lang="en-US" sz="800" dirty="0"/>
+            <a:endParaRPr lang="en-US" sz="800" dirty="0">
+              <a:latin typeface="Times New Roman" panose="02020603050405020304" pitchFamily="18" charset="0"/>
+              <a:cs typeface="Times New Roman" panose="02020603050405020304" pitchFamily="18" charset="0"/>
+            </a:endParaRPr>
           </a:p>
         </p:txBody>
       </p:sp>
@@ -9100,7 +11090,7 @@
 </p:sld>
 </file>
 
-<file path=ppt/slides/slide6.xml><?xml version="1.0" encoding="utf-8"?>
+<file path=ppt/slides/slide8.xml><?xml version="1.0" encoding="utf-8"?>
 <p:sld xmlns:a="http://schemas.openxmlformats.org/drawingml/2006/main" xmlns:r="http://schemas.openxmlformats.org/officeDocument/2006/relationships" xmlns:p="http://schemas.openxmlformats.org/presentationml/2006/main">
   <p:cSld name="Slide 6">
     <p:spTree>
@@ -9145,17 +11135,20 @@
               <a:buNone/>
             </a:pPr>
             <a:r>
-              <a:rPr lang="en-US" sz="2200" dirty="0">
+              <a:rPr lang="en-US" sz="3200" dirty="0">
                 <a:solidFill>
                   <a:srgbClr val="1B1B27"/>
                 </a:solidFill>
-                <a:latin typeface="Raleway" pitchFamily="34" charset="0"/>
+                <a:latin typeface="Times New Roman" panose="02020603050405020304" pitchFamily="18" charset="0"/>
                 <a:ea typeface="Raleway" pitchFamily="34" charset="-122"/>
-                <a:cs typeface="Raleway" pitchFamily="34" charset="-120"/>
+                <a:cs typeface="Times New Roman" panose="02020603050405020304" pitchFamily="18" charset="0"/>
               </a:rPr>
               <a:t>Terraform Best Practices Implemented</a:t>
             </a:r>
-            <a:endParaRPr lang="en-US" sz="2200" dirty="0"/>
+            <a:endParaRPr lang="en-US" sz="3200" dirty="0">
+              <a:latin typeface="Times New Roman" panose="02020603050405020304" pitchFamily="18" charset="0"/>
+              <a:cs typeface="Times New Roman" panose="02020603050405020304" pitchFamily="18" charset="0"/>
+            </a:endParaRPr>
           </a:p>
         </p:txBody>
       </p:sp>
@@ -9187,17 +11180,20 @@
               <a:buNone/>
             </a:pPr>
             <a:r>
-              <a:rPr lang="en-US" sz="1100" dirty="0">
+              <a:rPr lang="en-US" sz="1600" dirty="0">
                 <a:solidFill>
                   <a:srgbClr val="1B1B27"/>
                 </a:solidFill>
-                <a:latin typeface="Raleway" pitchFamily="34" charset="0"/>
+                <a:latin typeface="Times New Roman" panose="02020603050405020304" pitchFamily="18" charset="0"/>
                 <a:ea typeface="Raleway" pitchFamily="34" charset="-122"/>
-                <a:cs typeface="Raleway" pitchFamily="34" charset="-120"/>
+                <a:cs typeface="Times New Roman" panose="02020603050405020304" pitchFamily="18" charset="0"/>
               </a:rPr>
               <a:t>Enterprise‑grade Infrastructure as Code</a:t>
             </a:r>
-            <a:endParaRPr lang="en-US" sz="1100" dirty="0"/>
+            <a:endParaRPr lang="en-US" sz="1600" dirty="0">
+              <a:latin typeface="Times New Roman" panose="02020603050405020304" pitchFamily="18" charset="0"/>
+              <a:cs typeface="Times New Roman" panose="02020603050405020304" pitchFamily="18" charset="0"/>
+            </a:endParaRPr>
           </a:p>
         </p:txBody>
       </p:sp>
@@ -9256,17 +11252,20 @@
               <a:buNone/>
             </a:pPr>
             <a:r>
-              <a:rPr lang="en-US" sz="1100" dirty="0">
+              <a:rPr lang="en-US" sz="1600" dirty="0">
                 <a:solidFill>
                   <a:srgbClr val="3C3939"/>
                 </a:solidFill>
-                <a:latin typeface="Raleway" pitchFamily="34" charset="0"/>
+                <a:latin typeface="Times New Roman" panose="02020603050405020304" pitchFamily="18" charset="0"/>
                 <a:ea typeface="Raleway" pitchFamily="34" charset="-122"/>
-                <a:cs typeface="Raleway" pitchFamily="34" charset="-120"/>
+                <a:cs typeface="Times New Roman" panose="02020603050405020304" pitchFamily="18" charset="0"/>
               </a:rPr>
               <a:t>Provider &amp; Modules</a:t>
             </a:r>
-            <a:endParaRPr lang="en-US" sz="1100" dirty="0"/>
+            <a:endParaRPr lang="en-US" sz="1600" dirty="0">
+              <a:latin typeface="Times New Roman" panose="02020603050405020304" pitchFamily="18" charset="0"/>
+              <a:cs typeface="Times New Roman" panose="02020603050405020304" pitchFamily="18" charset="0"/>
+            </a:endParaRPr>
           </a:p>
         </p:txBody>
       </p:sp>
@@ -9298,17 +11297,20 @@
               <a:buNone/>
             </a:pPr>
             <a:r>
-              <a:rPr lang="en-US" sz="850" dirty="0">
+              <a:rPr lang="en-US" sz="1050" dirty="0">
                 <a:solidFill>
                   <a:srgbClr val="3C3939"/>
                 </a:solidFill>
-                <a:latin typeface="Roboto" pitchFamily="34" charset="0"/>
+                <a:latin typeface="Times New Roman" panose="02020603050405020304" pitchFamily="18" charset="0"/>
                 <a:ea typeface="Roboto" pitchFamily="34" charset="-122"/>
-                <a:cs typeface="Roboto" pitchFamily="34" charset="-120"/>
+                <a:cs typeface="Times New Roman" panose="02020603050405020304" pitchFamily="18" charset="0"/>
               </a:rPr>
               <a:t>Provider configuration (azurerm + random). 12 reusable, well‑scoped modules.</a:t>
             </a:r>
-            <a:endParaRPr lang="en-US" sz="850" dirty="0"/>
+            <a:endParaRPr lang="en-US" sz="1050" dirty="0">
+              <a:latin typeface="Times New Roman" panose="02020603050405020304" pitchFamily="18" charset="0"/>
+              <a:cs typeface="Times New Roman" panose="02020603050405020304" pitchFamily="18" charset="0"/>
+            </a:endParaRPr>
           </a:p>
         </p:txBody>
       </p:sp>
@@ -9367,17 +11369,20 @@
               <a:buNone/>
             </a:pPr>
             <a:r>
-              <a:rPr lang="en-US" sz="1100" dirty="0">
+              <a:rPr lang="en-US" sz="1600" dirty="0">
                 <a:solidFill>
                   <a:srgbClr val="3C3939"/>
                 </a:solidFill>
-                <a:latin typeface="Raleway" pitchFamily="34" charset="0"/>
+                <a:latin typeface="Times New Roman" panose="02020603050405020304" pitchFamily="18" charset="0"/>
                 <a:ea typeface="Raleway" pitchFamily="34" charset="-122"/>
-                <a:cs typeface="Raleway" pitchFamily="34" charset="-120"/>
+                <a:cs typeface="Times New Roman" panose="02020603050405020304" pitchFamily="18" charset="0"/>
               </a:rPr>
               <a:t>Configuration &amp; Environments</a:t>
             </a:r>
-            <a:endParaRPr lang="en-US" sz="1100" dirty="0"/>
+            <a:endParaRPr lang="en-US" sz="1600" dirty="0">
+              <a:latin typeface="Times New Roman" panose="02020603050405020304" pitchFamily="18" charset="0"/>
+              <a:cs typeface="Times New Roman" panose="02020603050405020304" pitchFamily="18" charset="0"/>
+            </a:endParaRPr>
           </a:p>
         </p:txBody>
       </p:sp>
@@ -9409,17 +11414,20 @@
               <a:buNone/>
             </a:pPr>
             <a:r>
-              <a:rPr lang="en-US" sz="850" dirty="0">
+              <a:rPr lang="en-US" sz="1050" dirty="0">
                 <a:solidFill>
                   <a:srgbClr val="3C3939"/>
                 </a:solidFill>
-                <a:latin typeface="Roboto" pitchFamily="34" charset="0"/>
+                <a:latin typeface="Times New Roman" panose="02020603050405020304" pitchFamily="18" charset="0"/>
                 <a:ea typeface="Roboto" pitchFamily="34" charset="-122"/>
-                <a:cs typeface="Roboto" pitchFamily="34" charset="-120"/>
+                <a:cs typeface="Times New Roman" panose="02020603050405020304" pitchFamily="18" charset="0"/>
               </a:rPr>
               <a:t>Variables &amp; outputs per module, environment‑specific tfvars for dev/staging/prod, and Terraform workspaces.</a:t>
             </a:r>
-            <a:endParaRPr lang="en-US" sz="850" dirty="0"/>
+            <a:endParaRPr lang="en-US" sz="1050" dirty="0">
+              <a:latin typeface="Times New Roman" panose="02020603050405020304" pitchFamily="18" charset="0"/>
+              <a:cs typeface="Times New Roman" panose="02020603050405020304" pitchFamily="18" charset="0"/>
+            </a:endParaRPr>
           </a:p>
         </p:txBody>
       </p:sp>
@@ -9478,17 +11486,20 @@
               <a:buNone/>
             </a:pPr>
             <a:r>
-              <a:rPr lang="en-US" sz="1100" dirty="0">
+              <a:rPr lang="en-US" sz="1600" dirty="0">
                 <a:solidFill>
                   <a:srgbClr val="3C3939"/>
                 </a:solidFill>
-                <a:latin typeface="Raleway" pitchFamily="34" charset="0"/>
+                <a:latin typeface="Times New Roman" panose="02020603050405020304" pitchFamily="18" charset="0"/>
                 <a:ea typeface="Raleway" pitchFamily="34" charset="-122"/>
-                <a:cs typeface="Raleway" pitchFamily="34" charset="-120"/>
+                <a:cs typeface="Times New Roman" panose="02020603050405020304" pitchFamily="18" charset="0"/>
               </a:rPr>
               <a:t>State &amp; Secrets</a:t>
             </a:r>
-            <a:endParaRPr lang="en-US" sz="1100" dirty="0"/>
+            <a:endParaRPr lang="en-US" sz="1600" dirty="0">
+              <a:latin typeface="Times New Roman" panose="02020603050405020304" pitchFamily="18" charset="0"/>
+              <a:cs typeface="Times New Roman" panose="02020603050405020304" pitchFamily="18" charset="0"/>
+            </a:endParaRPr>
           </a:p>
         </p:txBody>
       </p:sp>
@@ -9520,17 +11531,20 @@
               <a:buNone/>
             </a:pPr>
             <a:r>
-              <a:rPr lang="en-US" sz="850" dirty="0">
+              <a:rPr lang="en-US" sz="1050" dirty="0">
                 <a:solidFill>
                   <a:srgbClr val="3C3939"/>
                 </a:solidFill>
-                <a:latin typeface="Roboto" pitchFamily="34" charset="0"/>
+                <a:latin typeface="Times New Roman" panose="02020603050405020304" pitchFamily="18" charset="0"/>
                 <a:ea typeface="Roboto" pitchFamily="34" charset="-122"/>
-                <a:cs typeface="Roboto" pitchFamily="34" charset="-120"/>
+                <a:cs typeface="Times New Roman" panose="02020603050405020304" pitchFamily="18" charset="0"/>
               </a:rPr>
               <a:t>Remote state with locking (Azure Storage + blob lease). Secrets exclusively in Key Vault; no secrets in tfvars.</a:t>
             </a:r>
-            <a:endParaRPr lang="en-US" sz="850" dirty="0"/>
+            <a:endParaRPr lang="en-US" sz="1050" dirty="0">
+              <a:latin typeface="Times New Roman" panose="02020603050405020304" pitchFamily="18" charset="0"/>
+              <a:cs typeface="Times New Roman" panose="02020603050405020304" pitchFamily="18" charset="0"/>
+            </a:endParaRPr>
           </a:p>
         </p:txBody>
       </p:sp>
@@ -9589,17 +11603,20 @@
               <a:buNone/>
             </a:pPr>
             <a:r>
-              <a:rPr lang="en-US" sz="1100" dirty="0">
+              <a:rPr lang="en-US" sz="1600" dirty="0">
                 <a:solidFill>
                   <a:srgbClr val="3C3939"/>
                 </a:solidFill>
-                <a:latin typeface="Raleway" pitchFamily="34" charset="0"/>
+                <a:latin typeface="Times New Roman" panose="02020603050405020304" pitchFamily="18" charset="0"/>
                 <a:ea typeface="Raleway" pitchFamily="34" charset="-122"/>
-                <a:cs typeface="Raleway" pitchFamily="34" charset="-120"/>
+                <a:cs typeface="Times New Roman" panose="02020603050405020304" pitchFamily="18" charset="0"/>
               </a:rPr>
               <a:t>CI / GitOps</a:t>
             </a:r>
-            <a:endParaRPr lang="en-US" sz="1100" dirty="0"/>
+            <a:endParaRPr lang="en-US" sz="1600" dirty="0">
+              <a:latin typeface="Times New Roman" panose="02020603050405020304" pitchFamily="18" charset="0"/>
+              <a:cs typeface="Times New Roman" panose="02020603050405020304" pitchFamily="18" charset="0"/>
+            </a:endParaRPr>
           </a:p>
         </p:txBody>
       </p:sp>
@@ -9631,17 +11648,20 @@
               <a:buNone/>
             </a:pPr>
             <a:r>
-              <a:rPr lang="en-US" sz="850" dirty="0">
+              <a:rPr lang="en-US" sz="1050" dirty="0">
                 <a:solidFill>
                   <a:srgbClr val="3C3939"/>
                 </a:solidFill>
-                <a:latin typeface="Roboto" pitchFamily="34" charset="0"/>
+                <a:latin typeface="Times New Roman" panose="02020603050405020304" pitchFamily="18" charset="0"/>
                 <a:ea typeface="Roboto" pitchFamily="34" charset="-122"/>
-                <a:cs typeface="Roboto" pitchFamily="34" charset="-120"/>
+                <a:cs typeface="Times New Roman" panose="02020603050405020304" pitchFamily="18" charset="0"/>
               </a:rPr>
               <a:t>GitHub repository tracking and PR‑based plans; automation for workspace initialisation.</a:t>
             </a:r>
-            <a:endParaRPr lang="en-US" sz="850" dirty="0"/>
+            <a:endParaRPr lang="en-US" sz="1050" dirty="0">
+              <a:latin typeface="Times New Roman" panose="02020603050405020304" pitchFamily="18" charset="0"/>
+              <a:cs typeface="Times New Roman" panose="02020603050405020304" pitchFamily="18" charset="0"/>
+            </a:endParaRPr>
           </a:p>
         </p:txBody>
       </p:sp>
@@ -9700,17 +11720,20 @@
               <a:buNone/>
             </a:pPr>
             <a:r>
-              <a:rPr lang="en-US" sz="1100" dirty="0">
+              <a:rPr lang="en-US" sz="1600" dirty="0">
                 <a:solidFill>
                   <a:srgbClr val="3C3939"/>
                 </a:solidFill>
-                <a:latin typeface="Raleway" pitchFamily="34" charset="0"/>
+                <a:latin typeface="Times New Roman" panose="02020603050405020304" pitchFamily="18" charset="0"/>
                 <a:ea typeface="Raleway" pitchFamily="34" charset="-122"/>
-                <a:cs typeface="Raleway" pitchFamily="34" charset="-120"/>
+                <a:cs typeface="Times New Roman" panose="02020603050405020304" pitchFamily="18" charset="0"/>
               </a:rPr>
               <a:t>Dependencies &amp; Patterns</a:t>
             </a:r>
-            <a:endParaRPr lang="en-US" sz="1100" dirty="0"/>
+            <a:endParaRPr lang="en-US" sz="1600" dirty="0">
+              <a:latin typeface="Times New Roman" panose="02020603050405020304" pitchFamily="18" charset="0"/>
+              <a:cs typeface="Times New Roman" panose="02020603050405020304" pitchFamily="18" charset="0"/>
+            </a:endParaRPr>
           </a:p>
         </p:txBody>
       </p:sp>
@@ -9742,17 +11765,20 @@
               <a:buNone/>
             </a:pPr>
             <a:r>
-              <a:rPr lang="en-US" sz="850" dirty="0">
+              <a:rPr lang="en-US" sz="1050" dirty="0">
                 <a:solidFill>
                   <a:srgbClr val="3C3939"/>
                 </a:solidFill>
-                <a:latin typeface="Roboto" pitchFamily="34" charset="0"/>
+                <a:latin typeface="Times New Roman" panose="02020603050405020304" pitchFamily="18" charset="0"/>
                 <a:ea typeface="Roboto" pitchFamily="34" charset="-122"/>
-                <a:cs typeface="Roboto" pitchFamily="34" charset="-120"/>
+                <a:cs typeface="Times New Roman" panose="02020603050405020304" pitchFamily="18" charset="0"/>
               </a:rPr>
               <a:t>Explicit and implicit dependencies modelled, naming conventions, tagging policy, and modular outputs for cross‑module wiring.</a:t>
             </a:r>
-            <a:endParaRPr lang="en-US" sz="850" dirty="0"/>
+            <a:endParaRPr lang="en-US" sz="1050" dirty="0">
+              <a:latin typeface="Times New Roman" panose="02020603050405020304" pitchFamily="18" charset="0"/>
+              <a:cs typeface="Times New Roman" panose="02020603050405020304" pitchFamily="18" charset="0"/>
+            </a:endParaRPr>
           </a:p>
         </p:txBody>
       </p:sp>
@@ -9784,105 +11810,20 @@
               <a:buNone/>
             </a:pPr>
             <a:r>
-              <a:rPr lang="en-US" sz="850" dirty="0">
+              <a:rPr lang="en-US" sz="1050" dirty="0">
                 <a:solidFill>
                   <a:srgbClr val="3C3939"/>
                 </a:solidFill>
-                <a:latin typeface="Roboto" pitchFamily="34" charset="0"/>
+                <a:latin typeface="Times New Roman" panose="02020603050405020304" pitchFamily="18" charset="0"/>
                 <a:ea typeface="Roboto" pitchFamily="34" charset="-122"/>
-                <a:cs typeface="Roboto" pitchFamily="34" charset="-120"/>
+                <a:cs typeface="Times New Roman" panose="02020603050405020304" pitchFamily="18" charset="0"/>
               </a:rPr>
               <a:t>Bottom note: Project structure: 12 modules · 3 environments · 3 workspaces</a:t>
             </a:r>
-            <a:endParaRPr lang="en-US" sz="850" dirty="0"/>
-          </a:p>
-        </p:txBody>
-      </p:sp>
-      <p:sp>
-        <p:nvSpPr>
-          <p:cNvPr id="20" name="Shape 18"/>
-          <p:cNvSpPr/>
-          <p:nvPr/>
-        </p:nvSpPr>
-        <p:spPr>
-          <a:xfrm>
-            <a:off x="674489" y="4302398"/>
-            <a:ext cx="7794947" cy="380702"/>
-          </a:xfrm>
-          <a:prstGeom prst="roundRect">
-            <a:avLst>
-              <a:gd name="adj" fmla="val 12463"/>
-            </a:avLst>
-          </a:prstGeom>
-          <a:solidFill>
-            <a:srgbClr val="B6D6FC"/>
-          </a:solidFill>
-          <a:ln/>
-        </p:spPr>
-      </p:sp>
-      <p:pic>
-        <p:nvPicPr>
-          <p:cNvPr id="21" name="Image 0" descr="preencoded.png"/>
-          <p:cNvPicPr>
-            <a:picLocks noChangeAspect="1"/>
-          </p:cNvPicPr>
-          <p:nvPr/>
-        </p:nvPicPr>
-        <p:blipFill>
-          <a:blip r:embed="rId3"/>
-          <a:stretch>
-            <a:fillRect/>
-          </a:stretch>
-        </p:blipFill>
-        <p:spPr>
-          <a:xfrm>
-            <a:off x="787450" y="4454203"/>
-            <a:ext cx="141163" cy="112961"/>
-          </a:xfrm>
-          <a:prstGeom prst="rect">
-            <a:avLst/>
-          </a:prstGeom>
-        </p:spPr>
-      </p:pic>
-      <p:sp>
-        <p:nvSpPr>
-          <p:cNvPr id="22" name="Text 19"/>
-          <p:cNvSpPr/>
-          <p:nvPr/>
-        </p:nvSpPr>
-        <p:spPr>
-          <a:xfrm>
-            <a:off x="1041574" y="4411563"/>
-            <a:ext cx="7772102" cy="162371"/>
-          </a:xfrm>
-          <a:prstGeom prst="rect">
-            <a:avLst/>
-          </a:prstGeom>
-          <a:noFill/>
-          <a:ln/>
-        </p:spPr>
-        <p:txBody>
-          <a:bodyPr wrap="none" lIns="0" tIns="0" rIns="0" bIns="0" rtlCol="0" anchor="t"/>
-          <a:lstStyle/>
-          <a:p>
-            <a:pPr marL="0" indent="0" algn="l">
-              <a:lnSpc>
-                <a:spcPct val="120000"/>
-              </a:lnSpc>
-              <a:buNone/>
-            </a:pPr>
-            <a:r>
-              <a:rPr lang="en-US" sz="850" dirty="0">
-                <a:solidFill>
-                  <a:srgbClr val="000000"/>
-                </a:solidFill>
-                <a:latin typeface="Roboto" pitchFamily="34" charset="0"/>
-                <a:ea typeface="Roboto" pitchFamily="34" charset="-122"/>
-                <a:cs typeface="Roboto" pitchFamily="34" charset="-120"/>
-              </a:rPr>
-              <a:t>Clahan Academy | Vignesh | 6/10</a:t>
-            </a:r>
-            <a:endParaRPr lang="en-US" sz="850" dirty="0"/>
+            <a:endParaRPr lang="en-US" sz="1050" dirty="0">
+              <a:latin typeface="Times New Roman" panose="02020603050405020304" pitchFamily="18" charset="0"/>
+              <a:cs typeface="Times New Roman" panose="02020603050405020304" pitchFamily="18" charset="0"/>
+            </a:endParaRPr>
           </a:p>
         </p:txBody>
       </p:sp>
@@ -9894,7 +11835,7 @@
 </p:sld>
 </file>
 
-<file path=ppt/slides/slide7.xml><?xml version="1.0" encoding="utf-8"?>
+<file path=ppt/slides/slide9.xml><?xml version="1.0" encoding="utf-8"?>
 <p:sld xmlns:a="http://schemas.openxmlformats.org/drawingml/2006/main" xmlns:r="http://schemas.openxmlformats.org/officeDocument/2006/relationships" xmlns:p="http://schemas.openxmlformats.org/presentationml/2006/main">
   <p:cSld name="Slide 7">
     <p:spTree>
@@ -9939,17 +11880,20 @@
               <a:buNone/>
             </a:pPr>
             <a:r>
-              <a:rPr lang="en-US" sz="2350" dirty="0">
+              <a:rPr lang="en-US" sz="3600" dirty="0">
                 <a:solidFill>
                   <a:srgbClr val="1B1B27"/>
                 </a:solidFill>
-                <a:latin typeface="Raleway" pitchFamily="34" charset="0"/>
+                <a:latin typeface="Times New Roman" panose="02020603050405020304" pitchFamily="18" charset="0"/>
                 <a:ea typeface="Raleway" pitchFamily="34" charset="-122"/>
-                <a:cs typeface="Raleway" pitchFamily="34" charset="-120"/>
+                <a:cs typeface="Times New Roman" panose="02020603050405020304" pitchFamily="18" charset="0"/>
               </a:rPr>
               <a:t>Terraform Project Structure</a:t>
             </a:r>
-            <a:endParaRPr lang="en-US" sz="2350" dirty="0"/>
+            <a:endParaRPr lang="en-US" sz="3600" dirty="0">
+              <a:latin typeface="Times New Roman" panose="02020603050405020304" pitchFamily="18" charset="0"/>
+              <a:cs typeface="Times New Roman" panose="02020603050405020304" pitchFamily="18" charset="0"/>
+            </a:endParaRPr>
           </a:p>
         </p:txBody>
       </p:sp>
@@ -9981,17 +11925,20 @@
               <a:buNone/>
             </a:pPr>
             <a:r>
-              <a:rPr lang="en-US" sz="950" dirty="0">
+              <a:rPr lang="en-US" sz="1200" dirty="0">
                 <a:solidFill>
                   <a:srgbClr val="3C3939"/>
                 </a:solidFill>
-                <a:latin typeface="Roboto" pitchFamily="34" charset="0"/>
+                <a:latin typeface="Times New Roman" panose="02020603050405020304" pitchFamily="18" charset="0"/>
                 <a:ea typeface="Roboto" pitchFamily="34" charset="-122"/>
-                <a:cs typeface="Roboto" pitchFamily="34" charset="-120"/>
+                <a:cs typeface="Times New Roman" panose="02020603050405020304" pitchFamily="18" charset="0"/>
               </a:rPr>
               <a:t>Modular repository layout designed for clarity and reuse.</a:t>
             </a:r>
-            <a:endParaRPr lang="en-US" sz="950" dirty="0"/>
+            <a:endParaRPr lang="en-US" sz="1200" dirty="0">
+              <a:latin typeface="Times New Roman" panose="02020603050405020304" pitchFamily="18" charset="0"/>
+              <a:cs typeface="Times New Roman" panose="02020603050405020304" pitchFamily="18" charset="0"/>
+            </a:endParaRPr>
           </a:p>
         </p:txBody>
       </p:sp>
@@ -10053,17 +12000,20 @@
               <a:buNone/>
             </a:pPr>
             <a:r>
-              <a:rPr lang="en-US" sz="1150" dirty="0">
+              <a:rPr lang="en-US" dirty="0">
                 <a:solidFill>
                   <a:srgbClr val="3C3939"/>
                 </a:solidFill>
-                <a:latin typeface="Raleway" pitchFamily="34" charset="0"/>
+                <a:latin typeface="Times New Roman" panose="02020603050405020304" pitchFamily="18" charset="0"/>
                 <a:ea typeface="Raleway" pitchFamily="34" charset="-122"/>
-                <a:cs typeface="Raleway" pitchFamily="34" charset="-120"/>
+                <a:cs typeface="Times New Roman" panose="02020603050405020304" pitchFamily="18" charset="0"/>
               </a:rPr>
               <a:t>clahan-academy-terraform</a:t>
             </a:r>
-            <a:endParaRPr lang="en-US" sz="1150" dirty="0"/>
+            <a:endParaRPr lang="en-US" dirty="0">
+              <a:latin typeface="Times New Roman" panose="02020603050405020304" pitchFamily="18" charset="0"/>
+              <a:cs typeface="Times New Roman" panose="02020603050405020304" pitchFamily="18" charset="0"/>
+            </a:endParaRPr>
           </a:p>
         </p:txBody>
       </p:sp>
@@ -10095,17 +12045,20 @@
               <a:buNone/>
             </a:pPr>
             <a:r>
-              <a:rPr lang="en-US" sz="950" dirty="0">
+              <a:rPr lang="en-US" sz="1200" dirty="0">
                 <a:solidFill>
                   <a:srgbClr val="3C3939"/>
                 </a:solidFill>
-                <a:latin typeface="Roboto" pitchFamily="34" charset="0"/>
+                <a:latin typeface="Times New Roman" panose="02020603050405020304" pitchFamily="18" charset="0"/>
                 <a:ea typeface="Roboto" pitchFamily="34" charset="-122"/>
-                <a:cs typeface="Roboto" pitchFamily="34" charset="-120"/>
+                <a:cs typeface="Times New Roman" panose="02020603050405020304" pitchFamily="18" charset="0"/>
               </a:rPr>
               <a:t>backend.tf · providers.tf · main.tf · variables.tf · outputs.tf</a:t>
             </a:r>
-            <a:endParaRPr lang="en-US" sz="950" dirty="0"/>
+            <a:endParaRPr lang="en-US" sz="1200" dirty="0">
+              <a:latin typeface="Times New Roman" panose="02020603050405020304" pitchFamily="18" charset="0"/>
+              <a:cs typeface="Times New Roman" panose="02020603050405020304" pitchFamily="18" charset="0"/>
+            </a:endParaRPr>
           </a:p>
         </p:txBody>
       </p:sp>
@@ -10167,17 +12120,20 @@
               <a:buNone/>
             </a:pPr>
             <a:r>
-              <a:rPr lang="en-US" sz="1150" dirty="0">
+              <a:rPr lang="en-US" dirty="0">
                 <a:solidFill>
                   <a:srgbClr val="3C3939"/>
                 </a:solidFill>
-                <a:latin typeface="Raleway" pitchFamily="34" charset="0"/>
+                <a:latin typeface="Times New Roman" panose="02020603050405020304" pitchFamily="18" charset="0"/>
                 <a:ea typeface="Raleway" pitchFamily="34" charset="-122"/>
-                <a:cs typeface="Raleway" pitchFamily="34" charset="-120"/>
+                <a:cs typeface="Times New Roman" panose="02020603050405020304" pitchFamily="18" charset="0"/>
               </a:rPr>
               <a:t>environments/</a:t>
             </a:r>
-            <a:endParaRPr lang="en-US" sz="1150" dirty="0"/>
+            <a:endParaRPr lang="en-US" dirty="0">
+              <a:latin typeface="Times New Roman" panose="02020603050405020304" pitchFamily="18" charset="0"/>
+              <a:cs typeface="Times New Roman" panose="02020603050405020304" pitchFamily="18" charset="0"/>
+            </a:endParaRPr>
           </a:p>
         </p:txBody>
       </p:sp>
@@ -10209,17 +12165,20 @@
               <a:buNone/>
             </a:pPr>
             <a:r>
-              <a:rPr lang="en-US" sz="950" dirty="0">
+              <a:rPr lang="en-US" sz="1200" dirty="0">
                 <a:solidFill>
                   <a:srgbClr val="3C3939"/>
                 </a:solidFill>
-                <a:latin typeface="Roboto" pitchFamily="34" charset="0"/>
+                <a:latin typeface="Times New Roman" panose="02020603050405020304" pitchFamily="18" charset="0"/>
                 <a:ea typeface="Roboto" pitchFamily="34" charset="-122"/>
-                <a:cs typeface="Roboto" pitchFamily="34" charset="-120"/>
+                <a:cs typeface="Times New Roman" panose="02020603050405020304" pitchFamily="18" charset="0"/>
               </a:rPr>
               <a:t>dev.tfvars · staging.tfvars · prod.tfvars</a:t>
             </a:r>
-            <a:endParaRPr lang="en-US" sz="950" dirty="0"/>
+            <a:endParaRPr lang="en-US" sz="1200" dirty="0">
+              <a:latin typeface="Times New Roman" panose="02020603050405020304" pitchFamily="18" charset="0"/>
+              <a:cs typeface="Times New Roman" panose="02020603050405020304" pitchFamily="18" charset="0"/>
+            </a:endParaRPr>
           </a:p>
         </p:txBody>
       </p:sp>
@@ -10281,17 +12240,20 @@
               <a:buNone/>
             </a:pPr>
             <a:r>
-              <a:rPr lang="en-US" sz="1150" dirty="0">
+              <a:rPr lang="en-US" dirty="0">
                 <a:solidFill>
                   <a:srgbClr val="3C3939"/>
                 </a:solidFill>
-                <a:latin typeface="Raleway" pitchFamily="34" charset="0"/>
+                <a:latin typeface="Times New Roman" panose="02020603050405020304" pitchFamily="18" charset="0"/>
                 <a:ea typeface="Raleway" pitchFamily="34" charset="-122"/>
-                <a:cs typeface="Raleway" pitchFamily="34" charset="-120"/>
+                <a:cs typeface="Times New Roman" panose="02020603050405020304" pitchFamily="18" charset="0"/>
               </a:rPr>
               <a:t>modules/ (12)</a:t>
             </a:r>
-            <a:endParaRPr lang="en-US" sz="1150" dirty="0"/>
+            <a:endParaRPr lang="en-US" dirty="0">
+              <a:latin typeface="Times New Roman" panose="02020603050405020304" pitchFamily="18" charset="0"/>
+              <a:cs typeface="Times New Roman" panose="02020603050405020304" pitchFamily="18" charset="0"/>
+            </a:endParaRPr>
           </a:p>
         </p:txBody>
       </p:sp>
@@ -10314,7 +12276,7 @@
         </p:spPr>
         <p:txBody>
           <a:bodyPr wrap="square" lIns="0" tIns="0" rIns="0" bIns="0" rtlCol="0" anchor="t">
-            <a:normAutofit/>
+            <a:noAutofit/>
           </a:bodyPr>
           <a:lstStyle/>
           <a:p>
@@ -10325,17 +12287,20 @@
               <a:buNone/>
             </a:pPr>
             <a:r>
-              <a:rPr lang="en-US" sz="950" dirty="0">
+              <a:rPr lang="en-US" sz="1200" dirty="0">
                 <a:solidFill>
                   <a:srgbClr val="3C3939"/>
                 </a:solidFill>
-                <a:latin typeface="Roboto" pitchFamily="34" charset="0"/>
+                <a:latin typeface="Times New Roman" panose="02020603050405020304" pitchFamily="18" charset="0"/>
                 <a:ea typeface="Roboto" pitchFamily="34" charset="-122"/>
-                <a:cs typeface="Roboto" pitchFamily="34" charset="-120"/>
+                <a:cs typeface="Times New Roman" panose="02020603050405020304" pitchFamily="18" charset="0"/>
               </a:rPr>
               <a:t>networking · container-apps · postgresql-primary · postgresql-replica · redis · keyvault · servicebus · appgateway · frontdoor · function-app · automation · monitoring</a:t>
             </a:r>
-            <a:endParaRPr lang="en-US" sz="950" dirty="0"/>
+            <a:endParaRPr lang="en-US" sz="1200" dirty="0">
+              <a:latin typeface="Times New Roman" panose="02020603050405020304" pitchFamily="18" charset="0"/>
+              <a:cs typeface="Times New Roman" panose="02020603050405020304" pitchFamily="18" charset="0"/>
+            </a:endParaRPr>
           </a:p>
         </p:txBody>
       </p:sp>
@@ -10397,17 +12362,20 @@
               <a:buNone/>
             </a:pPr>
             <a:r>
-              <a:rPr lang="en-US" sz="1150" dirty="0">
+              <a:rPr lang="en-US" dirty="0">
                 <a:solidFill>
                   <a:srgbClr val="3C3939"/>
                 </a:solidFill>
-                <a:latin typeface="Raleway" pitchFamily="34" charset="0"/>
+                <a:latin typeface="Times New Roman" panose="02020603050405020304" pitchFamily="18" charset="0"/>
                 <a:ea typeface="Raleway" pitchFamily="34" charset="-122"/>
-                <a:cs typeface="Raleway" pitchFamily="34" charset="-120"/>
+                <a:cs typeface="Times New Roman" panose="02020603050405020304" pitchFamily="18" charset="0"/>
               </a:rPr>
               <a:t>scripts/</a:t>
             </a:r>
-            <a:endParaRPr lang="en-US" sz="1150" dirty="0"/>
+            <a:endParaRPr lang="en-US" dirty="0">
+              <a:latin typeface="Times New Roman" panose="02020603050405020304" pitchFamily="18" charset="0"/>
+              <a:cs typeface="Times New Roman" panose="02020603050405020304" pitchFamily="18" charset="0"/>
+            </a:endParaRPr>
           </a:p>
         </p:txBody>
       </p:sp>
@@ -10439,17 +12407,20 @@
               <a:buNone/>
             </a:pPr>
             <a:r>
-              <a:rPr lang="en-US" sz="950" dirty="0">
+              <a:rPr lang="en-US" sz="1200" dirty="0">
                 <a:solidFill>
                   <a:srgbClr val="3C3939"/>
                 </a:solidFill>
-                <a:latin typeface="Roboto" pitchFamily="34" charset="0"/>
+                <a:latin typeface="Times New Roman" panose="02020603050405020304" pitchFamily="18" charset="0"/>
                 <a:ea typeface="Roboto" pitchFamily="34" charset="-122"/>
-                <a:cs typeface="Roboto" pitchFamily="34" charset="-120"/>
+                <a:cs typeface="Times New Roman" panose="02020603050405020304" pitchFamily="18" charset="0"/>
               </a:rPr>
               <a:t>bootstrap-backend.sh · init-workspaces.sh · failover-dr.sh</a:t>
             </a:r>
-            <a:endParaRPr lang="en-US" sz="950" dirty="0"/>
+            <a:endParaRPr lang="en-US" sz="1200" dirty="0">
+              <a:latin typeface="Times New Roman" panose="02020603050405020304" pitchFamily="18" charset="0"/>
+              <a:cs typeface="Times New Roman" panose="02020603050405020304" pitchFamily="18" charset="0"/>
+            </a:endParaRPr>
           </a:p>
         </p:txBody>
       </p:sp>
@@ -10481,1804 +12452,20 @@
               <a:buNone/>
             </a:pPr>
             <a:r>
-              <a:rPr lang="en-US" sz="950" dirty="0">
+              <a:rPr lang="en-US" sz="1200" dirty="0">
                 <a:solidFill>
                   <a:srgbClr val="3C3939"/>
                 </a:solidFill>
-                <a:latin typeface="Roboto" pitchFamily="34" charset="0"/>
+                <a:latin typeface="Times New Roman" panose="02020603050405020304" pitchFamily="18" charset="0"/>
                 <a:ea typeface="Roboto" pitchFamily="34" charset="-122"/>
-                <a:cs typeface="Roboto" pitchFamily="34" charset="-120"/>
+                <a:cs typeface="Times New Roman" panose="02020603050405020304" pitchFamily="18" charset="0"/>
               </a:rPr>
               <a:t>Highlight: Modular design enables repeatable environments and safe drift management.</a:t>
             </a:r>
-            <a:endParaRPr lang="en-US" sz="950" dirty="0"/>
-          </a:p>
-        </p:txBody>
-      </p:sp>
-      <p:sp>
-        <p:nvSpPr>
-          <p:cNvPr id="17" name="Shape 11"/>
-          <p:cNvSpPr/>
-          <p:nvPr/>
-        </p:nvSpPr>
-        <p:spPr>
-          <a:xfrm>
-            <a:off x="426393" y="4241676"/>
-            <a:ext cx="8291215" cy="430485"/>
-          </a:xfrm>
-          <a:prstGeom prst="roundRect">
-            <a:avLst>
-              <a:gd name="adj" fmla="val 11886"/>
-            </a:avLst>
-          </a:prstGeom>
-          <a:solidFill>
-            <a:srgbClr val="D2D2E0"/>
-          </a:solidFill>
-          <a:ln/>
-        </p:spPr>
-      </p:sp>
-      <p:pic>
-        <p:nvPicPr>
-          <p:cNvPr id="18" name="Image 4" descr="preencoded.png"/>
-          <p:cNvPicPr>
-            <a:picLocks noChangeAspect="1"/>
-          </p:cNvPicPr>
-          <p:nvPr/>
-        </p:nvPicPr>
-        <p:blipFill>
-          <a:blip r:embed="rId5"/>
-          <a:stretch>
-            <a:fillRect/>
-          </a:stretch>
-        </p:blipFill>
-        <p:spPr>
-          <a:xfrm>
-            <a:off x="548208" y="4411117"/>
-            <a:ext cx="152251" cy="121816"/>
-          </a:xfrm>
-          <a:prstGeom prst="rect">
-            <a:avLst/>
-          </a:prstGeom>
-        </p:spPr>
-      </p:pic>
-      <p:sp>
-        <p:nvSpPr>
-          <p:cNvPr id="19" name="Text 12"/>
-          <p:cNvSpPr/>
-          <p:nvPr/>
-        </p:nvSpPr>
-        <p:spPr>
-          <a:xfrm>
-            <a:off x="822275" y="4366320"/>
-            <a:ext cx="8230716" cy="181198"/>
-          </a:xfrm>
-          <a:prstGeom prst="rect">
-            <a:avLst/>
-          </a:prstGeom>
-          <a:noFill/>
-          <a:ln/>
-        </p:spPr>
-        <p:txBody>
-          <a:bodyPr wrap="none" lIns="0" tIns="0" rIns="0" bIns="0" rtlCol="0" anchor="t"/>
-          <a:lstStyle/>
-          <a:p>
-            <a:pPr marL="0" indent="0" algn="l">
-              <a:lnSpc>
-                <a:spcPct val="124000"/>
-              </a:lnSpc>
-              <a:buNone/>
-            </a:pPr>
-            <a:r>
-              <a:rPr lang="en-US" sz="950" dirty="0">
-                <a:solidFill>
-                  <a:srgbClr val="000000"/>
-                </a:solidFill>
-                <a:latin typeface="Roboto" pitchFamily="34" charset="0"/>
-                <a:ea typeface="Roboto" pitchFamily="34" charset="-122"/>
-                <a:cs typeface="Roboto" pitchFamily="34" charset="-120"/>
-              </a:rPr>
-              <a:t>Clahan Academy | Vignesh | 7/10</a:t>
-            </a:r>
-            <a:endParaRPr lang="en-US" sz="950" dirty="0"/>
-          </a:p>
-        </p:txBody>
-      </p:sp>
-    </p:spTree>
-  </p:cSld>
-  <p:clrMapOvr>
-    <a:masterClrMapping/>
-  </p:clrMapOvr>
-</p:sld>
-</file>
-
-<file path=ppt/slides/slide8.xml><?xml version="1.0" encoding="utf-8"?>
-<p:sld xmlns:a="http://schemas.openxmlformats.org/drawingml/2006/main" xmlns:r="http://schemas.openxmlformats.org/officeDocument/2006/relationships" xmlns:p="http://schemas.openxmlformats.org/presentationml/2006/main">
-  <p:cSld name="Slide 8">
-    <p:spTree>
-      <p:nvGrpSpPr>
-        <p:cNvPr id="1" name=""/>
-        <p:cNvGrpSpPr/>
-        <p:nvPr/>
-      </p:nvGrpSpPr>
-      <p:grpSpPr>
-        <a:xfrm>
-          <a:off x="0" y="0"/>
-          <a:ext cx="0" cy="0"/>
-          <a:chOff x="0" y="0"/>
-          <a:chExt cx="0" cy="0"/>
-        </a:xfrm>
-      </p:grpSpPr>
-      <p:sp>
-        <p:nvSpPr>
-          <p:cNvPr id="2" name="Text 0"/>
-          <p:cNvSpPr/>
-          <p:nvPr/>
-        </p:nvSpPr>
-        <p:spPr>
-          <a:xfrm>
-            <a:off x="1133029" y="274886"/>
-            <a:ext cx="4085704" cy="311497"/>
-          </a:xfrm>
-          <a:prstGeom prst="rect">
-            <a:avLst/>
-          </a:prstGeom>
-          <a:noFill/>
-          <a:ln/>
-        </p:spPr>
-        <p:txBody>
-          <a:bodyPr wrap="none" lIns="0" tIns="0" rIns="0" bIns="0" rtlCol="0" anchor="t"/>
-          <a:lstStyle/>
-          <a:p>
-            <a:pPr marL="0" indent="0" algn="l">
-              <a:lnSpc>
-                <a:spcPct val="104000"/>
-              </a:lnSpc>
-              <a:buNone/>
-            </a:pPr>
-            <a:r>
-              <a:rPr lang="en-US" sz="1950" dirty="0">
-                <a:solidFill>
-                  <a:srgbClr val="1B1B27"/>
-                </a:solidFill>
-                <a:latin typeface="Raleway" pitchFamily="34" charset="0"/>
-                <a:ea typeface="Raleway" pitchFamily="34" charset="-122"/>
-                <a:cs typeface="Raleway" pitchFamily="34" charset="-120"/>
-              </a:rPr>
-              <a:t>Disaster Recovery (DR) Strategy</a:t>
-            </a:r>
-            <a:endParaRPr lang="en-US" sz="1950" dirty="0"/>
-          </a:p>
-        </p:txBody>
-      </p:sp>
-      <p:sp>
-        <p:nvSpPr>
-          <p:cNvPr id="3" name="Text 1"/>
-          <p:cNvSpPr/>
-          <p:nvPr/>
-        </p:nvSpPr>
-        <p:spPr>
-          <a:xfrm>
-            <a:off x="1133029" y="614363"/>
-            <a:ext cx="2627858" cy="155674"/>
-          </a:xfrm>
-          <a:prstGeom prst="rect">
-            <a:avLst/>
-          </a:prstGeom>
-          <a:noFill/>
-          <a:ln/>
-        </p:spPr>
-        <p:txBody>
-          <a:bodyPr wrap="none" lIns="0" tIns="0" rIns="0" bIns="0" rtlCol="0" anchor="t"/>
-          <a:lstStyle/>
-          <a:p>
-            <a:pPr marL="0" indent="0" algn="l">
-              <a:lnSpc>
-                <a:spcPct val="104000"/>
-              </a:lnSpc>
-              <a:buNone/>
-            </a:pPr>
-            <a:r>
-              <a:rPr lang="en-US" sz="950" dirty="0">
-                <a:solidFill>
-                  <a:srgbClr val="1B1B27"/>
-                </a:solidFill>
-                <a:latin typeface="Raleway" pitchFamily="34" charset="0"/>
-                <a:ea typeface="Raleway" pitchFamily="34" charset="-122"/>
-                <a:cs typeface="Raleway" pitchFamily="34" charset="-120"/>
-              </a:rPr>
-              <a:t>Active‑Standby Cross‑Region Failover</a:t>
-            </a:r>
-            <a:endParaRPr lang="en-US" sz="950" dirty="0"/>
-          </a:p>
-        </p:txBody>
-      </p:sp>
-      <p:pic>
-        <p:nvPicPr>
-          <p:cNvPr id="4" name="Image 0" descr="preencoded.png"/>
-          <p:cNvPicPr>
-            <a:picLocks noChangeAspect="1"/>
-          </p:cNvPicPr>
-          <p:nvPr/>
-        </p:nvPicPr>
-        <p:blipFill>
-          <a:blip r:embed="rId3"/>
-          <a:stretch>
-            <a:fillRect/>
-          </a:stretch>
-        </p:blipFill>
-        <p:spPr>
-          <a:xfrm>
-            <a:off x="1133029" y="875109"/>
-            <a:ext cx="6877869" cy="3095030"/>
-          </a:xfrm>
-          <a:prstGeom prst="rect">
-            <a:avLst/>
-          </a:prstGeom>
-        </p:spPr>
-      </p:pic>
-      <p:sp>
-        <p:nvSpPr>
-          <p:cNvPr id="5" name="Text 2"/>
-          <p:cNvSpPr/>
-          <p:nvPr/>
-        </p:nvSpPr>
-        <p:spPr>
-          <a:xfrm>
-            <a:off x="2169057" y="1025769"/>
-            <a:ext cx="1203623" cy="185999"/>
-          </a:xfrm>
-          <a:prstGeom prst="rect">
-            <a:avLst/>
-          </a:prstGeom>
-          <a:noFill/>
-          <a:ln/>
-        </p:spPr>
-        <p:txBody>
-          <a:bodyPr wrap="none" lIns="0" tIns="0" rIns="0" bIns="0" rtlCol="0" anchor="t"/>
-          <a:lstStyle/>
-          <a:p>
-            <a:pPr marL="0" indent="0" algn="ctr">
-              <a:lnSpc>
-                <a:spcPct val="104000"/>
-              </a:lnSpc>
-              <a:buNone/>
-            </a:pPr>
-            <a:r>
-              <a:rPr lang="en-US" sz="1150" dirty="0">
-                <a:solidFill>
-                  <a:srgbClr val="3C3939"/>
-                </a:solidFill>
-                <a:latin typeface="Raleway" pitchFamily="34" charset="0"/>
-                <a:ea typeface="Raleway" pitchFamily="34" charset="-122"/>
-                <a:cs typeface="Raleway" pitchFamily="34" charset="-120"/>
-              </a:rPr>
-              <a:t>Primary Down</a:t>
-            </a:r>
-            <a:endParaRPr lang="en-US" sz="1150" dirty="0"/>
-          </a:p>
-        </p:txBody>
-      </p:sp>
-      <p:sp>
-        <p:nvSpPr>
-          <p:cNvPr id="6" name="Text 3"/>
-          <p:cNvSpPr/>
-          <p:nvPr/>
-        </p:nvSpPr>
-        <p:spPr>
-          <a:xfrm>
-            <a:off x="2169057" y="1264675"/>
-            <a:ext cx="1203623" cy="253372"/>
-          </a:xfrm>
-          <a:prstGeom prst="rect">
-            <a:avLst/>
-          </a:prstGeom>
-          <a:noFill/>
-          <a:ln/>
-        </p:spPr>
-        <p:txBody>
-          <a:bodyPr wrap="square" lIns="0" tIns="0" rIns="0" bIns="0" rtlCol="0" anchor="t">
-            <a:normAutofit/>
-          </a:bodyPr>
-          <a:lstStyle/>
-          <a:p>
-            <a:pPr marL="0" indent="0" algn="ctr">
-              <a:lnSpc>
-                <a:spcPct val="89000"/>
-              </a:lnSpc>
-              <a:buNone/>
-            </a:pPr>
-            <a:r>
-              <a:rPr lang="en-US" sz="900" dirty="0">
-                <a:solidFill>
-                  <a:srgbClr val="3C3939"/>
-                </a:solidFill>
-                <a:latin typeface="Roboto" pitchFamily="34" charset="0"/>
-                <a:ea typeface="Roboto" pitchFamily="34" charset="-122"/>
-                <a:cs typeface="Roboto" pitchFamily="34" charset="-120"/>
-              </a:rPr>
-              <a:t>T+0 primary failure detected</a:t>
-            </a:r>
-            <a:endParaRPr lang="en-US" sz="900" dirty="0"/>
-          </a:p>
-        </p:txBody>
-      </p:sp>
-      <p:sp>
-        <p:nvSpPr>
-          <p:cNvPr id="7" name="Text 4"/>
-          <p:cNvSpPr/>
-          <p:nvPr/>
-        </p:nvSpPr>
-        <p:spPr>
-          <a:xfrm>
-            <a:off x="3359454" y="3347041"/>
-            <a:ext cx="1210236" cy="185999"/>
-          </a:xfrm>
-          <a:prstGeom prst="rect">
-            <a:avLst/>
-          </a:prstGeom>
-          <a:noFill/>
-          <a:ln/>
-        </p:spPr>
-        <p:txBody>
-          <a:bodyPr wrap="none" lIns="0" tIns="0" rIns="0" bIns="0" rtlCol="0" anchor="t"/>
-          <a:lstStyle/>
-          <a:p>
-            <a:pPr marL="0" indent="0" algn="ctr">
-              <a:lnSpc>
-                <a:spcPct val="104000"/>
-              </a:lnSpc>
-              <a:buNone/>
-            </a:pPr>
-            <a:r>
-              <a:rPr lang="en-US" sz="1150" dirty="0">
-                <a:solidFill>
-                  <a:srgbClr val="3C3939"/>
-                </a:solidFill>
-                <a:latin typeface="Raleway" pitchFamily="34" charset="0"/>
-                <a:ea typeface="Raleway" pitchFamily="34" charset="-122"/>
-                <a:cs typeface="Raleway" pitchFamily="34" charset="-120"/>
-              </a:rPr>
-              <a:t>Probe Detects</a:t>
-            </a:r>
-            <a:endParaRPr lang="en-US" sz="1150" dirty="0"/>
-          </a:p>
-        </p:txBody>
-      </p:sp>
-      <p:sp>
-        <p:nvSpPr>
-          <p:cNvPr id="8" name="Text 5"/>
-          <p:cNvSpPr/>
-          <p:nvPr/>
-        </p:nvSpPr>
-        <p:spPr>
-          <a:xfrm>
-            <a:off x="3359454" y="3585947"/>
-            <a:ext cx="1210236" cy="253372"/>
-          </a:xfrm>
-          <a:prstGeom prst="rect">
-            <a:avLst/>
-          </a:prstGeom>
-          <a:noFill/>
-          <a:ln/>
-        </p:spPr>
-        <p:txBody>
-          <a:bodyPr wrap="square" lIns="0" tIns="0" rIns="0" bIns="0" rtlCol="0" anchor="t">
-            <a:normAutofit/>
-          </a:bodyPr>
-          <a:lstStyle/>
-          <a:p>
-            <a:pPr marL="0" indent="0" algn="ctr">
-              <a:lnSpc>
-                <a:spcPct val="89000"/>
-              </a:lnSpc>
-              <a:buNone/>
-            </a:pPr>
-            <a:r>
-              <a:rPr lang="en-US" sz="900" dirty="0">
-                <a:solidFill>
-                  <a:srgbClr val="3C3939"/>
-                </a:solidFill>
-                <a:latin typeface="Roboto" pitchFamily="34" charset="0"/>
-                <a:ea typeface="Roboto" pitchFamily="34" charset="-122"/>
-                <a:cs typeface="Roboto" pitchFamily="34" charset="-120"/>
-              </a:rPr>
-              <a:t>T+30s Front Door health probe</a:t>
-            </a:r>
-            <a:endParaRPr lang="en-US" sz="900" dirty="0"/>
-          </a:p>
-        </p:txBody>
-      </p:sp>
-      <p:sp>
-        <p:nvSpPr>
-          <p:cNvPr id="9" name="Text 6"/>
-          <p:cNvSpPr/>
-          <p:nvPr/>
-        </p:nvSpPr>
-        <p:spPr>
-          <a:xfrm>
-            <a:off x="4536623" y="1002622"/>
-            <a:ext cx="1203623" cy="185999"/>
-          </a:xfrm>
-          <a:prstGeom prst="rect">
-            <a:avLst/>
-          </a:prstGeom>
-          <a:noFill/>
-          <a:ln/>
-        </p:spPr>
-        <p:txBody>
-          <a:bodyPr wrap="none" lIns="0" tIns="0" rIns="0" bIns="0" rtlCol="0" anchor="t"/>
-          <a:lstStyle/>
-          <a:p>
-            <a:pPr marL="0" indent="0" algn="ctr">
-              <a:lnSpc>
-                <a:spcPct val="104000"/>
-              </a:lnSpc>
-              <a:buNone/>
-            </a:pPr>
-            <a:r>
-              <a:rPr lang="en-US" sz="1150" dirty="0">
-                <a:solidFill>
-                  <a:srgbClr val="3C3939"/>
-                </a:solidFill>
-                <a:latin typeface="Raleway" pitchFamily="34" charset="0"/>
-                <a:ea typeface="Raleway" pitchFamily="34" charset="-122"/>
-                <a:cs typeface="Raleway" pitchFamily="34" charset="-120"/>
-              </a:rPr>
-              <a:t>Traffic Routed</a:t>
-            </a:r>
-            <a:endParaRPr lang="en-US" sz="1150" dirty="0"/>
-          </a:p>
-        </p:txBody>
-      </p:sp>
-      <p:sp>
-        <p:nvSpPr>
-          <p:cNvPr id="10" name="Text 7"/>
-          <p:cNvSpPr/>
-          <p:nvPr/>
-        </p:nvSpPr>
-        <p:spPr>
-          <a:xfrm>
-            <a:off x="4536623" y="1241528"/>
-            <a:ext cx="1203623" cy="253372"/>
-          </a:xfrm>
-          <a:prstGeom prst="rect">
-            <a:avLst/>
-          </a:prstGeom>
-          <a:noFill/>
-          <a:ln/>
-        </p:spPr>
-        <p:txBody>
-          <a:bodyPr wrap="square" lIns="0" tIns="0" rIns="0" bIns="0" rtlCol="0" anchor="t">
-            <a:normAutofit/>
-          </a:bodyPr>
-          <a:lstStyle/>
-          <a:p>
-            <a:pPr marL="0" indent="0" algn="ctr">
-              <a:lnSpc>
-                <a:spcPct val="89000"/>
-              </a:lnSpc>
-              <a:buNone/>
-            </a:pPr>
-            <a:r>
-              <a:rPr lang="en-US" sz="900" dirty="0">
-                <a:solidFill>
-                  <a:srgbClr val="3C3939"/>
-                </a:solidFill>
-                <a:latin typeface="Roboto" pitchFamily="34" charset="0"/>
-                <a:ea typeface="Roboto" pitchFamily="34" charset="-122"/>
-                <a:cs typeface="Roboto" pitchFamily="34" charset="-120"/>
-              </a:rPr>
-              <a:t>T+60s route to standby</a:t>
-            </a:r>
-            <a:endParaRPr lang="en-US" sz="900" dirty="0"/>
-          </a:p>
-        </p:txBody>
-      </p:sp>
-      <p:sp>
-        <p:nvSpPr>
-          <p:cNvPr id="11" name="Text 8"/>
-          <p:cNvSpPr/>
-          <p:nvPr/>
-        </p:nvSpPr>
-        <p:spPr>
-          <a:xfrm>
-            <a:off x="5727019" y="3347041"/>
-            <a:ext cx="1203622" cy="185999"/>
-          </a:xfrm>
-          <a:prstGeom prst="rect">
-            <a:avLst/>
-          </a:prstGeom>
-          <a:noFill/>
-          <a:ln/>
-        </p:spPr>
-        <p:txBody>
-          <a:bodyPr wrap="none" lIns="0" tIns="0" rIns="0" bIns="0" rtlCol="0" anchor="t"/>
-          <a:lstStyle/>
-          <a:p>
-            <a:pPr marL="0" indent="0" algn="ctr">
-              <a:lnSpc>
-                <a:spcPct val="104000"/>
-              </a:lnSpc>
-              <a:buNone/>
-            </a:pPr>
-            <a:r>
-              <a:rPr lang="en-US" sz="1150" dirty="0">
-                <a:solidFill>
-                  <a:srgbClr val="3C3939"/>
-                </a:solidFill>
-                <a:latin typeface="Raleway" pitchFamily="34" charset="0"/>
-                <a:ea typeface="Raleway" pitchFamily="34" charset="-122"/>
-                <a:cs typeface="Raleway" pitchFamily="34" charset="-120"/>
-              </a:rPr>
-              <a:t>Recovery</a:t>
-            </a:r>
-            <a:endParaRPr lang="en-US" sz="1150" dirty="0"/>
-          </a:p>
-        </p:txBody>
-      </p:sp>
-      <p:sp>
-        <p:nvSpPr>
-          <p:cNvPr id="12" name="Text 9"/>
-          <p:cNvSpPr/>
-          <p:nvPr/>
-        </p:nvSpPr>
-        <p:spPr>
-          <a:xfrm>
-            <a:off x="5727019" y="3585947"/>
-            <a:ext cx="1203622" cy="253372"/>
-          </a:xfrm>
-          <a:prstGeom prst="rect">
-            <a:avLst/>
-          </a:prstGeom>
-          <a:noFill/>
-          <a:ln/>
-        </p:spPr>
-        <p:txBody>
-          <a:bodyPr wrap="square" lIns="0" tIns="0" rIns="0" bIns="0" rtlCol="0" anchor="t">
-            <a:normAutofit/>
-          </a:bodyPr>
-          <a:lstStyle/>
-          <a:p>
-            <a:pPr marL="0" indent="0" algn="ctr">
-              <a:lnSpc>
-                <a:spcPct val="89000"/>
-              </a:lnSpc>
-              <a:buNone/>
-            </a:pPr>
-            <a:r>
-              <a:rPr lang="en-US" sz="900" dirty="0">
-                <a:solidFill>
-                  <a:srgbClr val="3C3939"/>
-                </a:solidFill>
-                <a:latin typeface="Roboto" pitchFamily="34" charset="0"/>
-                <a:ea typeface="Roboto" pitchFamily="34" charset="-122"/>
-                <a:cs typeface="Roboto" pitchFamily="34" charset="-120"/>
-              </a:rPr>
-              <a:t>T+5min replica promoted, scaled</a:t>
-            </a:r>
-            <a:endParaRPr lang="en-US" sz="900" dirty="0"/>
-          </a:p>
-        </p:txBody>
-      </p:sp>
-      <p:sp>
-        <p:nvSpPr>
-          <p:cNvPr id="13" name="Text 10"/>
-          <p:cNvSpPr/>
-          <p:nvPr/>
-        </p:nvSpPr>
-        <p:spPr>
-          <a:xfrm>
-            <a:off x="1133029" y="4048944"/>
-            <a:ext cx="6877869" cy="350416"/>
-          </a:xfrm>
-          <a:prstGeom prst="rect">
-            <a:avLst/>
-          </a:prstGeom>
-          <a:noFill/>
-          <a:ln/>
-        </p:spPr>
-        <p:txBody>
-          <a:bodyPr wrap="square" lIns="0" tIns="0" rIns="0" bIns="0" rtlCol="0" anchor="t"/>
-          <a:lstStyle/>
-          <a:p>
-            <a:pPr marL="0" indent="0" algn="l">
-              <a:lnSpc>
-                <a:spcPct val="114000"/>
-              </a:lnSpc>
-              <a:spcAft>
-                <a:spcPts val="600"/>
-              </a:spcAft>
-              <a:buNone/>
-            </a:pPr>
-            <a:r>
-              <a:rPr lang="en-US" sz="750" dirty="0">
-                <a:solidFill>
-                  <a:srgbClr val="3C3939"/>
-                </a:solidFill>
-                <a:latin typeface="Roboto" pitchFamily="34" charset="0"/>
-                <a:ea typeface="Roboto" pitchFamily="34" charset="-122"/>
-                <a:cs typeface="Roboto" pitchFamily="34" charset="-120"/>
-              </a:rPr>
-              <a:t>Key metrics: RTO ≈ 5 minutes. RPO ≈ 5 minutes (replication lag dependent).</a:t>
-            </a:r>
-            <a:endParaRPr lang="en-US" sz="750" dirty="0"/>
-          </a:p>
-          <a:p>
-            <a:pPr marL="0" indent="0" algn="l">
-              <a:lnSpc>
-                <a:spcPct val="114000"/>
-              </a:lnSpc>
-              <a:buNone/>
-            </a:pPr>
-            <a:r>
-              <a:rPr lang="en-US" sz="750" dirty="0">
-                <a:solidFill>
-                  <a:srgbClr val="3C3939"/>
-                </a:solidFill>
-                <a:latin typeface="Roboto" pitchFamily="34" charset="0"/>
-                <a:ea typeface="Roboto" pitchFamily="34" charset="-122"/>
-                <a:cs typeface="Roboto" pitchFamily="34" charset="-120"/>
-              </a:rPr>
-              <a:t>Core components: Azure Front Door, PostgreSQL cross‑region read replica, Automation Account runbooks, scaled Container Apps in DR region.</a:t>
-            </a:r>
-            <a:endParaRPr lang="en-US" sz="750" dirty="0"/>
-          </a:p>
-        </p:txBody>
-      </p:sp>
-    </p:spTree>
-  </p:cSld>
-  <p:clrMapOvr>
-    <a:masterClrMapping/>
-  </p:clrMapOvr>
-</p:sld>
-</file>
-
-<file path=ppt/slides/slide9.xml><?xml version="1.0" encoding="utf-8"?>
-<p:sld xmlns:a="http://schemas.openxmlformats.org/drawingml/2006/main" xmlns:r="http://schemas.openxmlformats.org/officeDocument/2006/relationships" xmlns:p="http://schemas.openxmlformats.org/presentationml/2006/main">
-  <p:cSld name="Slide 9">
-    <p:spTree>
-      <p:nvGrpSpPr>
-        <p:cNvPr id="1" name=""/>
-        <p:cNvGrpSpPr/>
-        <p:nvPr/>
-      </p:nvGrpSpPr>
-      <p:grpSpPr>
-        <a:xfrm>
-          <a:off x="0" y="0"/>
-          <a:ext cx="0" cy="0"/>
-          <a:chOff x="0" y="0"/>
-          <a:chExt cx="0" cy="0"/>
-        </a:xfrm>
-      </p:grpSpPr>
-      <p:sp>
-        <p:nvSpPr>
-          <p:cNvPr id="2" name="Text 0"/>
-          <p:cNvSpPr/>
-          <p:nvPr/>
-        </p:nvSpPr>
-        <p:spPr>
-          <a:xfrm>
-            <a:off x="1744414" y="229642"/>
-            <a:ext cx="3397448" cy="256059"/>
-          </a:xfrm>
-          <a:prstGeom prst="rect">
-            <a:avLst/>
-          </a:prstGeom>
-          <a:noFill/>
-          <a:ln/>
-        </p:spPr>
-        <p:txBody>
-          <a:bodyPr wrap="none" lIns="0" tIns="0" rIns="0" bIns="0" rtlCol="0" anchor="t"/>
-          <a:lstStyle/>
-          <a:p>
-            <a:pPr marL="0" indent="0" algn="l">
-              <a:lnSpc>
-                <a:spcPct val="104000"/>
-              </a:lnSpc>
-              <a:buNone/>
-            </a:pPr>
-            <a:r>
-              <a:rPr lang="en-US" sz="1600" dirty="0">
-                <a:solidFill>
-                  <a:srgbClr val="1B1B27"/>
-                </a:solidFill>
-                <a:latin typeface="Raleway" pitchFamily="34" charset="0"/>
-                <a:ea typeface="Raleway" pitchFamily="34" charset="-122"/>
-                <a:cs typeface="Raleway" pitchFamily="34" charset="-120"/>
-              </a:rPr>
-              <a:t>Security &amp; Secret Management</a:t>
-            </a:r>
-            <a:endParaRPr lang="en-US" sz="1600" dirty="0"/>
-          </a:p>
-        </p:txBody>
-      </p:sp>
-      <p:sp>
-        <p:nvSpPr>
-          <p:cNvPr id="3" name="Text 1"/>
-          <p:cNvSpPr/>
-          <p:nvPr/>
-        </p:nvSpPr>
-        <p:spPr>
-          <a:xfrm>
-            <a:off x="1744414" y="504602"/>
-            <a:ext cx="3055590" cy="128067"/>
-          </a:xfrm>
-          <a:prstGeom prst="rect">
-            <a:avLst/>
-          </a:prstGeom>
-          <a:noFill/>
-          <a:ln/>
-        </p:spPr>
-        <p:txBody>
-          <a:bodyPr wrap="none" lIns="0" tIns="0" rIns="0" bIns="0" rtlCol="0" anchor="t"/>
-          <a:lstStyle/>
-          <a:p>
-            <a:pPr marL="0" indent="0" algn="l">
-              <a:lnSpc>
-                <a:spcPct val="104000"/>
-              </a:lnSpc>
-              <a:buNone/>
-            </a:pPr>
-            <a:r>
-              <a:rPr lang="en-US" sz="800" dirty="0">
-                <a:solidFill>
-                  <a:srgbClr val="1B1B27"/>
-                </a:solidFill>
-                <a:latin typeface="Raleway" pitchFamily="34" charset="0"/>
-                <a:ea typeface="Raleway" pitchFamily="34" charset="-122"/>
-                <a:cs typeface="Raleway" pitchFamily="34" charset="-120"/>
-              </a:rPr>
-              <a:t>Zero Secrets in Code — Managed Identities &amp; Key Vault</a:t>
-            </a:r>
-            <a:endParaRPr lang="en-US" sz="800" dirty="0"/>
-          </a:p>
-        </p:txBody>
-      </p:sp>
-      <p:pic>
-        <p:nvPicPr>
-          <p:cNvPr id="4" name="Image 0" descr="preencoded.png"/>
-          <p:cNvPicPr>
-            <a:picLocks noChangeAspect="1"/>
-          </p:cNvPicPr>
-          <p:nvPr/>
-        </p:nvPicPr>
-        <p:blipFill>
-          <a:blip r:embed="rId3"/>
-          <a:stretch>
-            <a:fillRect/>
-          </a:stretch>
-        </p:blipFill>
-        <p:spPr>
-          <a:xfrm>
-            <a:off x="2577852" y="703734"/>
-            <a:ext cx="3988222" cy="3077021"/>
-          </a:xfrm>
-          <a:prstGeom prst="rect">
-            <a:avLst/>
-          </a:prstGeom>
-        </p:spPr>
-      </p:pic>
-      <p:sp>
-        <p:nvSpPr>
-          <p:cNvPr id="5" name="Text 2"/>
-          <p:cNvSpPr/>
-          <p:nvPr/>
-        </p:nvSpPr>
-        <p:spPr>
-          <a:xfrm>
-            <a:off x="4219084" y="1989890"/>
-            <a:ext cx="695564" cy="477140"/>
-          </a:xfrm>
-          <a:prstGeom prst="rect">
-            <a:avLst/>
-          </a:prstGeom>
-          <a:noFill/>
-          <a:ln/>
-        </p:spPr>
-        <p:txBody>
-          <a:bodyPr wrap="square" lIns="0" tIns="0" rIns="0" bIns="0" rtlCol="0" anchor="t">
-            <a:normAutofit/>
-          </a:bodyPr>
-          <a:lstStyle/>
-          <a:p>
-            <a:pPr marL="0" indent="0" algn="ctr">
-              <a:lnSpc>
-                <a:spcPct val="104000"/>
-              </a:lnSpc>
-              <a:buNone/>
-            </a:pPr>
-            <a:r>
-              <a:rPr lang="en-US" sz="1000" dirty="0">
-                <a:solidFill>
-                  <a:srgbClr val="FFFFFF"/>
-                </a:solidFill>
-                <a:latin typeface="Raleway" pitchFamily="34" charset="0"/>
-                <a:ea typeface="Raleway" pitchFamily="34" charset="-122"/>
-                <a:cs typeface="Raleway" pitchFamily="34" charset="-120"/>
-              </a:rPr>
-              <a:t>Secure Secret Flow</a:t>
-            </a:r>
-            <a:endParaRPr lang="en-US" sz="1000" dirty="0"/>
-          </a:p>
-        </p:txBody>
-      </p:sp>
-      <p:sp>
-        <p:nvSpPr>
-          <p:cNvPr id="6" name="Text 3"/>
-          <p:cNvSpPr/>
-          <p:nvPr/>
-        </p:nvSpPr>
-        <p:spPr>
-          <a:xfrm>
-            <a:off x="4903338" y="2967056"/>
-            <a:ext cx="1034776" cy="318093"/>
-          </a:xfrm>
-          <a:prstGeom prst="rect">
-            <a:avLst/>
-          </a:prstGeom>
-          <a:noFill/>
-          <a:ln/>
-        </p:spPr>
-        <p:txBody>
-          <a:bodyPr wrap="square" lIns="0" tIns="0" rIns="0" bIns="0" rtlCol="0" anchor="t">
-            <a:normAutofit/>
-          </a:bodyPr>
-          <a:lstStyle/>
-          <a:p>
-            <a:pPr marL="0" indent="0" algn="ctr">
-              <a:lnSpc>
-                <a:spcPct val="104000"/>
-              </a:lnSpc>
-              <a:buNone/>
-            </a:pPr>
-            <a:r>
-              <a:rPr lang="en-US" sz="1000" dirty="0">
-                <a:solidFill>
-                  <a:srgbClr val="3C3939"/>
-                </a:solidFill>
-                <a:latin typeface="Raleway" pitchFamily="34" charset="0"/>
-                <a:ea typeface="Raleway" pitchFamily="34" charset="-122"/>
-                <a:cs typeface="Raleway" pitchFamily="34" charset="-120"/>
-              </a:rPr>
-              <a:t>Key Vault response</a:t>
-            </a:r>
-            <a:endParaRPr lang="en-US" sz="1000" dirty="0"/>
-          </a:p>
-        </p:txBody>
-      </p:sp>
-      <p:sp>
-        <p:nvSpPr>
-          <p:cNvPr id="7" name="Text 4"/>
-          <p:cNvSpPr/>
-          <p:nvPr/>
-        </p:nvSpPr>
-        <p:spPr>
-          <a:xfrm>
-            <a:off x="4903338" y="3330389"/>
-            <a:ext cx="1034776" cy="200752"/>
-          </a:xfrm>
-          <a:prstGeom prst="rect">
-            <a:avLst/>
-          </a:prstGeom>
-          <a:noFill/>
-          <a:ln/>
-        </p:spPr>
-        <p:txBody>
-          <a:bodyPr wrap="square" lIns="0" tIns="0" rIns="0" bIns="0" rtlCol="0" anchor="t">
-            <a:normAutofit lnSpcReduction="10000"/>
-          </a:bodyPr>
-          <a:lstStyle/>
-          <a:p>
-            <a:pPr marL="0" indent="0" algn="ctr">
-              <a:lnSpc>
-                <a:spcPct val="82000"/>
-              </a:lnSpc>
-              <a:buNone/>
-            </a:pPr>
-            <a:r>
-              <a:rPr lang="en-US" sz="800" dirty="0">
-                <a:solidFill>
-                  <a:srgbClr val="3C3939"/>
-                </a:solidFill>
-                <a:latin typeface="Roboto" pitchFamily="34" charset="0"/>
-                <a:ea typeface="Roboto" pitchFamily="34" charset="-122"/>
-                <a:cs typeface="Roboto" pitchFamily="34" charset="-120"/>
-              </a:rPr>
-              <a:t>Secret returned over private network</a:t>
-            </a:r>
-            <a:endParaRPr lang="en-US" sz="800" dirty="0"/>
-          </a:p>
-        </p:txBody>
-      </p:sp>
-      <p:sp>
-        <p:nvSpPr>
-          <p:cNvPr id="8" name="Text 5"/>
-          <p:cNvSpPr/>
-          <p:nvPr/>
-        </p:nvSpPr>
-        <p:spPr>
-          <a:xfrm>
-            <a:off x="2743131" y="1949157"/>
-            <a:ext cx="1057396" cy="318093"/>
-          </a:xfrm>
-          <a:prstGeom prst="rect">
-            <a:avLst/>
-          </a:prstGeom>
-          <a:noFill/>
-          <a:ln/>
-        </p:spPr>
-        <p:txBody>
-          <a:bodyPr wrap="square" lIns="0" tIns="0" rIns="0" bIns="0" rtlCol="0" anchor="t">
-            <a:normAutofit/>
-          </a:bodyPr>
-          <a:lstStyle/>
-          <a:p>
-            <a:pPr marL="0" indent="0" algn="ctr">
-              <a:lnSpc>
-                <a:spcPct val="104000"/>
-              </a:lnSpc>
-              <a:buNone/>
-            </a:pPr>
-            <a:r>
-              <a:rPr lang="en-US" sz="1000" dirty="0">
-                <a:solidFill>
-                  <a:srgbClr val="3C3939"/>
-                </a:solidFill>
-                <a:latin typeface="Raleway" pitchFamily="34" charset="0"/>
-                <a:ea typeface="Raleway" pitchFamily="34" charset="-122"/>
-                <a:cs typeface="Raleway" pitchFamily="34" charset="-120"/>
-              </a:rPr>
-              <a:t>No public DB access</a:t>
-            </a:r>
-            <a:endParaRPr lang="en-US" sz="1000" dirty="0"/>
-          </a:p>
-        </p:txBody>
-      </p:sp>
-      <p:sp>
-        <p:nvSpPr>
-          <p:cNvPr id="9" name="Text 6"/>
-          <p:cNvSpPr/>
-          <p:nvPr/>
-        </p:nvSpPr>
-        <p:spPr>
-          <a:xfrm>
-            <a:off x="2743131" y="2312490"/>
-            <a:ext cx="1057396" cy="200752"/>
-          </a:xfrm>
-          <a:prstGeom prst="rect">
-            <a:avLst/>
-          </a:prstGeom>
-          <a:noFill/>
-          <a:ln/>
-        </p:spPr>
-        <p:txBody>
-          <a:bodyPr wrap="square" lIns="0" tIns="0" rIns="0" bIns="0" rtlCol="0" anchor="t">
-            <a:normAutofit lnSpcReduction="10000"/>
-          </a:bodyPr>
-          <a:lstStyle/>
-          <a:p>
-            <a:pPr marL="0" indent="0" algn="ctr">
-              <a:lnSpc>
-                <a:spcPct val="82000"/>
-              </a:lnSpc>
-              <a:buNone/>
-            </a:pPr>
-            <a:r>
-              <a:rPr lang="en-US" sz="800" dirty="0">
-                <a:solidFill>
-                  <a:srgbClr val="3C3939"/>
-                </a:solidFill>
-                <a:latin typeface="Roboto" pitchFamily="34" charset="0"/>
-                <a:ea typeface="Roboto" pitchFamily="34" charset="-122"/>
-                <a:cs typeface="Roboto" pitchFamily="34" charset="-120"/>
-              </a:rPr>
-              <a:t>Databases deny direct public connections</a:t>
-            </a:r>
-            <a:endParaRPr lang="en-US" sz="800" dirty="0"/>
-          </a:p>
-        </p:txBody>
-      </p:sp>
-      <p:sp>
-        <p:nvSpPr>
-          <p:cNvPr id="10" name="Text 7"/>
-          <p:cNvSpPr/>
-          <p:nvPr/>
-        </p:nvSpPr>
-        <p:spPr>
-          <a:xfrm>
-            <a:off x="3178565" y="2967056"/>
-            <a:ext cx="1034776" cy="318093"/>
-          </a:xfrm>
-          <a:prstGeom prst="rect">
-            <a:avLst/>
-          </a:prstGeom>
-          <a:noFill/>
-          <a:ln/>
-        </p:spPr>
-        <p:txBody>
-          <a:bodyPr wrap="square" lIns="0" tIns="0" rIns="0" bIns="0" rtlCol="0" anchor="t">
-            <a:normAutofit/>
-          </a:bodyPr>
-          <a:lstStyle/>
-          <a:p>
-            <a:pPr marL="0" indent="0" algn="ctr">
-              <a:lnSpc>
-                <a:spcPct val="104000"/>
-              </a:lnSpc>
-              <a:buNone/>
-            </a:pPr>
-            <a:r>
-              <a:rPr lang="en-US" sz="1000" dirty="0">
-                <a:solidFill>
-                  <a:srgbClr val="3C3939"/>
-                </a:solidFill>
-                <a:latin typeface="Raleway" pitchFamily="34" charset="0"/>
-                <a:ea typeface="Raleway" pitchFamily="34" charset="-122"/>
-                <a:cs typeface="Raleway" pitchFamily="34" charset="-120"/>
-              </a:rPr>
-              <a:t>Network protections</a:t>
-            </a:r>
-            <a:endParaRPr lang="en-US" sz="1000" dirty="0"/>
-          </a:p>
-        </p:txBody>
-      </p:sp>
-      <p:sp>
-        <p:nvSpPr>
-          <p:cNvPr id="11" name="Text 8"/>
-          <p:cNvSpPr/>
-          <p:nvPr/>
-        </p:nvSpPr>
-        <p:spPr>
-          <a:xfrm>
-            <a:off x="3178565" y="3330389"/>
-            <a:ext cx="1034776" cy="200752"/>
-          </a:xfrm>
-          <a:prstGeom prst="rect">
-            <a:avLst/>
-          </a:prstGeom>
-          <a:noFill/>
-          <a:ln/>
-        </p:spPr>
-        <p:txBody>
-          <a:bodyPr wrap="square" lIns="0" tIns="0" rIns="0" bIns="0" rtlCol="0" anchor="t">
-            <a:normAutofit lnSpcReduction="10000"/>
-          </a:bodyPr>
-          <a:lstStyle/>
-          <a:p>
-            <a:pPr marL="0" indent="0" algn="ctr">
-              <a:lnSpc>
-                <a:spcPct val="82000"/>
-              </a:lnSpc>
-              <a:buNone/>
-            </a:pPr>
-            <a:r>
-              <a:rPr lang="en-US" sz="800" dirty="0">
-                <a:solidFill>
-                  <a:srgbClr val="3C3939"/>
-                </a:solidFill>
-                <a:latin typeface="Roboto" pitchFamily="34" charset="0"/>
-                <a:ea typeface="Roboto" pitchFamily="34" charset="-122"/>
-                <a:cs typeface="Roboto" pitchFamily="34" charset="-120"/>
-              </a:rPr>
-              <a:t>NSGs and restricted subnets</a:t>
-            </a:r>
-            <a:endParaRPr lang="en-US" sz="800" dirty="0"/>
-          </a:p>
-        </p:txBody>
-      </p:sp>
-      <p:sp>
-        <p:nvSpPr>
-          <p:cNvPr id="12" name="Text 9"/>
-          <p:cNvSpPr/>
-          <p:nvPr/>
-        </p:nvSpPr>
-        <p:spPr>
-          <a:xfrm>
-            <a:off x="5333117" y="1943502"/>
-            <a:ext cx="1057396" cy="318093"/>
-          </a:xfrm>
-          <a:prstGeom prst="rect">
-            <a:avLst/>
-          </a:prstGeom>
-          <a:noFill/>
-          <a:ln/>
-        </p:spPr>
-        <p:txBody>
-          <a:bodyPr wrap="square" lIns="0" tIns="0" rIns="0" bIns="0" rtlCol="0" anchor="t">
-            <a:normAutofit/>
-          </a:bodyPr>
-          <a:lstStyle/>
-          <a:p>
-            <a:pPr marL="0" indent="0" algn="ctr">
-              <a:lnSpc>
-                <a:spcPct val="104000"/>
-              </a:lnSpc>
-              <a:buNone/>
-            </a:pPr>
-            <a:r>
-              <a:rPr lang="en-US" sz="1000" dirty="0">
-                <a:solidFill>
-                  <a:srgbClr val="3C3939"/>
-                </a:solidFill>
-                <a:latin typeface="Raleway" pitchFamily="34" charset="0"/>
-                <a:ea typeface="Raleway" pitchFamily="34" charset="-122"/>
-                <a:cs typeface="Raleway" pitchFamily="34" charset="-120"/>
-              </a:rPr>
-              <a:t>Private endpoint request</a:t>
-            </a:r>
-            <a:endParaRPr lang="en-US" sz="1000" dirty="0"/>
-          </a:p>
-        </p:txBody>
-      </p:sp>
-      <p:sp>
-        <p:nvSpPr>
-          <p:cNvPr id="13" name="Text 10"/>
-          <p:cNvSpPr/>
-          <p:nvPr/>
-        </p:nvSpPr>
-        <p:spPr>
-          <a:xfrm>
-            <a:off x="5333117" y="2306835"/>
-            <a:ext cx="1057396" cy="200752"/>
-          </a:xfrm>
-          <a:prstGeom prst="rect">
-            <a:avLst/>
-          </a:prstGeom>
-          <a:noFill/>
-          <a:ln/>
-        </p:spPr>
-        <p:txBody>
-          <a:bodyPr wrap="square" lIns="0" tIns="0" rIns="0" bIns="0" rtlCol="0" anchor="t">
-            <a:normAutofit lnSpcReduction="10000"/>
-          </a:bodyPr>
-          <a:lstStyle/>
-          <a:p>
-            <a:pPr marL="0" indent="0" algn="ctr">
-              <a:lnSpc>
-                <a:spcPct val="82000"/>
-              </a:lnSpc>
-              <a:buNone/>
-            </a:pPr>
-            <a:r>
-              <a:rPr lang="en-US" sz="800" dirty="0">
-                <a:solidFill>
-                  <a:srgbClr val="3C3939"/>
-                </a:solidFill>
-                <a:latin typeface="Roboto" pitchFamily="34" charset="0"/>
-                <a:ea typeface="Roboto" pitchFamily="34" charset="-122"/>
-                <a:cs typeface="Roboto" pitchFamily="34" charset="-120"/>
-              </a:rPr>
-              <a:t>Key Vault accessed via private endpoint</a:t>
-            </a:r>
-            <a:endParaRPr lang="en-US" sz="800" dirty="0"/>
-          </a:p>
-        </p:txBody>
-      </p:sp>
-      <p:sp>
-        <p:nvSpPr>
-          <p:cNvPr id="14" name="Text 11"/>
-          <p:cNvSpPr/>
-          <p:nvPr/>
-        </p:nvSpPr>
-        <p:spPr>
-          <a:xfrm>
-            <a:off x="4015504" y="883190"/>
-            <a:ext cx="1063051" cy="318093"/>
-          </a:xfrm>
-          <a:prstGeom prst="rect">
-            <a:avLst/>
-          </a:prstGeom>
-          <a:noFill/>
-          <a:ln/>
-        </p:spPr>
-        <p:txBody>
-          <a:bodyPr wrap="square" lIns="0" tIns="0" rIns="0" bIns="0" rtlCol="0" anchor="t">
-            <a:normAutofit/>
-          </a:bodyPr>
-          <a:lstStyle/>
-          <a:p>
-            <a:pPr marL="0" indent="0" algn="ctr">
-              <a:lnSpc>
-                <a:spcPct val="104000"/>
-              </a:lnSpc>
-              <a:buNone/>
-            </a:pPr>
-            <a:r>
-              <a:rPr lang="en-US" sz="1000" dirty="0">
-                <a:solidFill>
-                  <a:srgbClr val="3C3939"/>
-                </a:solidFill>
-                <a:latin typeface="Raleway" pitchFamily="34" charset="0"/>
-                <a:ea typeface="Raleway" pitchFamily="34" charset="-122"/>
-                <a:cs typeface="Raleway" pitchFamily="34" charset="-120"/>
-              </a:rPr>
-              <a:t>Container App identity</a:t>
-            </a:r>
-            <a:endParaRPr lang="en-US" sz="1000" dirty="0"/>
-          </a:p>
-        </p:txBody>
-      </p:sp>
-      <p:sp>
-        <p:nvSpPr>
-          <p:cNvPr id="15" name="Text 12"/>
-          <p:cNvSpPr/>
-          <p:nvPr/>
-        </p:nvSpPr>
-        <p:spPr>
-          <a:xfrm>
-            <a:off x="4015504" y="1246524"/>
-            <a:ext cx="1063051" cy="200752"/>
-          </a:xfrm>
-          <a:prstGeom prst="rect">
-            <a:avLst/>
-          </a:prstGeom>
-          <a:noFill/>
-          <a:ln/>
-        </p:spPr>
-        <p:txBody>
-          <a:bodyPr wrap="square" lIns="0" tIns="0" rIns="0" bIns="0" rtlCol="0" anchor="t">
-            <a:normAutofit lnSpcReduction="10000"/>
-          </a:bodyPr>
-          <a:lstStyle/>
-          <a:p>
-            <a:pPr marL="0" indent="0" algn="ctr">
-              <a:lnSpc>
-                <a:spcPct val="82000"/>
-              </a:lnSpc>
-              <a:buNone/>
-            </a:pPr>
-            <a:r>
-              <a:rPr lang="en-US" sz="800" dirty="0">
-                <a:solidFill>
-                  <a:srgbClr val="3C3939"/>
-                </a:solidFill>
-                <a:latin typeface="Roboto" pitchFamily="34" charset="0"/>
-                <a:ea typeface="Roboto" pitchFamily="34" charset="-122"/>
-                <a:cs typeface="Roboto" pitchFamily="34" charset="-120"/>
-              </a:rPr>
-              <a:t>System-assigned managed identity</a:t>
-            </a:r>
-            <a:endParaRPr lang="en-US" sz="800" dirty="0"/>
-          </a:p>
-        </p:txBody>
-      </p:sp>
-      <p:sp>
-        <p:nvSpPr>
-          <p:cNvPr id="16" name="Shape 13"/>
-          <p:cNvSpPr/>
-          <p:nvPr/>
-        </p:nvSpPr>
-        <p:spPr>
-          <a:xfrm>
-            <a:off x="1744414" y="3834036"/>
-            <a:ext cx="1378297" cy="743620"/>
-          </a:xfrm>
-          <a:prstGeom prst="roundRect">
-            <a:avLst>
-              <a:gd name="adj" fmla="val 4629"/>
-            </a:avLst>
-          </a:prstGeom>
-          <a:solidFill>
-            <a:srgbClr val="E1E1EA"/>
-          </a:solidFill>
-          <a:ln w="4763">
-            <a:solidFill>
-              <a:srgbClr val="C7C7D0"/>
-            </a:solidFill>
-            <a:prstDash val="solid"/>
-          </a:ln>
-        </p:spPr>
-      </p:sp>
-      <p:sp>
-        <p:nvSpPr>
-          <p:cNvPr id="17" name="Text 14"/>
-          <p:cNvSpPr/>
-          <p:nvPr/>
-        </p:nvSpPr>
-        <p:spPr>
-          <a:xfrm>
-            <a:off x="1831107" y="3920728"/>
-            <a:ext cx="1024458" cy="128067"/>
-          </a:xfrm>
-          <a:prstGeom prst="rect">
-            <a:avLst/>
-          </a:prstGeom>
-          <a:noFill/>
-          <a:ln/>
-        </p:spPr>
-        <p:txBody>
-          <a:bodyPr wrap="none" lIns="0" tIns="0" rIns="0" bIns="0" rtlCol="0" anchor="t"/>
-          <a:lstStyle/>
-          <a:p>
-            <a:pPr marL="0" indent="0" algn="l">
-              <a:lnSpc>
-                <a:spcPct val="104000"/>
-              </a:lnSpc>
-              <a:buNone/>
-            </a:pPr>
-            <a:r>
-              <a:rPr lang="en-US" sz="800" dirty="0">
-                <a:solidFill>
-                  <a:srgbClr val="3C3939"/>
-                </a:solidFill>
-                <a:latin typeface="Raleway" pitchFamily="34" charset="0"/>
-                <a:ea typeface="Raleway" pitchFamily="34" charset="-122"/>
-                <a:cs typeface="Raleway" pitchFamily="34" charset="-120"/>
-              </a:rPr>
-              <a:t>Network Security</a:t>
-            </a:r>
-            <a:endParaRPr lang="en-US" sz="800" dirty="0"/>
-          </a:p>
-        </p:txBody>
-      </p:sp>
-      <p:sp>
-        <p:nvSpPr>
-          <p:cNvPr id="18" name="Text 15"/>
-          <p:cNvSpPr/>
-          <p:nvPr/>
-        </p:nvSpPr>
-        <p:spPr>
-          <a:xfrm>
-            <a:off x="1831107" y="4077221"/>
-            <a:ext cx="1204913" cy="310307"/>
-          </a:xfrm>
-          <a:prstGeom prst="rect">
-            <a:avLst/>
-          </a:prstGeom>
-          <a:noFill/>
-          <a:ln/>
-        </p:spPr>
-        <p:txBody>
-          <a:bodyPr wrap="square" lIns="0" tIns="0" rIns="0" bIns="0" rtlCol="0" anchor="t">
-            <a:normAutofit/>
-          </a:bodyPr>
-          <a:lstStyle/>
-          <a:p>
-            <a:pPr marL="0" indent="0" algn="l">
-              <a:lnSpc>
-                <a:spcPct val="105000"/>
-              </a:lnSpc>
-              <a:buNone/>
-            </a:pPr>
-            <a:r>
-              <a:rPr lang="en-US" sz="600" dirty="0">
-                <a:solidFill>
-                  <a:srgbClr val="3C3939"/>
-                </a:solidFill>
-                <a:latin typeface="Roboto" pitchFamily="34" charset="0"/>
-                <a:ea typeface="Roboto" pitchFamily="34" charset="-122"/>
-                <a:cs typeface="Roboto" pitchFamily="34" charset="-120"/>
-              </a:rPr>
-              <a:t>Private endpoints for data services · NSGs on subnets · No public DB access</a:t>
-            </a:r>
-            <a:endParaRPr lang="en-US" sz="600" dirty="0"/>
-          </a:p>
-        </p:txBody>
-      </p:sp>
-      <p:sp>
-        <p:nvSpPr>
-          <p:cNvPr id="19" name="Shape 16"/>
-          <p:cNvSpPr/>
-          <p:nvPr/>
-        </p:nvSpPr>
-        <p:spPr>
-          <a:xfrm>
-            <a:off x="3170039" y="3834036"/>
-            <a:ext cx="1378297" cy="743620"/>
-          </a:xfrm>
-          <a:prstGeom prst="roundRect">
-            <a:avLst>
-              <a:gd name="adj" fmla="val 4629"/>
-            </a:avLst>
-          </a:prstGeom>
-          <a:solidFill>
-            <a:srgbClr val="E1E1EA"/>
-          </a:solidFill>
-          <a:ln w="4763">
-            <a:solidFill>
-              <a:srgbClr val="C7C7D0"/>
-            </a:solidFill>
-            <a:prstDash val="solid"/>
-          </a:ln>
-        </p:spPr>
-      </p:sp>
-      <p:sp>
-        <p:nvSpPr>
-          <p:cNvPr id="20" name="Text 17"/>
-          <p:cNvSpPr/>
-          <p:nvPr/>
-        </p:nvSpPr>
-        <p:spPr>
-          <a:xfrm>
-            <a:off x="3256731" y="3920728"/>
-            <a:ext cx="1024458" cy="128067"/>
-          </a:xfrm>
-          <a:prstGeom prst="rect">
-            <a:avLst/>
-          </a:prstGeom>
-          <a:noFill/>
-          <a:ln/>
-        </p:spPr>
-        <p:txBody>
-          <a:bodyPr wrap="none" lIns="0" tIns="0" rIns="0" bIns="0" rtlCol="0" anchor="t"/>
-          <a:lstStyle/>
-          <a:p>
-            <a:pPr marL="0" indent="0" algn="l">
-              <a:lnSpc>
-                <a:spcPct val="104000"/>
-              </a:lnSpc>
-              <a:buNone/>
-            </a:pPr>
-            <a:r>
-              <a:rPr lang="en-US" sz="800" dirty="0">
-                <a:solidFill>
-                  <a:srgbClr val="3C3939"/>
-                </a:solidFill>
-                <a:latin typeface="Raleway" pitchFamily="34" charset="0"/>
-                <a:ea typeface="Raleway" pitchFamily="34" charset="-122"/>
-                <a:cs typeface="Raleway" pitchFamily="34" charset="-120"/>
-              </a:rPr>
-              <a:t>Identity &amp; Access</a:t>
-            </a:r>
-            <a:endParaRPr lang="en-US" sz="800" dirty="0"/>
-          </a:p>
-        </p:txBody>
-      </p:sp>
-      <p:sp>
-        <p:nvSpPr>
-          <p:cNvPr id="21" name="Text 18"/>
-          <p:cNvSpPr/>
-          <p:nvPr/>
-        </p:nvSpPr>
-        <p:spPr>
-          <a:xfrm>
-            <a:off x="3256731" y="4077221"/>
-            <a:ext cx="1204913" cy="310307"/>
-          </a:xfrm>
-          <a:prstGeom prst="rect">
-            <a:avLst/>
-          </a:prstGeom>
-          <a:noFill/>
-          <a:ln/>
-        </p:spPr>
-        <p:txBody>
-          <a:bodyPr wrap="square" lIns="0" tIns="0" rIns="0" bIns="0" rtlCol="0" anchor="t">
-            <a:normAutofit/>
-          </a:bodyPr>
-          <a:lstStyle/>
-          <a:p>
-            <a:pPr marL="0" indent="0" algn="l">
-              <a:lnSpc>
-                <a:spcPct val="105000"/>
-              </a:lnSpc>
-              <a:buNone/>
-            </a:pPr>
-            <a:r>
-              <a:rPr lang="en-US" sz="600" dirty="0">
-                <a:solidFill>
-                  <a:srgbClr val="3C3939"/>
-                </a:solidFill>
-                <a:latin typeface="Roboto" pitchFamily="34" charset="0"/>
-                <a:ea typeface="Roboto" pitchFamily="34" charset="-122"/>
-                <a:cs typeface="Roboto" pitchFamily="34" charset="-120"/>
-              </a:rPr>
-              <a:t>Azure RBAC, system‑assigned managed identities, least‑privilege assignments</a:t>
-            </a:r>
-            <a:endParaRPr lang="en-US" sz="600" dirty="0"/>
-          </a:p>
-        </p:txBody>
-      </p:sp>
-      <p:sp>
-        <p:nvSpPr>
-          <p:cNvPr id="22" name="Shape 19"/>
-          <p:cNvSpPr/>
-          <p:nvPr/>
-        </p:nvSpPr>
-        <p:spPr>
-          <a:xfrm>
-            <a:off x="4595664" y="3834036"/>
-            <a:ext cx="1378297" cy="743620"/>
-          </a:xfrm>
-          <a:prstGeom prst="roundRect">
-            <a:avLst>
-              <a:gd name="adj" fmla="val 4629"/>
-            </a:avLst>
-          </a:prstGeom>
-          <a:solidFill>
-            <a:srgbClr val="E1E1EA"/>
-          </a:solidFill>
-          <a:ln w="4763">
-            <a:solidFill>
-              <a:srgbClr val="C7C7D0"/>
-            </a:solidFill>
-            <a:prstDash val="solid"/>
-          </a:ln>
-        </p:spPr>
-      </p:sp>
-      <p:sp>
-        <p:nvSpPr>
-          <p:cNvPr id="23" name="Text 20"/>
-          <p:cNvSpPr/>
-          <p:nvPr/>
-        </p:nvSpPr>
-        <p:spPr>
-          <a:xfrm>
-            <a:off x="4682356" y="3920728"/>
-            <a:ext cx="1024458" cy="128067"/>
-          </a:xfrm>
-          <a:prstGeom prst="rect">
-            <a:avLst/>
-          </a:prstGeom>
-          <a:noFill/>
-          <a:ln/>
-        </p:spPr>
-        <p:txBody>
-          <a:bodyPr wrap="none" lIns="0" tIns="0" rIns="0" bIns="0" rtlCol="0" anchor="t"/>
-          <a:lstStyle/>
-          <a:p>
-            <a:pPr marL="0" indent="0" algn="l">
-              <a:lnSpc>
-                <a:spcPct val="104000"/>
-              </a:lnSpc>
-              <a:buNone/>
-            </a:pPr>
-            <a:r>
-              <a:rPr lang="en-US" sz="800" dirty="0">
-                <a:solidFill>
-                  <a:srgbClr val="3C3939"/>
-                </a:solidFill>
-                <a:latin typeface="Raleway" pitchFamily="34" charset="0"/>
-                <a:ea typeface="Raleway" pitchFamily="34" charset="-122"/>
-                <a:cs typeface="Raleway" pitchFamily="34" charset="-120"/>
-              </a:rPr>
-              <a:t>Application Security</a:t>
-            </a:r>
-            <a:endParaRPr lang="en-US" sz="800" dirty="0"/>
-          </a:p>
-        </p:txBody>
-      </p:sp>
-      <p:sp>
-        <p:nvSpPr>
-          <p:cNvPr id="24" name="Text 21"/>
-          <p:cNvSpPr/>
-          <p:nvPr/>
-        </p:nvSpPr>
-        <p:spPr>
-          <a:xfrm>
-            <a:off x="4682356" y="4077221"/>
-            <a:ext cx="1204913" cy="206871"/>
-          </a:xfrm>
-          <a:prstGeom prst="rect">
-            <a:avLst/>
-          </a:prstGeom>
-          <a:noFill/>
-          <a:ln/>
-        </p:spPr>
-        <p:txBody>
-          <a:bodyPr wrap="square" lIns="0" tIns="0" rIns="0" bIns="0" rtlCol="0" anchor="t">
-            <a:normAutofit/>
-          </a:bodyPr>
-          <a:lstStyle/>
-          <a:p>
-            <a:pPr marL="0" indent="0" algn="l">
-              <a:lnSpc>
-                <a:spcPct val="105000"/>
-              </a:lnSpc>
-              <a:buNone/>
-            </a:pPr>
-            <a:r>
-              <a:rPr lang="en-US" sz="600" dirty="0">
-                <a:solidFill>
-                  <a:srgbClr val="3C3939"/>
-                </a:solidFill>
-                <a:latin typeface="Roboto" pitchFamily="34" charset="0"/>
-                <a:ea typeface="Roboto" pitchFamily="34" charset="-122"/>
-                <a:cs typeface="Roboto" pitchFamily="34" charset="-120"/>
-              </a:rPr>
-              <a:t>WAF v2 (OWASP rules), TLS 1.2+, monitoring &amp; alerts</a:t>
-            </a:r>
-            <a:endParaRPr lang="en-US" sz="600" dirty="0"/>
-          </a:p>
-        </p:txBody>
-      </p:sp>
-      <p:sp>
-        <p:nvSpPr>
-          <p:cNvPr id="25" name="Shape 22"/>
-          <p:cNvSpPr/>
-          <p:nvPr/>
-        </p:nvSpPr>
-        <p:spPr>
-          <a:xfrm>
-            <a:off x="6021288" y="3834036"/>
-            <a:ext cx="1378297" cy="743620"/>
-          </a:xfrm>
-          <a:prstGeom prst="roundRect">
-            <a:avLst>
-              <a:gd name="adj" fmla="val 4629"/>
-            </a:avLst>
-          </a:prstGeom>
-          <a:solidFill>
-            <a:srgbClr val="E1E1EA"/>
-          </a:solidFill>
-          <a:ln w="4763">
-            <a:solidFill>
-              <a:srgbClr val="C7C7D0"/>
-            </a:solidFill>
-            <a:prstDash val="solid"/>
-          </a:ln>
-        </p:spPr>
-      </p:sp>
-      <p:sp>
-        <p:nvSpPr>
-          <p:cNvPr id="26" name="Text 23"/>
-          <p:cNvSpPr/>
-          <p:nvPr/>
-        </p:nvSpPr>
-        <p:spPr>
-          <a:xfrm>
-            <a:off x="6107981" y="3920728"/>
-            <a:ext cx="1024458" cy="128067"/>
-          </a:xfrm>
-          <a:prstGeom prst="rect">
-            <a:avLst/>
-          </a:prstGeom>
-          <a:noFill/>
-          <a:ln/>
-        </p:spPr>
-        <p:txBody>
-          <a:bodyPr wrap="none" lIns="0" tIns="0" rIns="0" bIns="0" rtlCol="0" anchor="t"/>
-          <a:lstStyle/>
-          <a:p>
-            <a:pPr marL="0" indent="0" algn="l">
-              <a:lnSpc>
-                <a:spcPct val="104000"/>
-              </a:lnSpc>
-              <a:buNone/>
-            </a:pPr>
-            <a:r>
-              <a:rPr lang="en-US" sz="800" dirty="0">
-                <a:solidFill>
-                  <a:srgbClr val="3C3939"/>
-                </a:solidFill>
-                <a:latin typeface="Raleway" pitchFamily="34" charset="0"/>
-                <a:ea typeface="Raleway" pitchFamily="34" charset="-122"/>
-                <a:cs typeface="Raleway" pitchFamily="34" charset="-120"/>
-              </a:rPr>
-              <a:t>Secrets</a:t>
-            </a:r>
-            <a:endParaRPr lang="en-US" sz="800" dirty="0"/>
-          </a:p>
-        </p:txBody>
-      </p:sp>
-      <p:sp>
-        <p:nvSpPr>
-          <p:cNvPr id="27" name="Text 24"/>
-          <p:cNvSpPr/>
-          <p:nvPr/>
-        </p:nvSpPr>
-        <p:spPr>
-          <a:xfrm>
-            <a:off x="6107981" y="4077221"/>
-            <a:ext cx="1204913" cy="413742"/>
-          </a:xfrm>
-          <a:prstGeom prst="rect">
-            <a:avLst/>
-          </a:prstGeom>
-          <a:noFill/>
-          <a:ln/>
-        </p:spPr>
-        <p:txBody>
-          <a:bodyPr wrap="square" lIns="0" tIns="0" rIns="0" bIns="0" rtlCol="0" anchor="t">
-            <a:normAutofit/>
-          </a:bodyPr>
-          <a:lstStyle/>
-          <a:p>
-            <a:pPr marL="0" indent="0" algn="l">
-              <a:lnSpc>
-                <a:spcPct val="105000"/>
-              </a:lnSpc>
-              <a:buNone/>
-            </a:pPr>
-            <a:r>
-              <a:rPr lang="en-US" sz="600" dirty="0">
-                <a:solidFill>
-                  <a:srgbClr val="3C3939"/>
-                </a:solidFill>
-                <a:latin typeface="Roboto" pitchFamily="34" charset="0"/>
-                <a:ea typeface="Roboto" pitchFamily="34" charset="-122"/>
-                <a:cs typeface="Roboto" pitchFamily="34" charset="-120"/>
-              </a:rPr>
-              <a:t>All secrets in Key Vault · auto‑generated passwords (random_password) · soft delete &amp; purge protection</a:t>
-            </a:r>
-            <a:endParaRPr lang="en-US" sz="600" dirty="0"/>
-          </a:p>
-        </p:txBody>
-      </p:sp>
-      <p:sp>
-        <p:nvSpPr>
-          <p:cNvPr id="28" name="Shape 25"/>
-          <p:cNvSpPr/>
-          <p:nvPr/>
-        </p:nvSpPr>
-        <p:spPr>
-          <a:xfrm>
-            <a:off x="1744414" y="4630936"/>
-            <a:ext cx="5655171" cy="229642"/>
-          </a:xfrm>
-          <a:prstGeom prst="roundRect">
-            <a:avLst>
-              <a:gd name="adj" fmla="val 14990"/>
-            </a:avLst>
-          </a:prstGeom>
-          <a:solidFill>
-            <a:srgbClr val="FFB3B4"/>
-          </a:solidFill>
-          <a:ln/>
-        </p:spPr>
-      </p:sp>
-      <p:pic>
-        <p:nvPicPr>
-          <p:cNvPr id="29" name="Image 1" descr="preencoded.png"/>
-          <p:cNvPicPr>
-            <a:picLocks noChangeAspect="1"/>
-          </p:cNvPicPr>
-          <p:nvPr/>
-        </p:nvPicPr>
-        <p:blipFill>
-          <a:blip r:embed="rId4"/>
-          <a:stretch>
-            <a:fillRect/>
-          </a:stretch>
-        </p:blipFill>
-        <p:spPr>
-          <a:xfrm>
-            <a:off x="1826344" y="4733330"/>
-            <a:ext cx="102394" cy="81930"/>
-          </a:xfrm>
-          <a:prstGeom prst="rect">
-            <a:avLst/>
-          </a:prstGeom>
-        </p:spPr>
-      </p:pic>
-      <p:sp>
-        <p:nvSpPr>
-          <p:cNvPr id="30" name="Text 26"/>
-          <p:cNvSpPr/>
-          <p:nvPr/>
-        </p:nvSpPr>
-        <p:spPr>
-          <a:xfrm>
-            <a:off x="2010668" y="4694039"/>
-            <a:ext cx="5764188" cy="103436"/>
-          </a:xfrm>
-          <a:prstGeom prst="rect">
-            <a:avLst/>
-          </a:prstGeom>
-          <a:noFill/>
-          <a:ln/>
-        </p:spPr>
-        <p:txBody>
-          <a:bodyPr wrap="none" lIns="0" tIns="0" rIns="0" bIns="0" rtlCol="0" anchor="t"/>
-          <a:lstStyle/>
-          <a:p>
-            <a:pPr marL="0" indent="0" algn="l">
-              <a:lnSpc>
-                <a:spcPct val="105000"/>
-              </a:lnSpc>
-              <a:buNone/>
-            </a:pPr>
-            <a:r>
-              <a:rPr lang="en-US" sz="600" dirty="0">
-                <a:solidFill>
-                  <a:srgbClr val="000000"/>
-                </a:solidFill>
-                <a:latin typeface="Roboto" pitchFamily="34" charset="0"/>
-                <a:ea typeface="Roboto" pitchFamily="34" charset="-122"/>
-                <a:cs typeface="Roboto" pitchFamily="34" charset="-120"/>
-              </a:rPr>
-              <a:t>Clahan Academy | Vignesh | 9/10</a:t>
-            </a:r>
-            <a:endParaRPr lang="en-US" sz="600" dirty="0"/>
+            <a:endParaRPr lang="en-US" sz="1200" dirty="0">
+              <a:latin typeface="Times New Roman" panose="02020603050405020304" pitchFamily="18" charset="0"/>
+              <a:cs typeface="Times New Roman" panose="02020603050405020304" pitchFamily="18" charset="0"/>
+            </a:endParaRPr>
           </a:p>
         </p:txBody>
       </p:sp>
